--- a/apresentacao-coremotiom/CoreMotiom-apresentacao.pptx
+++ b/apresentacao-coremotiom/CoreMotiom-apresentacao.pptx
@@ -19,6 +19,7 @@
     <p:sldId id="267" r:id="rId18"/>
     <p:sldId id="268" r:id="rId19"/>
     <p:sldId id="269" r:id="rId20"/>
+    <p:sldId id="270" r:id="rId21"/>
   </p:sldIdLst>
   <p:sldSz cx="12191695" cy="6858000" type="screen4x3"/>
   <p:notesSz cx="6858000" cy="9144000"/>
@@ -3346,20 +3347,12 @@
         <p:nvPr/>
       </p:nvGrpSpPr>
       <p:grpSpPr/>
-      <p:pic>
-        <p:nvPicPr>
-          <p:cNvPr id="2" name="Picture 1" descr="capa-tinta-fluido.jpg"/>
-          <p:cNvPicPr>
-            <a:picLocks noChangeAspect="1"/>
-          </p:cNvPicPr>
+      <p:sp>
+        <p:nvSpPr>
+          <p:cNvPr id="2" name="Rectangle 1"/>
+          <p:cNvSpPr/>
           <p:nvPr/>
-        </p:nvPicPr>
-        <p:blipFill>
-          <a:blip r:embed="rId2"/>
-          <a:stretch>
-            <a:fillRect/>
-          </a:stretch>
-        </p:blipFill>
+        </p:nvSpPr>
         <p:spPr>
           <a:xfrm>
             <a:off x="0" y="0"/>
@@ -3368,32 +3361,11 @@
           <a:prstGeom prst="rect">
             <a:avLst/>
           </a:prstGeom>
-        </p:spPr>
-      </p:pic>
-      <p:sp>
-        <p:nvSpPr>
-          <p:cNvPr id="3" name="Rectangle 2"/>
-          <p:cNvSpPr/>
-          <p:nvPr/>
-        </p:nvSpPr>
-        <p:spPr>
-          <a:xfrm>
-            <a:off x="0" y="0"/>
-            <a:ext cx="7863840" cy="6858000"/>
-          </a:xfrm>
-          <a:prstGeom prst="rect">
-            <a:avLst/>
-          </a:prstGeom>
           <a:gradFill rotWithShape="1">
             <a:gsLst>
               <a:gs pos="0">
                 <a:srgbClr val="0B0C10">
-                  <a:alpha val="96000"/>
-                </a:srgbClr>
-              </a:gs>
-              <a:gs pos="55000">
-                <a:srgbClr val="0B0C10">
-                  <a:alpha val="70000"/>
+                  <a:alpha val="0"/>
                 </a:srgbClr>
               </a:gs>
               <a:gs pos="100000">
@@ -3433,21 +3405,21 @@
       </p:sp>
       <p:sp>
         <p:nvSpPr>
-          <p:cNvPr id="4" name="Oval 3"/>
+          <p:cNvPr id="3" name="Oval 2"/>
           <p:cNvSpPr/>
           <p:nvPr/>
         </p:nvSpPr>
         <p:spPr>
           <a:xfrm>
-            <a:off x="8412480" y="-1463040"/>
-            <a:ext cx="4754880" cy="4754880"/>
+            <a:off x="7680960" y="-822960"/>
+            <a:ext cx="5852160" cy="5852160"/>
           </a:xfrm>
           <a:prstGeom prst="ellipse">
             <a:avLst/>
           </a:prstGeom>
           <a:solidFill>
             <a:srgbClr val="E50914">
-              <a:alpha val="8000"/>
+              <a:alpha val="9000"/>
             </a:srgbClr>
           </a:solidFill>
           <a:ln>
@@ -3479,7 +3451,7 @@
       </p:sp>
       <p:sp>
         <p:nvSpPr>
-          <p:cNvPr id="5" name="Rounded Rectangle 4"/>
+          <p:cNvPr id="4" name="Rounded Rectangle 3"/>
           <p:cNvSpPr/>
           <p:nvPr/>
         </p:nvSpPr>
@@ -3543,14 +3515,14 @@
       </p:sp>
       <p:sp>
         <p:nvSpPr>
-          <p:cNvPr id="6" name="TextBox 5"/>
+          <p:cNvPr id="5" name="TextBox 4"/>
           <p:cNvSpPr txBox="1"/>
           <p:nvPr/>
         </p:nvSpPr>
         <p:spPr>
           <a:xfrm>
             <a:off x="658368" y="2057400"/>
-            <a:ext cx="7315200" cy="1554480"/>
+            <a:ext cx="6400800" cy="1554480"/>
           </a:xfrm>
           <a:prstGeom prst="rect">
             <a:avLst/>
@@ -3585,14 +3557,14 @@
       </p:sp>
       <p:sp>
         <p:nvSpPr>
-          <p:cNvPr id="7" name="TextBox 6"/>
+          <p:cNvPr id="6" name="TextBox 5"/>
           <p:cNvSpPr txBox="1"/>
           <p:nvPr/>
         </p:nvSpPr>
         <p:spPr>
           <a:xfrm>
             <a:off x="731520" y="3611880"/>
-            <a:ext cx="6035040" cy="914400"/>
+            <a:ext cx="5669280" cy="914400"/>
           </a:xfrm>
           <a:prstGeom prst="rect">
             <a:avLst/>
@@ -3627,7 +3599,7 @@
       </p:sp>
       <p:sp>
         <p:nvSpPr>
-          <p:cNvPr id="8" name="Rectangle 7"/>
+          <p:cNvPr id="7" name="Rectangle 6"/>
           <p:cNvSpPr/>
           <p:nvPr/>
         </p:nvSpPr>
@@ -3671,14 +3643,14 @@
       </p:sp>
       <p:sp>
         <p:nvSpPr>
-          <p:cNvPr id="9" name="TextBox 8"/>
+          <p:cNvPr id="8" name="TextBox 7"/>
           <p:cNvSpPr txBox="1"/>
           <p:nvPr/>
         </p:nvSpPr>
         <p:spPr>
           <a:xfrm>
             <a:off x="731520" y="4846320"/>
-            <a:ext cx="6766560" cy="1371600"/>
+            <a:ext cx="6035040" cy="1371600"/>
           </a:xfrm>
           <a:prstGeom prst="rect">
             <a:avLst/>
@@ -3745,6 +3717,292 @@
                 <a:latin typeface="Calibri"/>
               </a:rPr>
               <a:t>Equipe: [nomes em ordem numérica]  ·  Data: [DATA DA APRESENTAÇÃO]</a:t>
+            </a:r>
+          </a:p>
+        </p:txBody>
+      </p:sp>
+      <p:sp>
+        <p:nvSpPr>
+          <p:cNvPr id="9" name="Oval 8"/>
+          <p:cNvSpPr/>
+          <p:nvPr/>
+        </p:nvSpPr>
+        <p:spPr>
+          <a:xfrm>
+            <a:off x="7223759" y="1371600"/>
+            <a:ext cx="4480560" cy="4480560"/>
+          </a:xfrm>
+          <a:prstGeom prst="ellipse">
+            <a:avLst/>
+          </a:prstGeom>
+          <a:noFill/>
+          <a:ln w="12700">
+            <a:solidFill>
+              <a:srgbClr val="272C3D"/>
+            </a:solidFill>
+          </a:ln>
+          <a:effectLst/>
+        </p:spPr>
+        <p:style>
+          <a:lnRef idx="1">
+            <a:schemeClr val="accent1"/>
+          </a:lnRef>
+          <a:fillRef idx="3">
+            <a:schemeClr val="accent1"/>
+          </a:fillRef>
+          <a:effectRef idx="2">
+            <a:schemeClr val="accent1"/>
+          </a:effectRef>
+          <a:fontRef idx="minor">
+            <a:schemeClr val="lt1"/>
+          </a:fontRef>
+        </p:style>
+        <p:txBody>
+          <a:bodyPr rtlCol="0" anchor="ctr"/>
+          <a:lstStyle/>
+          <a:p>
+            <a:pPr algn="ctr"/>
+          </a:p>
+        </p:txBody>
+      </p:sp>
+      <p:pic>
+        <p:nvPicPr>
+          <p:cNvPr id="10" name="Picture 9" descr="capa-tinta-fluido.jpg"/>
+          <p:cNvPicPr>
+            <a:picLocks noChangeAspect="1"/>
+          </p:cNvPicPr>
+          <p:nvPr/>
+        </p:nvPicPr>
+        <p:blipFill>
+          <a:blip r:embed="rId2"/>
+          <a:srcRect r="50000" b="38300"/>
+          <a:stretch>
+            <a:fillRect/>
+          </a:stretch>
+        </p:blipFill>
+        <p:spPr>
+          <a:xfrm>
+            <a:off x="8755380" y="882396"/>
+            <a:ext cx="1417320" cy="978408"/>
+          </a:xfrm>
+          <a:prstGeom prst="rect">
+            <a:avLst/>
+          </a:prstGeom>
+        </p:spPr>
+      </p:pic>
+      <p:pic>
+        <p:nvPicPr>
+          <p:cNvPr id="11" name="Picture 10" descr="capa-tinta-fluido.jpg"/>
+          <p:cNvPicPr>
+            <a:picLocks noChangeAspect="1"/>
+          </p:cNvPicPr>
+          <p:nvPr/>
+        </p:nvPicPr>
+        <p:blipFill>
+          <a:blip r:embed="rId2"/>
+          <a:srcRect l="25000" r="25000" t="38300"/>
+          <a:stretch>
+            <a:fillRect/>
+          </a:stretch>
+        </p:blipFill>
+        <p:spPr>
+          <a:xfrm rot="2700000">
+            <a:off x="10339497" y="1538558"/>
+            <a:ext cx="1417320" cy="978408"/>
+          </a:xfrm>
+          <a:prstGeom prst="rect">
+            <a:avLst/>
+          </a:prstGeom>
+        </p:spPr>
+      </p:pic>
+      <p:pic>
+        <p:nvPicPr>
+          <p:cNvPr id="12" name="Picture 11" descr="capa-tinta-fluido.jpg"/>
+          <p:cNvPicPr>
+            <a:picLocks noChangeAspect="1"/>
+          </p:cNvPicPr>
+          <p:nvPr/>
+        </p:nvPicPr>
+        <p:blipFill>
+          <a:blip r:embed="rId2"/>
+          <a:srcRect l="50000" b="38300"/>
+          <a:stretch>
+            <a:fillRect/>
+          </a:stretch>
+        </p:blipFill>
+        <p:spPr>
+          <a:xfrm rot="5400000">
+            <a:off x="10995660" y="3122676"/>
+            <a:ext cx="1417320" cy="978408"/>
+          </a:xfrm>
+          <a:prstGeom prst="rect">
+            <a:avLst/>
+          </a:prstGeom>
+        </p:spPr>
+      </p:pic>
+      <p:pic>
+        <p:nvPicPr>
+          <p:cNvPr id="13" name="Picture 12" descr="capa-tinta-fluido.jpg"/>
+          <p:cNvPicPr>
+            <a:picLocks noChangeAspect="1"/>
+          </p:cNvPicPr>
+          <p:nvPr/>
+        </p:nvPicPr>
+        <p:blipFill>
+          <a:blip r:embed="rId2"/>
+          <a:srcRect r="50000" t="38300"/>
+          <a:stretch>
+            <a:fillRect/>
+          </a:stretch>
+        </p:blipFill>
+        <p:spPr>
+          <a:xfrm rot="8100000">
+            <a:off x="10339497" y="4706793"/>
+            <a:ext cx="1417320" cy="978408"/>
+          </a:xfrm>
+          <a:prstGeom prst="rect">
+            <a:avLst/>
+          </a:prstGeom>
+        </p:spPr>
+      </p:pic>
+      <p:pic>
+        <p:nvPicPr>
+          <p:cNvPr id="14" name="Picture 13" descr="capa-tinta-fluido.jpg"/>
+          <p:cNvPicPr>
+            <a:picLocks noChangeAspect="1"/>
+          </p:cNvPicPr>
+          <p:nvPr/>
+        </p:nvPicPr>
+        <p:blipFill>
+          <a:blip r:embed="rId2"/>
+          <a:srcRect l="25000" r="25000" b="38300"/>
+          <a:stretch>
+            <a:fillRect/>
+          </a:stretch>
+        </p:blipFill>
+        <p:spPr>
+          <a:xfrm rot="10800000">
+            <a:off x="8755380" y="5362956"/>
+            <a:ext cx="1417320" cy="978408"/>
+          </a:xfrm>
+          <a:prstGeom prst="rect">
+            <a:avLst/>
+          </a:prstGeom>
+        </p:spPr>
+      </p:pic>
+      <p:pic>
+        <p:nvPicPr>
+          <p:cNvPr id="15" name="Picture 14" descr="capa-tinta-fluido.jpg"/>
+          <p:cNvPicPr>
+            <a:picLocks noChangeAspect="1"/>
+          </p:cNvPicPr>
+          <p:nvPr/>
+        </p:nvPicPr>
+        <p:blipFill>
+          <a:blip r:embed="rId2"/>
+          <a:srcRect l="50000" t="38300"/>
+          <a:stretch>
+            <a:fillRect/>
+          </a:stretch>
+        </p:blipFill>
+        <p:spPr>
+          <a:xfrm rot="13500000">
+            <a:off x="7171262" y="4706793"/>
+            <a:ext cx="1417320" cy="978408"/>
+          </a:xfrm>
+          <a:prstGeom prst="rect">
+            <a:avLst/>
+          </a:prstGeom>
+        </p:spPr>
+      </p:pic>
+      <p:pic>
+        <p:nvPicPr>
+          <p:cNvPr id="16" name="Picture 15" descr="capa-tinta-fluido.jpg"/>
+          <p:cNvPicPr>
+            <a:picLocks noChangeAspect="1"/>
+          </p:cNvPicPr>
+          <p:nvPr/>
+        </p:nvPicPr>
+        <p:blipFill>
+          <a:blip r:embed="rId2"/>
+          <a:srcRect r="50000" b="38300"/>
+          <a:stretch>
+            <a:fillRect/>
+          </a:stretch>
+        </p:blipFill>
+        <p:spPr>
+          <a:xfrm rot="16200000">
+            <a:off x="6515099" y="3122676"/>
+            <a:ext cx="1417320" cy="978408"/>
+          </a:xfrm>
+          <a:prstGeom prst="rect">
+            <a:avLst/>
+          </a:prstGeom>
+        </p:spPr>
+      </p:pic>
+      <p:pic>
+        <p:nvPicPr>
+          <p:cNvPr id="17" name="Picture 16" descr="capa-tinta-fluido.jpg"/>
+          <p:cNvPicPr>
+            <a:picLocks noChangeAspect="1"/>
+          </p:cNvPicPr>
+          <p:nvPr/>
+        </p:nvPicPr>
+        <p:blipFill>
+          <a:blip r:embed="rId2"/>
+          <a:srcRect l="25000" r="25000" t="38300"/>
+          <a:stretch>
+            <a:fillRect/>
+          </a:stretch>
+        </p:blipFill>
+        <p:spPr>
+          <a:xfrm rot="18900000">
+            <a:off x="7171262" y="1538558"/>
+            <a:ext cx="1417320" cy="978408"/>
+          </a:xfrm>
+          <a:prstGeom prst="rect">
+            <a:avLst/>
+          </a:prstGeom>
+        </p:spPr>
+      </p:pic>
+      <p:sp>
+        <p:nvSpPr>
+          <p:cNvPr id="18" name="TextBox 17"/>
+          <p:cNvSpPr txBox="1"/>
+          <p:nvPr/>
+        </p:nvSpPr>
+        <p:spPr>
+          <a:xfrm>
+            <a:off x="8366760" y="3246120"/>
+            <a:ext cx="2194560" cy="731520"/>
+          </a:xfrm>
+          <a:prstGeom prst="rect">
+            <a:avLst/>
+          </a:prstGeom>
+          <a:noFill/>
+        </p:spPr>
+        <p:txBody>
+          <a:bodyPr wrap="square" anchor="ctr" lIns="45720" rIns="45720" tIns="27432" bIns="27432">
+            <a:spAutoFit/>
+          </a:bodyPr>
+          <a:lstStyle/>
+          <a:p>
+            <a:pPr algn="ctr">
+              <a:lnSpc>
+                <a:spcPct val="100000"/>
+              </a:lnSpc>
+              <a:spcAft>
+                <a:spcPts val="0"/>
+              </a:spcAft>
+            </a:pPr>
+            <a:r>
+              <a:rPr sz="2600" b="1" i="0">
+                <a:solidFill>
+                  <a:srgbClr val="F8FAFC"/>
+                </a:solidFill>
+                <a:latin typeface="Calibri"/>
+              </a:rPr>
+              <a:t>TCC '26</a:t>
             </a:r>
           </a:p>
         </p:txBody>
@@ -3812,13 +4070,36 @@
                                         </p:tgtEl>
                                       </p:cBhvr>
                                     </p:animEffect>
+                                    <p:anim calcmode="lin" valueType="num">
+                                      <p:cBhvr>
+                                        <p:cTn id="14" dur="480" fill="hold"/>
+                                        <p:tgtEl>
+                                          <p:spTgt spid="2"/>
+                                        </p:tgtEl>
+                                        <p:attrNameLst>
+                                          <p:attrName>ppt_y</p:attrName>
+                                        </p:attrNameLst>
+                                      </p:cBhvr>
+                                      <p:tavLst>
+                                        <p:tav tm="0">
+                                          <p:val>
+                                            <p:strVal val="#ppt_y+0.045"/>
+                                          </p:val>
+                                        </p:tav>
+                                        <p:tav tm="100000">
+                                          <p:val>
+                                            <p:strVal val="#ppt_y"/>
+                                          </p:val>
+                                        </p:tav>
+                                      </p:tavLst>
+                                    </p:anim>
                                   </p:childTnLst>
                                 </p:cTn>
                               </p:par>
                               <p:par>
                                 <p:cTn id="15" presetID="10" presetClass="entr" presetSubtype="0" fill="hold" grpId="0" nodeType="withEffect">
                                   <p:stCondLst>
-                                    <p:cond delay="110"/>
+                                    <p:cond delay="105"/>
                                   </p:stCondLst>
                                   <p:childTnLst>
                                     <p:set>
@@ -3876,7 +4157,7 @@
                               <p:par>
                                 <p:cTn id="19" presetID="10" presetClass="entr" presetSubtype="0" fill="hold" grpId="0" nodeType="withEffect">
                                   <p:stCondLst>
-                                    <p:cond delay="220"/>
+                                    <p:cond delay="210"/>
                                   </p:stCondLst>
                                   <p:childTnLst>
                                     <p:set>
@@ -3934,7 +4215,7 @@
                               <p:par>
                                 <p:cTn id="23" presetID="10" presetClass="entr" presetSubtype="0" fill="hold" grpId="0" nodeType="withEffect">
                                   <p:stCondLst>
-                                    <p:cond delay="330"/>
+                                    <p:cond delay="315"/>
                                   </p:stCondLst>
                                   <p:childTnLst>
                                     <p:set>
@@ -3992,7 +4273,7 @@
                               <p:par>
                                 <p:cTn id="27" presetID="10" presetClass="entr" presetSubtype="0" fill="hold" grpId="0" nodeType="withEffect">
                                   <p:stCondLst>
-                                    <p:cond delay="440"/>
+                                    <p:cond delay="420"/>
                                   </p:stCondLst>
                                   <p:childTnLst>
                                     <p:set>
@@ -4050,7 +4331,7 @@
                               <p:par>
                                 <p:cTn id="31" presetID="10" presetClass="entr" presetSubtype="0" fill="hold" grpId="0" nodeType="withEffect">
                                   <p:stCondLst>
-                                    <p:cond delay="550"/>
+                                    <p:cond delay="525"/>
                                   </p:stCondLst>
                                   <p:childTnLst>
                                     <p:set>
@@ -4108,7 +4389,7 @@
                               <p:par>
                                 <p:cTn id="35" presetID="10" presetClass="entr" presetSubtype="0" fill="hold" grpId="0" nodeType="withEffect">
                                   <p:stCondLst>
-                                    <p:cond delay="660"/>
+                                    <p:cond delay="630"/>
                                   </p:stCondLst>
                                   <p:childTnLst>
                                     <p:set>
@@ -4166,7 +4447,7 @@
                               <p:par>
                                 <p:cTn id="39" presetID="10" presetClass="entr" presetSubtype="0" fill="hold" grpId="0" nodeType="withEffect">
                                   <p:stCondLst>
-                                    <p:cond delay="770"/>
+                                    <p:cond delay="735"/>
                                   </p:stCondLst>
                                   <p:childTnLst>
                                     <p:set>
@@ -4200,6 +4481,344 @@
                                         <p:cTn id="42" dur="480" fill="hold"/>
                                         <p:tgtEl>
                                           <p:spTgt spid="9"/>
+                                        </p:tgtEl>
+                                        <p:attrNameLst>
+                                          <p:attrName>ppt_y</p:attrName>
+                                        </p:attrNameLst>
+                                      </p:cBhvr>
+                                      <p:tavLst>
+                                        <p:tav tm="0">
+                                          <p:val>
+                                            <p:strVal val="#ppt_y+0.045"/>
+                                          </p:val>
+                                        </p:tav>
+                                        <p:tav tm="100000">
+                                          <p:val>
+                                            <p:strVal val="#ppt_y"/>
+                                          </p:val>
+                                        </p:tav>
+                                      </p:tavLst>
+                                    </p:anim>
+                                  </p:childTnLst>
+                                </p:cTn>
+                              </p:par>
+                              <p:par>
+                                <p:cTn id="43" presetID="10" presetClass="entr" presetSubtype="0" fill="hold" grpId="0" nodeType="withEffect">
+                                  <p:stCondLst>
+                                    <p:cond delay="840"/>
+                                  </p:stCondLst>
+                                  <p:childTnLst>
+                                    <p:set>
+                                      <p:cBhvr>
+                                        <p:cTn id="44" dur="1" fill="hold">
+                                          <p:stCondLst>
+                                            <p:cond delay="0"/>
+                                          </p:stCondLst>
+                                        </p:cTn>
+                                        <p:tgtEl>
+                                          <p:spTgt spid="10"/>
+                                        </p:tgtEl>
+                                        <p:attrNameLst>
+                                          <p:attrName>style.visibility</p:attrName>
+                                        </p:attrNameLst>
+                                      </p:cBhvr>
+                                      <p:to>
+                                        <p:strVal val="visible"/>
+                                      </p:to>
+                                    </p:set>
+                                    <p:animEffect transition="in" filter="fade">
+                                      <p:cBhvr>
+                                        <p:cTn id="45" dur="480"/>
+                                        <p:tgtEl>
+                                          <p:spTgt spid="10"/>
+                                        </p:tgtEl>
+                                      </p:cBhvr>
+                                    </p:animEffect>
+                                  </p:childTnLst>
+                                </p:cTn>
+                              </p:par>
+                              <p:par>
+                                <p:cTn id="47" presetID="10" presetClass="entr" presetSubtype="0" fill="hold" grpId="0" nodeType="withEffect">
+                                  <p:stCondLst>
+                                    <p:cond delay="945"/>
+                                  </p:stCondLst>
+                                  <p:childTnLst>
+                                    <p:set>
+                                      <p:cBhvr>
+                                        <p:cTn id="48" dur="1" fill="hold">
+                                          <p:stCondLst>
+                                            <p:cond delay="0"/>
+                                          </p:stCondLst>
+                                        </p:cTn>
+                                        <p:tgtEl>
+                                          <p:spTgt spid="11"/>
+                                        </p:tgtEl>
+                                        <p:attrNameLst>
+                                          <p:attrName>style.visibility</p:attrName>
+                                        </p:attrNameLst>
+                                      </p:cBhvr>
+                                      <p:to>
+                                        <p:strVal val="visible"/>
+                                      </p:to>
+                                    </p:set>
+                                    <p:animEffect transition="in" filter="fade">
+                                      <p:cBhvr>
+                                        <p:cTn id="49" dur="480"/>
+                                        <p:tgtEl>
+                                          <p:spTgt spid="11"/>
+                                        </p:tgtEl>
+                                      </p:cBhvr>
+                                    </p:animEffect>
+                                  </p:childTnLst>
+                                </p:cTn>
+                              </p:par>
+                              <p:par>
+                                <p:cTn id="51" presetID="10" presetClass="entr" presetSubtype="0" fill="hold" grpId="0" nodeType="withEffect">
+                                  <p:stCondLst>
+                                    <p:cond delay="1050"/>
+                                  </p:stCondLst>
+                                  <p:childTnLst>
+                                    <p:set>
+                                      <p:cBhvr>
+                                        <p:cTn id="52" dur="1" fill="hold">
+                                          <p:stCondLst>
+                                            <p:cond delay="0"/>
+                                          </p:stCondLst>
+                                        </p:cTn>
+                                        <p:tgtEl>
+                                          <p:spTgt spid="12"/>
+                                        </p:tgtEl>
+                                        <p:attrNameLst>
+                                          <p:attrName>style.visibility</p:attrName>
+                                        </p:attrNameLst>
+                                      </p:cBhvr>
+                                      <p:to>
+                                        <p:strVal val="visible"/>
+                                      </p:to>
+                                    </p:set>
+                                    <p:animEffect transition="in" filter="fade">
+                                      <p:cBhvr>
+                                        <p:cTn id="53" dur="480"/>
+                                        <p:tgtEl>
+                                          <p:spTgt spid="12"/>
+                                        </p:tgtEl>
+                                      </p:cBhvr>
+                                    </p:animEffect>
+                                  </p:childTnLst>
+                                </p:cTn>
+                              </p:par>
+                              <p:par>
+                                <p:cTn id="55" presetID="10" presetClass="entr" presetSubtype="0" fill="hold" grpId="0" nodeType="withEffect">
+                                  <p:stCondLst>
+                                    <p:cond delay="1155"/>
+                                  </p:stCondLst>
+                                  <p:childTnLst>
+                                    <p:set>
+                                      <p:cBhvr>
+                                        <p:cTn id="56" dur="1" fill="hold">
+                                          <p:stCondLst>
+                                            <p:cond delay="0"/>
+                                          </p:stCondLst>
+                                        </p:cTn>
+                                        <p:tgtEl>
+                                          <p:spTgt spid="13"/>
+                                        </p:tgtEl>
+                                        <p:attrNameLst>
+                                          <p:attrName>style.visibility</p:attrName>
+                                        </p:attrNameLst>
+                                      </p:cBhvr>
+                                      <p:to>
+                                        <p:strVal val="visible"/>
+                                      </p:to>
+                                    </p:set>
+                                    <p:animEffect transition="in" filter="fade">
+                                      <p:cBhvr>
+                                        <p:cTn id="57" dur="480"/>
+                                        <p:tgtEl>
+                                          <p:spTgt spid="13"/>
+                                        </p:tgtEl>
+                                      </p:cBhvr>
+                                    </p:animEffect>
+                                  </p:childTnLst>
+                                </p:cTn>
+                              </p:par>
+                              <p:par>
+                                <p:cTn id="59" presetID="10" presetClass="entr" presetSubtype="0" fill="hold" grpId="0" nodeType="withEffect">
+                                  <p:stCondLst>
+                                    <p:cond delay="1260"/>
+                                  </p:stCondLst>
+                                  <p:childTnLst>
+                                    <p:set>
+                                      <p:cBhvr>
+                                        <p:cTn id="60" dur="1" fill="hold">
+                                          <p:stCondLst>
+                                            <p:cond delay="0"/>
+                                          </p:stCondLst>
+                                        </p:cTn>
+                                        <p:tgtEl>
+                                          <p:spTgt spid="14"/>
+                                        </p:tgtEl>
+                                        <p:attrNameLst>
+                                          <p:attrName>style.visibility</p:attrName>
+                                        </p:attrNameLst>
+                                      </p:cBhvr>
+                                      <p:to>
+                                        <p:strVal val="visible"/>
+                                      </p:to>
+                                    </p:set>
+                                    <p:animEffect transition="in" filter="fade">
+                                      <p:cBhvr>
+                                        <p:cTn id="61" dur="480"/>
+                                        <p:tgtEl>
+                                          <p:spTgt spid="14"/>
+                                        </p:tgtEl>
+                                      </p:cBhvr>
+                                    </p:animEffect>
+                                  </p:childTnLst>
+                                </p:cTn>
+                              </p:par>
+                              <p:par>
+                                <p:cTn id="63" presetID="10" presetClass="entr" presetSubtype="0" fill="hold" grpId="0" nodeType="withEffect">
+                                  <p:stCondLst>
+                                    <p:cond delay="1365"/>
+                                  </p:stCondLst>
+                                  <p:childTnLst>
+                                    <p:set>
+                                      <p:cBhvr>
+                                        <p:cTn id="64" dur="1" fill="hold">
+                                          <p:stCondLst>
+                                            <p:cond delay="0"/>
+                                          </p:stCondLst>
+                                        </p:cTn>
+                                        <p:tgtEl>
+                                          <p:spTgt spid="15"/>
+                                        </p:tgtEl>
+                                        <p:attrNameLst>
+                                          <p:attrName>style.visibility</p:attrName>
+                                        </p:attrNameLst>
+                                      </p:cBhvr>
+                                      <p:to>
+                                        <p:strVal val="visible"/>
+                                      </p:to>
+                                    </p:set>
+                                    <p:animEffect transition="in" filter="fade">
+                                      <p:cBhvr>
+                                        <p:cTn id="65" dur="480"/>
+                                        <p:tgtEl>
+                                          <p:spTgt spid="15"/>
+                                        </p:tgtEl>
+                                      </p:cBhvr>
+                                    </p:animEffect>
+                                  </p:childTnLst>
+                                </p:cTn>
+                              </p:par>
+                              <p:par>
+                                <p:cTn id="67" presetID="10" presetClass="entr" presetSubtype="0" fill="hold" grpId="0" nodeType="withEffect">
+                                  <p:stCondLst>
+                                    <p:cond delay="1470"/>
+                                  </p:stCondLst>
+                                  <p:childTnLst>
+                                    <p:set>
+                                      <p:cBhvr>
+                                        <p:cTn id="68" dur="1" fill="hold">
+                                          <p:stCondLst>
+                                            <p:cond delay="0"/>
+                                          </p:stCondLst>
+                                        </p:cTn>
+                                        <p:tgtEl>
+                                          <p:spTgt spid="16"/>
+                                        </p:tgtEl>
+                                        <p:attrNameLst>
+                                          <p:attrName>style.visibility</p:attrName>
+                                        </p:attrNameLst>
+                                      </p:cBhvr>
+                                      <p:to>
+                                        <p:strVal val="visible"/>
+                                      </p:to>
+                                    </p:set>
+                                    <p:animEffect transition="in" filter="fade">
+                                      <p:cBhvr>
+                                        <p:cTn id="69" dur="480"/>
+                                        <p:tgtEl>
+                                          <p:spTgt spid="16"/>
+                                        </p:tgtEl>
+                                      </p:cBhvr>
+                                    </p:animEffect>
+                                  </p:childTnLst>
+                                </p:cTn>
+                              </p:par>
+                              <p:par>
+                                <p:cTn id="71" presetID="10" presetClass="entr" presetSubtype="0" fill="hold" grpId="0" nodeType="withEffect">
+                                  <p:stCondLst>
+                                    <p:cond delay="1575"/>
+                                  </p:stCondLst>
+                                  <p:childTnLst>
+                                    <p:set>
+                                      <p:cBhvr>
+                                        <p:cTn id="72" dur="1" fill="hold">
+                                          <p:stCondLst>
+                                            <p:cond delay="0"/>
+                                          </p:stCondLst>
+                                        </p:cTn>
+                                        <p:tgtEl>
+                                          <p:spTgt spid="17"/>
+                                        </p:tgtEl>
+                                        <p:attrNameLst>
+                                          <p:attrName>style.visibility</p:attrName>
+                                        </p:attrNameLst>
+                                      </p:cBhvr>
+                                      <p:to>
+                                        <p:strVal val="visible"/>
+                                      </p:to>
+                                    </p:set>
+                                    <p:animEffect transition="in" filter="fade">
+                                      <p:cBhvr>
+                                        <p:cTn id="73" dur="480"/>
+                                        <p:tgtEl>
+                                          <p:spTgt spid="17"/>
+                                        </p:tgtEl>
+                                      </p:cBhvr>
+                                    </p:animEffect>
+                                  </p:childTnLst>
+                                </p:cTn>
+                              </p:par>
+                              <p:par>
+                                <p:cTn id="75" presetID="10" presetClass="entr" presetSubtype="0" fill="hold" grpId="0" nodeType="withEffect">
+                                  <p:stCondLst>
+                                    <p:cond delay="1680"/>
+                                  </p:stCondLst>
+                                  <p:childTnLst>
+                                    <p:set>
+                                      <p:cBhvr>
+                                        <p:cTn id="76" dur="1" fill="hold">
+                                          <p:stCondLst>
+                                            <p:cond delay="0"/>
+                                          </p:stCondLst>
+                                        </p:cTn>
+                                        <p:tgtEl>
+                                          <p:spTgt spid="18"/>
+                                        </p:tgtEl>
+                                        <p:attrNameLst>
+                                          <p:attrName>style.visibility</p:attrName>
+                                        </p:attrNameLst>
+                                      </p:cBhvr>
+                                      <p:to>
+                                        <p:strVal val="visible"/>
+                                      </p:to>
+                                    </p:set>
+                                    <p:animEffect transition="in" filter="fade">
+                                      <p:cBhvr>
+                                        <p:cTn id="77" dur="480"/>
+                                        <p:tgtEl>
+                                          <p:spTgt spid="18"/>
+                                        </p:tgtEl>
+                                      </p:cBhvr>
+                                    </p:animEffect>
+                                    <p:anim calcmode="lin" valueType="num">
+                                      <p:cBhvr>
+                                        <p:cTn id="78" dur="480" fill="hold"/>
+                                        <p:tgtEl>
+                                          <p:spTgt spid="18"/>
                                         </p:tgtEl>
                                         <p:attrNameLst>
                                           <p:attrName>ppt_y</p:attrName>
@@ -4249,19 +4868,2159 @@
       </p:par>
     </p:tnLst>
     <p:bldLst>
+      <p:bldP spid="2" grpId="0" animBg="1"/>
       <p:bldP spid="3" grpId="0" animBg="1"/>
       <p:bldP spid="4" grpId="0" animBg="1"/>
-      <p:bldP spid="5" grpId="0" animBg="1"/>
+      <p:bldP spid="5" grpId="0"/>
       <p:bldP spid="6" grpId="0"/>
-      <p:bldP spid="7" grpId="0"/>
-      <p:bldP spid="8" grpId="0" animBg="1"/>
-      <p:bldP spid="9" grpId="0"/>
+      <p:bldP spid="7" grpId="0" animBg="1"/>
+      <p:bldP spid="8" grpId="0"/>
+      <p:bldP spid="9" grpId="0" animBg="1"/>
+      <p:bldP spid="18" grpId="0"/>
     </p:bldLst>
   </p:timing>
 </p:sld>
 </file>
 
 <file path=ppt/slides/slide10.xml><?xml version="1.0" encoding="utf-8"?>
+<p:sld xmlns:a="http://schemas.openxmlformats.org/drawingml/2006/main" xmlns:p="http://schemas.openxmlformats.org/presentationml/2006/main" xmlns:r="http://schemas.openxmlformats.org/officeDocument/2006/relationships">
+  <p:cSld>
+    <p:bg>
+      <p:bgPr>
+        <a:gradFill rotWithShape="1">
+          <a:gsLst>
+            <a:gs pos="0">
+              <a:srgbClr val="121319"/>
+            </a:gs>
+            <a:gs pos="100000">
+              <a:srgbClr val="07080A"/>
+            </a:gs>
+          </a:gsLst>
+          <a:lin scaled="0" ang="16200000"/>
+        </a:gradFill>
+        <a:effectLst/>
+      </p:bgPr>
+    </p:bg>
+    <p:spTree>
+      <p:nvGrpSpPr>
+        <p:cNvPr id="1" name=""/>
+        <p:cNvGrpSpPr/>
+        <p:nvPr/>
+      </p:nvGrpSpPr>
+      <p:grpSpPr/>
+      <p:sp>
+        <p:nvSpPr>
+          <p:cNvPr id="2" name="Rounded Rectangle 1"/>
+          <p:cNvSpPr/>
+          <p:nvPr/>
+        </p:nvSpPr>
+        <p:spPr>
+          <a:xfrm>
+            <a:off x="548640" y="411480"/>
+            <a:ext cx="1321307" cy="329184"/>
+          </a:xfrm>
+          <a:prstGeom prst="roundRect">
+            <a:avLst>
+              <a:gd name="adj" fmla="val 50000"/>
+            </a:avLst>
+          </a:prstGeom>
+          <a:solidFill>
+            <a:srgbClr val="E50914">
+              <a:alpha val="16000"/>
+            </a:srgbClr>
+          </a:solidFill>
+          <a:ln>
+            <a:noFill/>
+          </a:ln>
+          <a:effectLst/>
+        </p:spPr>
+        <p:style>
+          <a:lnRef idx="1">
+            <a:schemeClr val="accent1"/>
+          </a:lnRef>
+          <a:fillRef idx="3">
+            <a:schemeClr val="accent1"/>
+          </a:fillRef>
+          <a:effectRef idx="2">
+            <a:schemeClr val="accent1"/>
+          </a:effectRef>
+          <a:fontRef idx="minor">
+            <a:schemeClr val="lt1"/>
+          </a:fontRef>
+        </p:style>
+        <p:txBody>
+          <a:bodyPr rtlCol="0" anchor="ctr" wrap="square" lIns="45720" rIns="45720" tIns="27432" bIns="27432"/>
+          <a:lstStyle/>
+          <a:p>
+            <a:pPr algn="ctr">
+              <a:lnSpc>
+                <a:spcPct val="100000"/>
+              </a:lnSpc>
+              <a:spcAft>
+                <a:spcPts val="0"/>
+              </a:spcAft>
+            </a:pPr>
+            <a:r>
+              <a:rPr sz="1100" b="1" i="0" spc="150">
+                <a:solidFill>
+                  <a:srgbClr val="E50914"/>
+                </a:solidFill>
+                <a:latin typeface="Calibri"/>
+              </a:rPr>
+              <a:t>SEGURANÇA</a:t>
+            </a:r>
+          </a:p>
+        </p:txBody>
+      </p:sp>
+      <p:sp>
+        <p:nvSpPr>
+          <p:cNvPr id="3" name="TextBox 2"/>
+          <p:cNvSpPr txBox="1"/>
+          <p:nvPr/>
+        </p:nvSpPr>
+        <p:spPr>
+          <a:xfrm>
+            <a:off x="502920" y="822960"/>
+            <a:ext cx="11155680" cy="685800"/>
+          </a:xfrm>
+          <a:prstGeom prst="rect">
+            <a:avLst/>
+          </a:prstGeom>
+          <a:noFill/>
+        </p:spPr>
+        <p:txBody>
+          <a:bodyPr wrap="square" anchor="t" lIns="45720" rIns="45720" tIns="27432" bIns="27432">
+            <a:spAutoFit/>
+          </a:bodyPr>
+          <a:lstStyle/>
+          <a:p>
+            <a:pPr algn="l">
+              <a:lnSpc>
+                <a:spcPct val="100000"/>
+              </a:lnSpc>
+              <a:spcAft>
+                <a:spcPts val="0"/>
+              </a:spcAft>
+            </a:pPr>
+            <a:r>
+              <a:rPr sz="3600" b="1" i="0">
+                <a:solidFill>
+                  <a:srgbClr val="F8FAFC"/>
+                </a:solidFill>
+                <a:latin typeface="Calibri"/>
+              </a:rPr>
+              <a:t>Achados e correções</a:t>
+            </a:r>
+          </a:p>
+        </p:txBody>
+      </p:sp>
+      <p:sp>
+        <p:nvSpPr>
+          <p:cNvPr id="4" name="Rectangle 3"/>
+          <p:cNvSpPr/>
+          <p:nvPr/>
+        </p:nvSpPr>
+        <p:spPr>
+          <a:xfrm>
+            <a:off x="594360" y="1572768"/>
+            <a:ext cx="640080" cy="45720"/>
+          </a:xfrm>
+          <a:prstGeom prst="rect">
+            <a:avLst/>
+          </a:prstGeom>
+          <a:solidFill>
+            <a:srgbClr val="E50914"/>
+          </a:solidFill>
+          <a:ln>
+            <a:noFill/>
+          </a:ln>
+          <a:effectLst/>
+        </p:spPr>
+        <p:style>
+          <a:lnRef idx="1">
+            <a:schemeClr val="accent1"/>
+          </a:lnRef>
+          <a:fillRef idx="3">
+            <a:schemeClr val="accent1"/>
+          </a:fillRef>
+          <a:effectRef idx="2">
+            <a:schemeClr val="accent1"/>
+          </a:effectRef>
+          <a:fontRef idx="minor">
+            <a:schemeClr val="lt1"/>
+          </a:fontRef>
+        </p:style>
+        <p:txBody>
+          <a:bodyPr rtlCol="0" anchor="ctr"/>
+          <a:lstStyle/>
+          <a:p>
+            <a:pPr algn="ctr"/>
+          </a:p>
+        </p:txBody>
+      </p:sp>
+      <p:sp>
+        <p:nvSpPr>
+          <p:cNvPr id="5" name="TextBox 4"/>
+          <p:cNvSpPr txBox="1"/>
+          <p:nvPr/>
+        </p:nvSpPr>
+        <p:spPr>
+          <a:xfrm>
+            <a:off x="548640" y="2148840"/>
+            <a:ext cx="5760720" cy="365760"/>
+          </a:xfrm>
+          <a:prstGeom prst="rect">
+            <a:avLst/>
+          </a:prstGeom>
+          <a:noFill/>
+        </p:spPr>
+        <p:txBody>
+          <a:bodyPr wrap="square" anchor="t" lIns="45720" rIns="45720" tIns="27432" bIns="27432">
+            <a:spAutoFit/>
+          </a:bodyPr>
+          <a:lstStyle/>
+          <a:p>
+            <a:pPr algn="l">
+              <a:lnSpc>
+                <a:spcPct val="100000"/>
+              </a:lnSpc>
+              <a:spcAft>
+                <a:spcPts val="0"/>
+              </a:spcAft>
+            </a:pPr>
+            <a:r>
+              <a:rPr sz="1200" b="1" i="0" spc="100">
+                <a:solidFill>
+                  <a:srgbClr val="94A3B8"/>
+                </a:solidFill>
+                <a:latin typeface="Calibri"/>
+              </a:rPr>
+              <a:t>CENÁRIOS DE AUTORIZAÇÃO DO BANCO (TOTAL: 47)</a:t>
+            </a:r>
+          </a:p>
+        </p:txBody>
+      </p:sp>
+      <p:graphicFrame>
+        <p:nvGraphicFramePr>
+          <p:cNvPr id="6" name="Chart 5"/>
+          <p:cNvGraphicFramePr>
+            <a:graphicFrameLocks noGrp="1"/>
+          </p:cNvGraphicFramePr>
+          <p:nvPr/>
+        </p:nvGraphicFramePr>
+        <p:xfrm>
+          <a:off x="548640" y="2560320"/>
+          <a:ext cx="5669280" cy="3566160"/>
+        </p:xfrm>
+        <a:graphic>
+          <a:graphicData uri="http://schemas.openxmlformats.org/drawingml/2006/chart">
+            <c:chart xmlns:c="http://schemas.openxmlformats.org/drawingml/2006/chart" r:id="rId2"/>
+          </a:graphicData>
+        </a:graphic>
+      </p:graphicFrame>
+      <p:sp>
+        <p:nvSpPr>
+          <p:cNvPr id="7" name="Rounded Rectangle 6"/>
+          <p:cNvSpPr/>
+          <p:nvPr/>
+        </p:nvSpPr>
+        <p:spPr>
+          <a:xfrm>
+            <a:off x="6583680" y="2240280"/>
+            <a:ext cx="5074920" cy="1188720"/>
+          </a:xfrm>
+          <a:prstGeom prst="roundRect">
+            <a:avLst>
+              <a:gd name="adj" fmla="val 7000"/>
+            </a:avLst>
+          </a:prstGeom>
+          <a:solidFill>
+            <a:srgbClr val="181B24"/>
+          </a:solidFill>
+          <a:ln w="12700">
+            <a:solidFill>
+              <a:srgbClr val="272C3D"/>
+            </a:solidFill>
+          </a:ln>
+          <a:effectLst/>
+        </p:spPr>
+        <p:style>
+          <a:lnRef idx="1">
+            <a:schemeClr val="accent1"/>
+          </a:lnRef>
+          <a:fillRef idx="3">
+            <a:schemeClr val="accent1"/>
+          </a:fillRef>
+          <a:effectRef idx="2">
+            <a:schemeClr val="accent1"/>
+          </a:effectRef>
+          <a:fontRef idx="minor">
+            <a:schemeClr val="lt1"/>
+          </a:fontRef>
+        </p:style>
+        <p:txBody>
+          <a:bodyPr rtlCol="0" anchor="ctr"/>
+          <a:lstStyle/>
+          <a:p>
+            <a:pPr algn="ctr"/>
+          </a:p>
+        </p:txBody>
+      </p:sp>
+      <p:sp>
+        <p:nvSpPr>
+          <p:cNvPr id="8" name="Rectangle 7"/>
+          <p:cNvSpPr/>
+          <p:nvPr/>
+        </p:nvSpPr>
+        <p:spPr>
+          <a:xfrm>
+            <a:off x="6583680" y="2240280"/>
+            <a:ext cx="73152" cy="1188720"/>
+          </a:xfrm>
+          <a:prstGeom prst="rect">
+            <a:avLst/>
+          </a:prstGeom>
+          <a:solidFill>
+            <a:srgbClr val="E50914"/>
+          </a:solidFill>
+          <a:ln>
+            <a:noFill/>
+          </a:ln>
+          <a:effectLst/>
+        </p:spPr>
+        <p:style>
+          <a:lnRef idx="1">
+            <a:schemeClr val="accent1"/>
+          </a:lnRef>
+          <a:fillRef idx="3">
+            <a:schemeClr val="accent1"/>
+          </a:fillRef>
+          <a:effectRef idx="2">
+            <a:schemeClr val="accent1"/>
+          </a:effectRef>
+          <a:fontRef idx="minor">
+            <a:schemeClr val="lt1"/>
+          </a:fontRef>
+        </p:style>
+        <p:txBody>
+          <a:bodyPr rtlCol="0" anchor="ctr"/>
+          <a:lstStyle/>
+          <a:p>
+            <a:pPr algn="ctr"/>
+          </a:p>
+        </p:txBody>
+      </p:sp>
+      <p:sp>
+        <p:nvSpPr>
+          <p:cNvPr id="9" name="TextBox 8"/>
+          <p:cNvSpPr txBox="1"/>
+          <p:nvPr/>
+        </p:nvSpPr>
+        <p:spPr>
+          <a:xfrm>
+            <a:off x="6858000" y="2350008"/>
+            <a:ext cx="4663440" cy="365760"/>
+          </a:xfrm>
+          <a:prstGeom prst="rect">
+            <a:avLst/>
+          </a:prstGeom>
+          <a:noFill/>
+        </p:spPr>
+        <p:txBody>
+          <a:bodyPr wrap="square" anchor="t" lIns="45720" rIns="45720" tIns="27432" bIns="27432">
+            <a:spAutoFit/>
+          </a:bodyPr>
+          <a:lstStyle/>
+          <a:p>
+            <a:pPr algn="l">
+              <a:lnSpc>
+                <a:spcPct val="100000"/>
+              </a:lnSpc>
+              <a:spcAft>
+                <a:spcPts val="0"/>
+              </a:spcAft>
+            </a:pPr>
+            <a:r>
+              <a:rPr sz="1600" b="1" i="0">
+                <a:solidFill>
+                  <a:srgbClr val="F8FAFC"/>
+                </a:solidFill>
+                <a:latin typeface="Calibri"/>
+              </a:rPr>
+              <a:t>Falhas corrigidas</a:t>
+            </a:r>
+          </a:p>
+        </p:txBody>
+      </p:sp>
+      <p:sp>
+        <p:nvSpPr>
+          <p:cNvPr id="10" name="TextBox 9"/>
+          <p:cNvSpPr txBox="1"/>
+          <p:nvPr/>
+        </p:nvSpPr>
+        <p:spPr>
+          <a:xfrm>
+            <a:off x="6858000" y="2697480"/>
+            <a:ext cx="4663440" cy="731520"/>
+          </a:xfrm>
+          <a:prstGeom prst="rect">
+            <a:avLst/>
+          </a:prstGeom>
+          <a:noFill/>
+        </p:spPr>
+        <p:txBody>
+          <a:bodyPr wrap="square" anchor="t" lIns="45720" rIns="45720" tIns="27432" bIns="27432">
+            <a:spAutoFit/>
+          </a:bodyPr>
+          <a:lstStyle/>
+          <a:p>
+            <a:pPr algn="l">
+              <a:lnSpc>
+                <a:spcPct val="105000"/>
+              </a:lnSpc>
+              <a:spcAft>
+                <a:spcPts val="0"/>
+              </a:spcAft>
+            </a:pPr>
+            <a:r>
+              <a:rPr sz="1300" b="0" i="0">
+                <a:solidFill>
+                  <a:srgbClr val="94A3B8"/>
+                </a:solidFill>
+                <a:latin typeface="Calibri"/>
+              </a:rPr>
+              <a:t>Escalonamento de papel, leitura anônima de perfis, pedido marcado como pago pelo cliente e TRUNCATE por usuários autenticados.</a:t>
+            </a:r>
+          </a:p>
+        </p:txBody>
+      </p:sp>
+      <p:sp>
+        <p:nvSpPr>
+          <p:cNvPr id="11" name="Rounded Rectangle 10"/>
+          <p:cNvSpPr/>
+          <p:nvPr/>
+        </p:nvSpPr>
+        <p:spPr>
+          <a:xfrm>
+            <a:off x="6583680" y="3566160"/>
+            <a:ext cx="5074920" cy="1188720"/>
+          </a:xfrm>
+          <a:prstGeom prst="roundRect">
+            <a:avLst>
+              <a:gd name="adj" fmla="val 7000"/>
+            </a:avLst>
+          </a:prstGeom>
+          <a:solidFill>
+            <a:srgbClr val="181B24"/>
+          </a:solidFill>
+          <a:ln w="12700">
+            <a:solidFill>
+              <a:srgbClr val="272C3D"/>
+            </a:solidFill>
+          </a:ln>
+          <a:effectLst/>
+        </p:spPr>
+        <p:style>
+          <a:lnRef idx="1">
+            <a:schemeClr val="accent1"/>
+          </a:lnRef>
+          <a:fillRef idx="3">
+            <a:schemeClr val="accent1"/>
+          </a:fillRef>
+          <a:effectRef idx="2">
+            <a:schemeClr val="accent1"/>
+          </a:effectRef>
+          <a:fontRef idx="minor">
+            <a:schemeClr val="lt1"/>
+          </a:fontRef>
+        </p:style>
+        <p:txBody>
+          <a:bodyPr rtlCol="0" anchor="ctr"/>
+          <a:lstStyle/>
+          <a:p>
+            <a:pPr algn="ctr"/>
+          </a:p>
+        </p:txBody>
+      </p:sp>
+      <p:sp>
+        <p:nvSpPr>
+          <p:cNvPr id="12" name="Rectangle 11"/>
+          <p:cNvSpPr/>
+          <p:nvPr/>
+        </p:nvSpPr>
+        <p:spPr>
+          <a:xfrm>
+            <a:off x="6583680" y="3566160"/>
+            <a:ext cx="73152" cy="1188720"/>
+          </a:xfrm>
+          <a:prstGeom prst="rect">
+            <a:avLst/>
+          </a:prstGeom>
+          <a:solidFill>
+            <a:srgbClr val="E50914"/>
+          </a:solidFill>
+          <a:ln>
+            <a:noFill/>
+          </a:ln>
+          <a:effectLst/>
+        </p:spPr>
+        <p:style>
+          <a:lnRef idx="1">
+            <a:schemeClr val="accent1"/>
+          </a:lnRef>
+          <a:fillRef idx="3">
+            <a:schemeClr val="accent1"/>
+          </a:fillRef>
+          <a:effectRef idx="2">
+            <a:schemeClr val="accent1"/>
+          </a:effectRef>
+          <a:fontRef idx="minor">
+            <a:schemeClr val="lt1"/>
+          </a:fontRef>
+        </p:style>
+        <p:txBody>
+          <a:bodyPr rtlCol="0" anchor="ctr"/>
+          <a:lstStyle/>
+          <a:p>
+            <a:pPr algn="ctr"/>
+          </a:p>
+        </p:txBody>
+      </p:sp>
+      <p:sp>
+        <p:nvSpPr>
+          <p:cNvPr id="13" name="TextBox 12"/>
+          <p:cNvSpPr txBox="1"/>
+          <p:nvPr/>
+        </p:nvSpPr>
+        <p:spPr>
+          <a:xfrm>
+            <a:off x="6858000" y="3675888"/>
+            <a:ext cx="4663440" cy="365760"/>
+          </a:xfrm>
+          <a:prstGeom prst="rect">
+            <a:avLst/>
+          </a:prstGeom>
+          <a:noFill/>
+        </p:spPr>
+        <p:txBody>
+          <a:bodyPr wrap="square" anchor="t" lIns="45720" rIns="45720" tIns="27432" bIns="27432">
+            <a:spAutoFit/>
+          </a:bodyPr>
+          <a:lstStyle/>
+          <a:p>
+            <a:pPr algn="l">
+              <a:lnSpc>
+                <a:spcPct val="100000"/>
+              </a:lnSpc>
+              <a:spcAft>
+                <a:spcPts val="0"/>
+              </a:spcAft>
+            </a:pPr>
+            <a:r>
+              <a:rPr sz="1600" b="1" i="0">
+                <a:solidFill>
+                  <a:srgbClr val="F8FAFC"/>
+                </a:solidFill>
+                <a:latin typeface="Calibri"/>
+              </a:rPr>
+              <a:t>22 de 22 verificações</a:t>
+            </a:r>
+          </a:p>
+        </p:txBody>
+      </p:sp>
+      <p:sp>
+        <p:nvSpPr>
+          <p:cNvPr id="14" name="TextBox 13"/>
+          <p:cNvSpPr txBox="1"/>
+          <p:nvPr/>
+        </p:nvSpPr>
+        <p:spPr>
+          <a:xfrm>
+            <a:off x="6858000" y="4023360"/>
+            <a:ext cx="4663440" cy="731520"/>
+          </a:xfrm>
+          <a:prstGeom prst="rect">
+            <a:avLst/>
+          </a:prstGeom>
+          <a:noFill/>
+        </p:spPr>
+        <p:txBody>
+          <a:bodyPr wrap="square" anchor="t" lIns="45720" rIns="45720" tIns="27432" bIns="27432">
+            <a:spAutoFit/>
+          </a:bodyPr>
+          <a:lstStyle/>
+          <a:p>
+            <a:pPr algn="l">
+              <a:lnSpc>
+                <a:spcPct val="105000"/>
+              </a:lnSpc>
+              <a:spcAft>
+                <a:spcPts val="0"/>
+              </a:spcAft>
+            </a:pPr>
+            <a:r>
+              <a:rPr sz="1300" b="0" i="0">
+                <a:solidFill>
+                  <a:srgbClr val="94A3B8"/>
+                </a:solidFill>
+                <a:latin typeface="Calibri"/>
+              </a:rPr>
+              <a:t>Rotas de escrita da API retornam 401 sem token e com token forjado.</a:t>
+            </a:r>
+          </a:p>
+        </p:txBody>
+      </p:sp>
+      <p:sp>
+        <p:nvSpPr>
+          <p:cNvPr id="15" name="Rounded Rectangle 14"/>
+          <p:cNvSpPr/>
+          <p:nvPr/>
+        </p:nvSpPr>
+        <p:spPr>
+          <a:xfrm>
+            <a:off x="6583680" y="4892040"/>
+            <a:ext cx="5074920" cy="1188720"/>
+          </a:xfrm>
+          <a:prstGeom prst="roundRect">
+            <a:avLst>
+              <a:gd name="adj" fmla="val 7000"/>
+            </a:avLst>
+          </a:prstGeom>
+          <a:solidFill>
+            <a:srgbClr val="181B24"/>
+          </a:solidFill>
+          <a:ln w="12700">
+            <a:solidFill>
+              <a:srgbClr val="E50914"/>
+            </a:solidFill>
+          </a:ln>
+          <a:effectLst/>
+        </p:spPr>
+        <p:style>
+          <a:lnRef idx="1">
+            <a:schemeClr val="accent1"/>
+          </a:lnRef>
+          <a:fillRef idx="3">
+            <a:schemeClr val="accent1"/>
+          </a:fillRef>
+          <a:effectRef idx="2">
+            <a:schemeClr val="accent1"/>
+          </a:effectRef>
+          <a:fontRef idx="minor">
+            <a:schemeClr val="lt1"/>
+          </a:fontRef>
+        </p:style>
+        <p:txBody>
+          <a:bodyPr rtlCol="0" anchor="ctr"/>
+          <a:lstStyle/>
+          <a:p>
+            <a:pPr algn="ctr"/>
+          </a:p>
+        </p:txBody>
+      </p:sp>
+      <p:sp>
+        <p:nvSpPr>
+          <p:cNvPr id="16" name="Rectangle 15"/>
+          <p:cNvSpPr/>
+          <p:nvPr/>
+        </p:nvSpPr>
+        <p:spPr>
+          <a:xfrm>
+            <a:off x="6583680" y="4892040"/>
+            <a:ext cx="73152" cy="1188720"/>
+          </a:xfrm>
+          <a:prstGeom prst="rect">
+            <a:avLst/>
+          </a:prstGeom>
+          <a:solidFill>
+            <a:srgbClr val="E50914"/>
+          </a:solidFill>
+          <a:ln>
+            <a:noFill/>
+          </a:ln>
+          <a:effectLst/>
+        </p:spPr>
+        <p:style>
+          <a:lnRef idx="1">
+            <a:schemeClr val="accent1"/>
+          </a:lnRef>
+          <a:fillRef idx="3">
+            <a:schemeClr val="accent1"/>
+          </a:fillRef>
+          <a:effectRef idx="2">
+            <a:schemeClr val="accent1"/>
+          </a:effectRef>
+          <a:fontRef idx="minor">
+            <a:schemeClr val="lt1"/>
+          </a:fontRef>
+        </p:style>
+        <p:txBody>
+          <a:bodyPr rtlCol="0" anchor="ctr"/>
+          <a:lstStyle/>
+          <a:p>
+            <a:pPr algn="ctr"/>
+          </a:p>
+        </p:txBody>
+      </p:sp>
+      <p:sp>
+        <p:nvSpPr>
+          <p:cNvPr id="17" name="TextBox 16"/>
+          <p:cNvSpPr txBox="1"/>
+          <p:nvPr/>
+        </p:nvSpPr>
+        <p:spPr>
+          <a:xfrm>
+            <a:off x="6858000" y="5001768"/>
+            <a:ext cx="4663440" cy="365760"/>
+          </a:xfrm>
+          <a:prstGeom prst="rect">
+            <a:avLst/>
+          </a:prstGeom>
+          <a:noFill/>
+        </p:spPr>
+        <p:txBody>
+          <a:bodyPr wrap="square" anchor="t" lIns="45720" rIns="45720" tIns="27432" bIns="27432">
+            <a:spAutoFit/>
+          </a:bodyPr>
+          <a:lstStyle/>
+          <a:p>
+            <a:pPr algn="l">
+              <a:lnSpc>
+                <a:spcPct val="100000"/>
+              </a:lnSpc>
+              <a:spcAft>
+                <a:spcPts val="0"/>
+              </a:spcAft>
+            </a:pPr>
+            <a:r>
+              <a:rPr sz="1600" b="1" i="0">
+                <a:solidFill>
+                  <a:srgbClr val="E50914"/>
+                </a:solidFill>
+                <a:latin typeface="Calibri"/>
+              </a:rPr>
+              <a:t>Ação antes da publicação</a:t>
+            </a:r>
+          </a:p>
+        </p:txBody>
+      </p:sp>
+      <p:sp>
+        <p:nvSpPr>
+          <p:cNvPr id="18" name="TextBox 17"/>
+          <p:cNvSpPr txBox="1"/>
+          <p:nvPr/>
+        </p:nvSpPr>
+        <p:spPr>
+          <a:xfrm>
+            <a:off x="6858000" y="5349240"/>
+            <a:ext cx="4663440" cy="731520"/>
+          </a:xfrm>
+          <a:prstGeom prst="rect">
+            <a:avLst/>
+          </a:prstGeom>
+          <a:noFill/>
+        </p:spPr>
+        <p:txBody>
+          <a:bodyPr wrap="square" anchor="t" lIns="45720" rIns="45720" tIns="27432" bIns="27432">
+            <a:spAutoFit/>
+          </a:bodyPr>
+          <a:lstStyle/>
+          <a:p>
+            <a:pPr algn="l">
+              <a:lnSpc>
+                <a:spcPct val="105000"/>
+              </a:lnSpc>
+              <a:spcAft>
+                <a:spcPts val="0"/>
+              </a:spcAft>
+            </a:pPr>
+            <a:r>
+              <a:rPr sz="1300" b="0" i="0">
+                <a:solidFill>
+                  <a:srgbClr val="94A3B8"/>
+                </a:solidFill>
+                <a:latin typeface="Calibri"/>
+              </a:rPr>
+              <a:t>Credencial removida do código; a senha do banco deve ser redefinida no Supabase.</a:t>
+            </a:r>
+          </a:p>
+        </p:txBody>
+      </p:sp>
+      <p:sp>
+        <p:nvSpPr>
+          <p:cNvPr id="19" name="Rectangle 18"/>
+          <p:cNvSpPr/>
+          <p:nvPr/>
+        </p:nvSpPr>
+        <p:spPr>
+          <a:xfrm>
+            <a:off x="548640" y="6327648"/>
+            <a:ext cx="11091672" cy="9144"/>
+          </a:xfrm>
+          <a:prstGeom prst="rect">
+            <a:avLst/>
+          </a:prstGeom>
+          <a:solidFill>
+            <a:srgbClr val="272C3D"/>
+          </a:solidFill>
+          <a:ln>
+            <a:noFill/>
+          </a:ln>
+          <a:effectLst/>
+        </p:spPr>
+        <p:style>
+          <a:lnRef idx="1">
+            <a:schemeClr val="accent1"/>
+          </a:lnRef>
+          <a:fillRef idx="3">
+            <a:schemeClr val="accent1"/>
+          </a:fillRef>
+          <a:effectRef idx="2">
+            <a:schemeClr val="accent1"/>
+          </a:effectRef>
+          <a:fontRef idx="minor">
+            <a:schemeClr val="lt1"/>
+          </a:fontRef>
+        </p:style>
+        <p:txBody>
+          <a:bodyPr rtlCol="0" anchor="ctr"/>
+          <a:lstStyle/>
+          <a:p>
+            <a:pPr algn="ctr"/>
+          </a:p>
+        </p:txBody>
+      </p:sp>
+      <p:sp>
+        <p:nvSpPr>
+          <p:cNvPr id="20" name="TextBox 19"/>
+          <p:cNvSpPr txBox="1"/>
+          <p:nvPr/>
+        </p:nvSpPr>
+        <p:spPr>
+          <a:xfrm>
+            <a:off x="548640" y="6382512"/>
+            <a:ext cx="5486400" cy="274320"/>
+          </a:xfrm>
+          <a:prstGeom prst="rect">
+            <a:avLst/>
+          </a:prstGeom>
+          <a:noFill/>
+        </p:spPr>
+        <p:txBody>
+          <a:bodyPr wrap="square" anchor="t" lIns="45720" rIns="45720" tIns="27432" bIns="27432">
+            <a:spAutoFit/>
+          </a:bodyPr>
+          <a:lstStyle/>
+          <a:p>
+            <a:pPr algn="l">
+              <a:lnSpc>
+                <a:spcPct val="100000"/>
+              </a:lnSpc>
+              <a:spcAft>
+                <a:spcPts val="0"/>
+              </a:spcAft>
+            </a:pPr>
+            <a:r>
+              <a:rPr sz="1000" b="0" i="0" spc="60">
+                <a:solidFill>
+                  <a:srgbClr val="64748B"/>
+                </a:solidFill>
+                <a:latin typeface="Calibri"/>
+              </a:rPr>
+              <a:t>CoreMotiom  ·  Etapa 5 (TCC)</a:t>
+            </a:r>
+          </a:p>
+        </p:txBody>
+      </p:sp>
+      <p:sp>
+        <p:nvSpPr>
+          <p:cNvPr id="21" name="TextBox 20"/>
+          <p:cNvSpPr txBox="1"/>
+          <p:nvPr/>
+        </p:nvSpPr>
+        <p:spPr>
+          <a:xfrm>
+            <a:off x="9784080" y="6382512"/>
+            <a:ext cx="1828800" cy="274320"/>
+          </a:xfrm>
+          <a:prstGeom prst="rect">
+            <a:avLst/>
+          </a:prstGeom>
+          <a:noFill/>
+        </p:spPr>
+        <p:txBody>
+          <a:bodyPr wrap="square" anchor="t" lIns="45720" rIns="45720" tIns="27432" bIns="27432">
+            <a:spAutoFit/>
+          </a:bodyPr>
+          <a:lstStyle/>
+          <a:p>
+            <a:pPr algn="r">
+              <a:lnSpc>
+                <a:spcPct val="100000"/>
+              </a:lnSpc>
+              <a:spcAft>
+                <a:spcPts val="0"/>
+              </a:spcAft>
+            </a:pPr>
+            <a:r>
+              <a:rPr sz="1000" b="0" i="0">
+                <a:solidFill>
+                  <a:srgbClr val="64748B"/>
+                </a:solidFill>
+                <a:latin typeface="Calibri"/>
+              </a:rPr>
+              <a:t>10 / 15</a:t>
+            </a:r>
+          </a:p>
+        </p:txBody>
+      </p:sp>
+    </p:spTree>
+  </p:cSld>
+  <p:clrMapOvr>
+    <a:masterClrMapping/>
+  </p:clrMapOvr>
+  <p:transition spd="med">
+    <p:wipe dir="r"/>
+  </p:transition>
+  <p:timing>
+    <p:tnLst>
+      <p:par>
+        <p:cTn id="1" dur="indefinite" restart="never" nodeType="tmRoot">
+          <p:childTnLst>
+            <p:seq concurrent="1" nextAc="seek">
+              <p:cTn id="2" dur="indefinite" nodeType="mainSeq">
+                <p:childTnLst>
+                  <p:par>
+                    <p:cTn id="3" fill="hold">
+                      <p:stCondLst>
+                        <p:cond delay="indefinite"/>
+                        <p:cond evt="onBegin" delay="0">
+                          <p:tn val="2"/>
+                        </p:cond>
+                      </p:stCondLst>
+                      <p:childTnLst>
+                        <p:par>
+                          <p:cTn id="4" fill="hold">
+                            <p:stCondLst>
+                              <p:cond delay="0"/>
+                            </p:stCondLst>
+                            <p:childTnLst>
+                              <p:par>
+                                <p:cTn id="11" presetID="10" presetClass="entr" presetSubtype="0" fill="hold" grpId="0" nodeType="withEffect">
+                                  <p:stCondLst>
+                                    <p:cond delay="0"/>
+                                  </p:stCondLst>
+                                  <p:childTnLst>
+                                    <p:set>
+                                      <p:cBhvr>
+                                        <p:cTn id="12" dur="1" fill="hold">
+                                          <p:stCondLst>
+                                            <p:cond delay="0"/>
+                                          </p:stCondLst>
+                                        </p:cTn>
+                                        <p:tgtEl>
+                                          <p:spTgt spid="2"/>
+                                        </p:tgtEl>
+                                        <p:attrNameLst>
+                                          <p:attrName>style.visibility</p:attrName>
+                                        </p:attrNameLst>
+                                      </p:cBhvr>
+                                      <p:to>
+                                        <p:strVal val="visible"/>
+                                      </p:to>
+                                    </p:set>
+                                    <p:animEffect transition="in" filter="fade">
+                                      <p:cBhvr>
+                                        <p:cTn id="13" dur="480"/>
+                                        <p:tgtEl>
+                                          <p:spTgt spid="2"/>
+                                        </p:tgtEl>
+                                      </p:cBhvr>
+                                    </p:animEffect>
+                                    <p:anim calcmode="lin" valueType="num">
+                                      <p:cBhvr>
+                                        <p:cTn id="14" dur="480" fill="hold"/>
+                                        <p:tgtEl>
+                                          <p:spTgt spid="2"/>
+                                        </p:tgtEl>
+                                        <p:attrNameLst>
+                                          <p:attrName>ppt_y</p:attrName>
+                                        </p:attrNameLst>
+                                      </p:cBhvr>
+                                      <p:tavLst>
+                                        <p:tav tm="0">
+                                          <p:val>
+                                            <p:strVal val="#ppt_y+0.045"/>
+                                          </p:val>
+                                        </p:tav>
+                                        <p:tav tm="100000">
+                                          <p:val>
+                                            <p:strVal val="#ppt_y"/>
+                                          </p:val>
+                                        </p:tav>
+                                      </p:tavLst>
+                                    </p:anim>
+                                  </p:childTnLst>
+                                </p:cTn>
+                              </p:par>
+                              <p:par>
+                                <p:cTn id="15" presetID="10" presetClass="entr" presetSubtype="0" fill="hold" grpId="0" nodeType="withEffect">
+                                  <p:stCondLst>
+                                    <p:cond delay="90"/>
+                                  </p:stCondLst>
+                                  <p:childTnLst>
+                                    <p:set>
+                                      <p:cBhvr>
+                                        <p:cTn id="16" dur="1" fill="hold">
+                                          <p:stCondLst>
+                                            <p:cond delay="0"/>
+                                          </p:stCondLst>
+                                        </p:cTn>
+                                        <p:tgtEl>
+                                          <p:spTgt spid="3"/>
+                                        </p:tgtEl>
+                                        <p:attrNameLst>
+                                          <p:attrName>style.visibility</p:attrName>
+                                        </p:attrNameLst>
+                                      </p:cBhvr>
+                                      <p:to>
+                                        <p:strVal val="visible"/>
+                                      </p:to>
+                                    </p:set>
+                                    <p:animEffect transition="in" filter="fade">
+                                      <p:cBhvr>
+                                        <p:cTn id="17" dur="480"/>
+                                        <p:tgtEl>
+                                          <p:spTgt spid="3"/>
+                                        </p:tgtEl>
+                                      </p:cBhvr>
+                                    </p:animEffect>
+                                    <p:anim calcmode="lin" valueType="num">
+                                      <p:cBhvr>
+                                        <p:cTn id="18" dur="480" fill="hold"/>
+                                        <p:tgtEl>
+                                          <p:spTgt spid="3"/>
+                                        </p:tgtEl>
+                                        <p:attrNameLst>
+                                          <p:attrName>ppt_y</p:attrName>
+                                        </p:attrNameLst>
+                                      </p:cBhvr>
+                                      <p:tavLst>
+                                        <p:tav tm="0">
+                                          <p:val>
+                                            <p:strVal val="#ppt_y+0.045"/>
+                                          </p:val>
+                                        </p:tav>
+                                        <p:tav tm="100000">
+                                          <p:val>
+                                            <p:strVal val="#ppt_y"/>
+                                          </p:val>
+                                        </p:tav>
+                                      </p:tavLst>
+                                    </p:anim>
+                                  </p:childTnLst>
+                                </p:cTn>
+                              </p:par>
+                              <p:par>
+                                <p:cTn id="19" presetID="10" presetClass="entr" presetSubtype="0" fill="hold" grpId="0" nodeType="withEffect">
+                                  <p:stCondLst>
+                                    <p:cond delay="180"/>
+                                  </p:stCondLst>
+                                  <p:childTnLst>
+                                    <p:set>
+                                      <p:cBhvr>
+                                        <p:cTn id="20" dur="1" fill="hold">
+                                          <p:stCondLst>
+                                            <p:cond delay="0"/>
+                                          </p:stCondLst>
+                                        </p:cTn>
+                                        <p:tgtEl>
+                                          <p:spTgt spid="4"/>
+                                        </p:tgtEl>
+                                        <p:attrNameLst>
+                                          <p:attrName>style.visibility</p:attrName>
+                                        </p:attrNameLst>
+                                      </p:cBhvr>
+                                      <p:to>
+                                        <p:strVal val="visible"/>
+                                      </p:to>
+                                    </p:set>
+                                    <p:animEffect transition="in" filter="fade">
+                                      <p:cBhvr>
+                                        <p:cTn id="21" dur="480"/>
+                                        <p:tgtEl>
+                                          <p:spTgt spid="4"/>
+                                        </p:tgtEl>
+                                      </p:cBhvr>
+                                    </p:animEffect>
+                                    <p:anim calcmode="lin" valueType="num">
+                                      <p:cBhvr>
+                                        <p:cTn id="22" dur="480" fill="hold"/>
+                                        <p:tgtEl>
+                                          <p:spTgt spid="4"/>
+                                        </p:tgtEl>
+                                        <p:attrNameLst>
+                                          <p:attrName>ppt_y</p:attrName>
+                                        </p:attrNameLst>
+                                      </p:cBhvr>
+                                      <p:tavLst>
+                                        <p:tav tm="0">
+                                          <p:val>
+                                            <p:strVal val="#ppt_y+0.045"/>
+                                          </p:val>
+                                        </p:tav>
+                                        <p:tav tm="100000">
+                                          <p:val>
+                                            <p:strVal val="#ppt_y"/>
+                                          </p:val>
+                                        </p:tav>
+                                      </p:tavLst>
+                                    </p:anim>
+                                  </p:childTnLst>
+                                </p:cTn>
+                              </p:par>
+                              <p:par>
+                                <p:cTn id="23" presetID="10" presetClass="entr" presetSubtype="0" fill="hold" grpId="0" nodeType="withEffect">
+                                  <p:stCondLst>
+                                    <p:cond delay="270"/>
+                                  </p:stCondLst>
+                                  <p:childTnLst>
+                                    <p:set>
+                                      <p:cBhvr>
+                                        <p:cTn id="24" dur="1" fill="hold">
+                                          <p:stCondLst>
+                                            <p:cond delay="0"/>
+                                          </p:stCondLst>
+                                        </p:cTn>
+                                        <p:tgtEl>
+                                          <p:spTgt spid="5"/>
+                                        </p:tgtEl>
+                                        <p:attrNameLst>
+                                          <p:attrName>style.visibility</p:attrName>
+                                        </p:attrNameLst>
+                                      </p:cBhvr>
+                                      <p:to>
+                                        <p:strVal val="visible"/>
+                                      </p:to>
+                                    </p:set>
+                                    <p:animEffect transition="in" filter="fade">
+                                      <p:cBhvr>
+                                        <p:cTn id="25" dur="480"/>
+                                        <p:tgtEl>
+                                          <p:spTgt spid="5"/>
+                                        </p:tgtEl>
+                                      </p:cBhvr>
+                                    </p:animEffect>
+                                    <p:anim calcmode="lin" valueType="num">
+                                      <p:cBhvr>
+                                        <p:cTn id="26" dur="480" fill="hold"/>
+                                        <p:tgtEl>
+                                          <p:spTgt spid="5"/>
+                                        </p:tgtEl>
+                                        <p:attrNameLst>
+                                          <p:attrName>ppt_y</p:attrName>
+                                        </p:attrNameLst>
+                                      </p:cBhvr>
+                                      <p:tavLst>
+                                        <p:tav tm="0">
+                                          <p:val>
+                                            <p:strVal val="#ppt_y+0.045"/>
+                                          </p:val>
+                                        </p:tav>
+                                        <p:tav tm="100000">
+                                          <p:val>
+                                            <p:strVal val="#ppt_y"/>
+                                          </p:val>
+                                        </p:tav>
+                                      </p:tavLst>
+                                    </p:anim>
+                                  </p:childTnLst>
+                                </p:cTn>
+                              </p:par>
+                              <p:par>
+                                <p:cTn id="27" presetID="10" presetClass="entr" presetSubtype="0" fill="hold" grpId="0" nodeType="withEffect">
+                                  <p:stCondLst>
+                                    <p:cond delay="360"/>
+                                  </p:stCondLst>
+                                  <p:childTnLst>
+                                    <p:set>
+                                      <p:cBhvr>
+                                        <p:cTn id="28" dur="1" fill="hold">
+                                          <p:stCondLst>
+                                            <p:cond delay="0"/>
+                                          </p:stCondLst>
+                                        </p:cTn>
+                                        <p:tgtEl>
+                                          <p:spTgt spid="6"/>
+                                        </p:tgtEl>
+                                        <p:attrNameLst>
+                                          <p:attrName>style.visibility</p:attrName>
+                                        </p:attrNameLst>
+                                      </p:cBhvr>
+                                      <p:to>
+                                        <p:strVal val="visible"/>
+                                      </p:to>
+                                    </p:set>
+                                    <p:animEffect transition="in" filter="fade">
+                                      <p:cBhvr>
+                                        <p:cTn id="29" dur="480"/>
+                                        <p:tgtEl>
+                                          <p:spTgt spid="6"/>
+                                        </p:tgtEl>
+                                      </p:cBhvr>
+                                    </p:animEffect>
+                                    <p:anim calcmode="lin" valueType="num">
+                                      <p:cBhvr>
+                                        <p:cTn id="30" dur="480" fill="hold"/>
+                                        <p:tgtEl>
+                                          <p:spTgt spid="6"/>
+                                        </p:tgtEl>
+                                        <p:attrNameLst>
+                                          <p:attrName>ppt_y</p:attrName>
+                                        </p:attrNameLst>
+                                      </p:cBhvr>
+                                      <p:tavLst>
+                                        <p:tav tm="0">
+                                          <p:val>
+                                            <p:strVal val="#ppt_y+0.045"/>
+                                          </p:val>
+                                        </p:tav>
+                                        <p:tav tm="100000">
+                                          <p:val>
+                                            <p:strVal val="#ppt_y"/>
+                                          </p:val>
+                                        </p:tav>
+                                      </p:tavLst>
+                                    </p:anim>
+                                  </p:childTnLst>
+                                </p:cTn>
+                              </p:par>
+                              <p:par>
+                                <p:cTn id="31" presetID="10" presetClass="entr" presetSubtype="0" fill="hold" grpId="0" nodeType="withEffect">
+                                  <p:stCondLst>
+                                    <p:cond delay="450"/>
+                                  </p:stCondLst>
+                                  <p:childTnLst>
+                                    <p:set>
+                                      <p:cBhvr>
+                                        <p:cTn id="32" dur="1" fill="hold">
+                                          <p:stCondLst>
+                                            <p:cond delay="0"/>
+                                          </p:stCondLst>
+                                        </p:cTn>
+                                        <p:tgtEl>
+                                          <p:spTgt spid="7"/>
+                                        </p:tgtEl>
+                                        <p:attrNameLst>
+                                          <p:attrName>style.visibility</p:attrName>
+                                        </p:attrNameLst>
+                                      </p:cBhvr>
+                                      <p:to>
+                                        <p:strVal val="visible"/>
+                                      </p:to>
+                                    </p:set>
+                                    <p:animEffect transition="in" filter="fade">
+                                      <p:cBhvr>
+                                        <p:cTn id="33" dur="480"/>
+                                        <p:tgtEl>
+                                          <p:spTgt spid="7"/>
+                                        </p:tgtEl>
+                                      </p:cBhvr>
+                                    </p:animEffect>
+                                    <p:anim calcmode="lin" valueType="num">
+                                      <p:cBhvr>
+                                        <p:cTn id="34" dur="480" fill="hold"/>
+                                        <p:tgtEl>
+                                          <p:spTgt spid="7"/>
+                                        </p:tgtEl>
+                                        <p:attrNameLst>
+                                          <p:attrName>ppt_y</p:attrName>
+                                        </p:attrNameLst>
+                                      </p:cBhvr>
+                                      <p:tavLst>
+                                        <p:tav tm="0">
+                                          <p:val>
+                                            <p:strVal val="#ppt_y+0.045"/>
+                                          </p:val>
+                                        </p:tav>
+                                        <p:tav tm="100000">
+                                          <p:val>
+                                            <p:strVal val="#ppt_y"/>
+                                          </p:val>
+                                        </p:tav>
+                                      </p:tavLst>
+                                    </p:anim>
+                                  </p:childTnLst>
+                                </p:cTn>
+                              </p:par>
+                              <p:par>
+                                <p:cTn id="35" presetID="10" presetClass="entr" presetSubtype="0" fill="hold" grpId="0" nodeType="withEffect">
+                                  <p:stCondLst>
+                                    <p:cond delay="540"/>
+                                  </p:stCondLst>
+                                  <p:childTnLst>
+                                    <p:set>
+                                      <p:cBhvr>
+                                        <p:cTn id="36" dur="1" fill="hold">
+                                          <p:stCondLst>
+                                            <p:cond delay="0"/>
+                                          </p:stCondLst>
+                                        </p:cTn>
+                                        <p:tgtEl>
+                                          <p:spTgt spid="8"/>
+                                        </p:tgtEl>
+                                        <p:attrNameLst>
+                                          <p:attrName>style.visibility</p:attrName>
+                                        </p:attrNameLst>
+                                      </p:cBhvr>
+                                      <p:to>
+                                        <p:strVal val="visible"/>
+                                      </p:to>
+                                    </p:set>
+                                    <p:animEffect transition="in" filter="fade">
+                                      <p:cBhvr>
+                                        <p:cTn id="37" dur="480"/>
+                                        <p:tgtEl>
+                                          <p:spTgt spid="8"/>
+                                        </p:tgtEl>
+                                      </p:cBhvr>
+                                    </p:animEffect>
+                                    <p:anim calcmode="lin" valueType="num">
+                                      <p:cBhvr>
+                                        <p:cTn id="38" dur="480" fill="hold"/>
+                                        <p:tgtEl>
+                                          <p:spTgt spid="8"/>
+                                        </p:tgtEl>
+                                        <p:attrNameLst>
+                                          <p:attrName>ppt_y</p:attrName>
+                                        </p:attrNameLst>
+                                      </p:cBhvr>
+                                      <p:tavLst>
+                                        <p:tav tm="0">
+                                          <p:val>
+                                            <p:strVal val="#ppt_y+0.045"/>
+                                          </p:val>
+                                        </p:tav>
+                                        <p:tav tm="100000">
+                                          <p:val>
+                                            <p:strVal val="#ppt_y"/>
+                                          </p:val>
+                                        </p:tav>
+                                      </p:tavLst>
+                                    </p:anim>
+                                  </p:childTnLst>
+                                </p:cTn>
+                              </p:par>
+                              <p:par>
+                                <p:cTn id="39" presetID="10" presetClass="entr" presetSubtype="0" fill="hold" grpId="0" nodeType="withEffect">
+                                  <p:stCondLst>
+                                    <p:cond delay="630"/>
+                                  </p:stCondLst>
+                                  <p:childTnLst>
+                                    <p:set>
+                                      <p:cBhvr>
+                                        <p:cTn id="40" dur="1" fill="hold">
+                                          <p:stCondLst>
+                                            <p:cond delay="0"/>
+                                          </p:stCondLst>
+                                        </p:cTn>
+                                        <p:tgtEl>
+                                          <p:spTgt spid="9"/>
+                                        </p:tgtEl>
+                                        <p:attrNameLst>
+                                          <p:attrName>style.visibility</p:attrName>
+                                        </p:attrNameLst>
+                                      </p:cBhvr>
+                                      <p:to>
+                                        <p:strVal val="visible"/>
+                                      </p:to>
+                                    </p:set>
+                                    <p:animEffect transition="in" filter="fade">
+                                      <p:cBhvr>
+                                        <p:cTn id="41" dur="480"/>
+                                        <p:tgtEl>
+                                          <p:spTgt spid="9"/>
+                                        </p:tgtEl>
+                                      </p:cBhvr>
+                                    </p:animEffect>
+                                    <p:anim calcmode="lin" valueType="num">
+                                      <p:cBhvr>
+                                        <p:cTn id="42" dur="480" fill="hold"/>
+                                        <p:tgtEl>
+                                          <p:spTgt spid="9"/>
+                                        </p:tgtEl>
+                                        <p:attrNameLst>
+                                          <p:attrName>ppt_y</p:attrName>
+                                        </p:attrNameLst>
+                                      </p:cBhvr>
+                                      <p:tavLst>
+                                        <p:tav tm="0">
+                                          <p:val>
+                                            <p:strVal val="#ppt_y+0.045"/>
+                                          </p:val>
+                                        </p:tav>
+                                        <p:tav tm="100000">
+                                          <p:val>
+                                            <p:strVal val="#ppt_y"/>
+                                          </p:val>
+                                        </p:tav>
+                                      </p:tavLst>
+                                    </p:anim>
+                                  </p:childTnLst>
+                                </p:cTn>
+                              </p:par>
+                              <p:par>
+                                <p:cTn id="43" presetID="10" presetClass="entr" presetSubtype="0" fill="hold" grpId="0" nodeType="withEffect">
+                                  <p:stCondLst>
+                                    <p:cond delay="720"/>
+                                  </p:stCondLst>
+                                  <p:childTnLst>
+                                    <p:set>
+                                      <p:cBhvr>
+                                        <p:cTn id="44" dur="1" fill="hold">
+                                          <p:stCondLst>
+                                            <p:cond delay="0"/>
+                                          </p:stCondLst>
+                                        </p:cTn>
+                                        <p:tgtEl>
+                                          <p:spTgt spid="10"/>
+                                        </p:tgtEl>
+                                        <p:attrNameLst>
+                                          <p:attrName>style.visibility</p:attrName>
+                                        </p:attrNameLst>
+                                      </p:cBhvr>
+                                      <p:to>
+                                        <p:strVal val="visible"/>
+                                      </p:to>
+                                    </p:set>
+                                    <p:animEffect transition="in" filter="fade">
+                                      <p:cBhvr>
+                                        <p:cTn id="45" dur="480"/>
+                                        <p:tgtEl>
+                                          <p:spTgt spid="10"/>
+                                        </p:tgtEl>
+                                      </p:cBhvr>
+                                    </p:animEffect>
+                                    <p:anim calcmode="lin" valueType="num">
+                                      <p:cBhvr>
+                                        <p:cTn id="46" dur="480" fill="hold"/>
+                                        <p:tgtEl>
+                                          <p:spTgt spid="10"/>
+                                        </p:tgtEl>
+                                        <p:attrNameLst>
+                                          <p:attrName>ppt_y</p:attrName>
+                                        </p:attrNameLst>
+                                      </p:cBhvr>
+                                      <p:tavLst>
+                                        <p:tav tm="0">
+                                          <p:val>
+                                            <p:strVal val="#ppt_y+0.045"/>
+                                          </p:val>
+                                        </p:tav>
+                                        <p:tav tm="100000">
+                                          <p:val>
+                                            <p:strVal val="#ppt_y"/>
+                                          </p:val>
+                                        </p:tav>
+                                      </p:tavLst>
+                                    </p:anim>
+                                  </p:childTnLst>
+                                </p:cTn>
+                              </p:par>
+                              <p:par>
+                                <p:cTn id="47" presetID="10" presetClass="entr" presetSubtype="0" fill="hold" grpId="0" nodeType="withEffect">
+                                  <p:stCondLst>
+                                    <p:cond delay="810"/>
+                                  </p:stCondLst>
+                                  <p:childTnLst>
+                                    <p:set>
+                                      <p:cBhvr>
+                                        <p:cTn id="48" dur="1" fill="hold">
+                                          <p:stCondLst>
+                                            <p:cond delay="0"/>
+                                          </p:stCondLst>
+                                        </p:cTn>
+                                        <p:tgtEl>
+                                          <p:spTgt spid="11"/>
+                                        </p:tgtEl>
+                                        <p:attrNameLst>
+                                          <p:attrName>style.visibility</p:attrName>
+                                        </p:attrNameLst>
+                                      </p:cBhvr>
+                                      <p:to>
+                                        <p:strVal val="visible"/>
+                                      </p:to>
+                                    </p:set>
+                                    <p:animEffect transition="in" filter="fade">
+                                      <p:cBhvr>
+                                        <p:cTn id="49" dur="480"/>
+                                        <p:tgtEl>
+                                          <p:spTgt spid="11"/>
+                                        </p:tgtEl>
+                                      </p:cBhvr>
+                                    </p:animEffect>
+                                    <p:anim calcmode="lin" valueType="num">
+                                      <p:cBhvr>
+                                        <p:cTn id="50" dur="480" fill="hold"/>
+                                        <p:tgtEl>
+                                          <p:spTgt spid="11"/>
+                                        </p:tgtEl>
+                                        <p:attrNameLst>
+                                          <p:attrName>ppt_y</p:attrName>
+                                        </p:attrNameLst>
+                                      </p:cBhvr>
+                                      <p:tavLst>
+                                        <p:tav tm="0">
+                                          <p:val>
+                                            <p:strVal val="#ppt_y+0.045"/>
+                                          </p:val>
+                                        </p:tav>
+                                        <p:tav tm="100000">
+                                          <p:val>
+                                            <p:strVal val="#ppt_y"/>
+                                          </p:val>
+                                        </p:tav>
+                                      </p:tavLst>
+                                    </p:anim>
+                                  </p:childTnLst>
+                                </p:cTn>
+                              </p:par>
+                              <p:par>
+                                <p:cTn id="51" presetID="10" presetClass="entr" presetSubtype="0" fill="hold" grpId="0" nodeType="withEffect">
+                                  <p:stCondLst>
+                                    <p:cond delay="900"/>
+                                  </p:stCondLst>
+                                  <p:childTnLst>
+                                    <p:set>
+                                      <p:cBhvr>
+                                        <p:cTn id="52" dur="1" fill="hold">
+                                          <p:stCondLst>
+                                            <p:cond delay="0"/>
+                                          </p:stCondLst>
+                                        </p:cTn>
+                                        <p:tgtEl>
+                                          <p:spTgt spid="12"/>
+                                        </p:tgtEl>
+                                        <p:attrNameLst>
+                                          <p:attrName>style.visibility</p:attrName>
+                                        </p:attrNameLst>
+                                      </p:cBhvr>
+                                      <p:to>
+                                        <p:strVal val="visible"/>
+                                      </p:to>
+                                    </p:set>
+                                    <p:animEffect transition="in" filter="fade">
+                                      <p:cBhvr>
+                                        <p:cTn id="53" dur="480"/>
+                                        <p:tgtEl>
+                                          <p:spTgt spid="12"/>
+                                        </p:tgtEl>
+                                      </p:cBhvr>
+                                    </p:animEffect>
+                                    <p:anim calcmode="lin" valueType="num">
+                                      <p:cBhvr>
+                                        <p:cTn id="54" dur="480" fill="hold"/>
+                                        <p:tgtEl>
+                                          <p:spTgt spid="12"/>
+                                        </p:tgtEl>
+                                        <p:attrNameLst>
+                                          <p:attrName>ppt_y</p:attrName>
+                                        </p:attrNameLst>
+                                      </p:cBhvr>
+                                      <p:tavLst>
+                                        <p:tav tm="0">
+                                          <p:val>
+                                            <p:strVal val="#ppt_y+0.045"/>
+                                          </p:val>
+                                        </p:tav>
+                                        <p:tav tm="100000">
+                                          <p:val>
+                                            <p:strVal val="#ppt_y"/>
+                                          </p:val>
+                                        </p:tav>
+                                      </p:tavLst>
+                                    </p:anim>
+                                  </p:childTnLst>
+                                </p:cTn>
+                              </p:par>
+                              <p:par>
+                                <p:cTn id="55" presetID="10" presetClass="entr" presetSubtype="0" fill="hold" grpId="0" nodeType="withEffect">
+                                  <p:stCondLst>
+                                    <p:cond delay="990"/>
+                                  </p:stCondLst>
+                                  <p:childTnLst>
+                                    <p:set>
+                                      <p:cBhvr>
+                                        <p:cTn id="56" dur="1" fill="hold">
+                                          <p:stCondLst>
+                                            <p:cond delay="0"/>
+                                          </p:stCondLst>
+                                        </p:cTn>
+                                        <p:tgtEl>
+                                          <p:spTgt spid="13"/>
+                                        </p:tgtEl>
+                                        <p:attrNameLst>
+                                          <p:attrName>style.visibility</p:attrName>
+                                        </p:attrNameLst>
+                                      </p:cBhvr>
+                                      <p:to>
+                                        <p:strVal val="visible"/>
+                                      </p:to>
+                                    </p:set>
+                                    <p:animEffect transition="in" filter="fade">
+                                      <p:cBhvr>
+                                        <p:cTn id="57" dur="480"/>
+                                        <p:tgtEl>
+                                          <p:spTgt spid="13"/>
+                                        </p:tgtEl>
+                                      </p:cBhvr>
+                                    </p:animEffect>
+                                    <p:anim calcmode="lin" valueType="num">
+                                      <p:cBhvr>
+                                        <p:cTn id="58" dur="480" fill="hold"/>
+                                        <p:tgtEl>
+                                          <p:spTgt spid="13"/>
+                                        </p:tgtEl>
+                                        <p:attrNameLst>
+                                          <p:attrName>ppt_y</p:attrName>
+                                        </p:attrNameLst>
+                                      </p:cBhvr>
+                                      <p:tavLst>
+                                        <p:tav tm="0">
+                                          <p:val>
+                                            <p:strVal val="#ppt_y+0.045"/>
+                                          </p:val>
+                                        </p:tav>
+                                        <p:tav tm="100000">
+                                          <p:val>
+                                            <p:strVal val="#ppt_y"/>
+                                          </p:val>
+                                        </p:tav>
+                                      </p:tavLst>
+                                    </p:anim>
+                                  </p:childTnLst>
+                                </p:cTn>
+                              </p:par>
+                              <p:par>
+                                <p:cTn id="59" presetID="10" presetClass="entr" presetSubtype="0" fill="hold" grpId="0" nodeType="withEffect">
+                                  <p:stCondLst>
+                                    <p:cond delay="1080"/>
+                                  </p:stCondLst>
+                                  <p:childTnLst>
+                                    <p:set>
+                                      <p:cBhvr>
+                                        <p:cTn id="60" dur="1" fill="hold">
+                                          <p:stCondLst>
+                                            <p:cond delay="0"/>
+                                          </p:stCondLst>
+                                        </p:cTn>
+                                        <p:tgtEl>
+                                          <p:spTgt spid="14"/>
+                                        </p:tgtEl>
+                                        <p:attrNameLst>
+                                          <p:attrName>style.visibility</p:attrName>
+                                        </p:attrNameLst>
+                                      </p:cBhvr>
+                                      <p:to>
+                                        <p:strVal val="visible"/>
+                                      </p:to>
+                                    </p:set>
+                                    <p:animEffect transition="in" filter="fade">
+                                      <p:cBhvr>
+                                        <p:cTn id="61" dur="480"/>
+                                        <p:tgtEl>
+                                          <p:spTgt spid="14"/>
+                                        </p:tgtEl>
+                                      </p:cBhvr>
+                                    </p:animEffect>
+                                    <p:anim calcmode="lin" valueType="num">
+                                      <p:cBhvr>
+                                        <p:cTn id="62" dur="480" fill="hold"/>
+                                        <p:tgtEl>
+                                          <p:spTgt spid="14"/>
+                                        </p:tgtEl>
+                                        <p:attrNameLst>
+                                          <p:attrName>ppt_y</p:attrName>
+                                        </p:attrNameLst>
+                                      </p:cBhvr>
+                                      <p:tavLst>
+                                        <p:tav tm="0">
+                                          <p:val>
+                                            <p:strVal val="#ppt_y+0.045"/>
+                                          </p:val>
+                                        </p:tav>
+                                        <p:tav tm="100000">
+                                          <p:val>
+                                            <p:strVal val="#ppt_y"/>
+                                          </p:val>
+                                        </p:tav>
+                                      </p:tavLst>
+                                    </p:anim>
+                                  </p:childTnLst>
+                                </p:cTn>
+                              </p:par>
+                              <p:par>
+                                <p:cTn id="63" presetID="10" presetClass="entr" presetSubtype="0" fill="hold" grpId="0" nodeType="withEffect">
+                                  <p:stCondLst>
+                                    <p:cond delay="1170"/>
+                                  </p:stCondLst>
+                                  <p:childTnLst>
+                                    <p:set>
+                                      <p:cBhvr>
+                                        <p:cTn id="64" dur="1" fill="hold">
+                                          <p:stCondLst>
+                                            <p:cond delay="0"/>
+                                          </p:stCondLst>
+                                        </p:cTn>
+                                        <p:tgtEl>
+                                          <p:spTgt spid="15"/>
+                                        </p:tgtEl>
+                                        <p:attrNameLst>
+                                          <p:attrName>style.visibility</p:attrName>
+                                        </p:attrNameLst>
+                                      </p:cBhvr>
+                                      <p:to>
+                                        <p:strVal val="visible"/>
+                                      </p:to>
+                                    </p:set>
+                                    <p:animEffect transition="in" filter="fade">
+                                      <p:cBhvr>
+                                        <p:cTn id="65" dur="480"/>
+                                        <p:tgtEl>
+                                          <p:spTgt spid="15"/>
+                                        </p:tgtEl>
+                                      </p:cBhvr>
+                                    </p:animEffect>
+                                    <p:anim calcmode="lin" valueType="num">
+                                      <p:cBhvr>
+                                        <p:cTn id="66" dur="480" fill="hold"/>
+                                        <p:tgtEl>
+                                          <p:spTgt spid="15"/>
+                                        </p:tgtEl>
+                                        <p:attrNameLst>
+                                          <p:attrName>ppt_y</p:attrName>
+                                        </p:attrNameLst>
+                                      </p:cBhvr>
+                                      <p:tavLst>
+                                        <p:tav tm="0">
+                                          <p:val>
+                                            <p:strVal val="#ppt_y+0.045"/>
+                                          </p:val>
+                                        </p:tav>
+                                        <p:tav tm="100000">
+                                          <p:val>
+                                            <p:strVal val="#ppt_y"/>
+                                          </p:val>
+                                        </p:tav>
+                                      </p:tavLst>
+                                    </p:anim>
+                                  </p:childTnLst>
+                                </p:cTn>
+                              </p:par>
+                              <p:par>
+                                <p:cTn id="67" presetID="10" presetClass="entr" presetSubtype="0" fill="hold" grpId="0" nodeType="withEffect">
+                                  <p:stCondLst>
+                                    <p:cond delay="1260"/>
+                                  </p:stCondLst>
+                                  <p:childTnLst>
+                                    <p:set>
+                                      <p:cBhvr>
+                                        <p:cTn id="68" dur="1" fill="hold">
+                                          <p:stCondLst>
+                                            <p:cond delay="0"/>
+                                          </p:stCondLst>
+                                        </p:cTn>
+                                        <p:tgtEl>
+                                          <p:spTgt spid="16"/>
+                                        </p:tgtEl>
+                                        <p:attrNameLst>
+                                          <p:attrName>style.visibility</p:attrName>
+                                        </p:attrNameLst>
+                                      </p:cBhvr>
+                                      <p:to>
+                                        <p:strVal val="visible"/>
+                                      </p:to>
+                                    </p:set>
+                                    <p:animEffect transition="in" filter="fade">
+                                      <p:cBhvr>
+                                        <p:cTn id="69" dur="480"/>
+                                        <p:tgtEl>
+                                          <p:spTgt spid="16"/>
+                                        </p:tgtEl>
+                                      </p:cBhvr>
+                                    </p:animEffect>
+                                    <p:anim calcmode="lin" valueType="num">
+                                      <p:cBhvr>
+                                        <p:cTn id="70" dur="480" fill="hold"/>
+                                        <p:tgtEl>
+                                          <p:spTgt spid="16"/>
+                                        </p:tgtEl>
+                                        <p:attrNameLst>
+                                          <p:attrName>ppt_y</p:attrName>
+                                        </p:attrNameLst>
+                                      </p:cBhvr>
+                                      <p:tavLst>
+                                        <p:tav tm="0">
+                                          <p:val>
+                                            <p:strVal val="#ppt_y+0.045"/>
+                                          </p:val>
+                                        </p:tav>
+                                        <p:tav tm="100000">
+                                          <p:val>
+                                            <p:strVal val="#ppt_y"/>
+                                          </p:val>
+                                        </p:tav>
+                                      </p:tavLst>
+                                    </p:anim>
+                                  </p:childTnLst>
+                                </p:cTn>
+                              </p:par>
+                              <p:par>
+                                <p:cTn id="71" presetID="10" presetClass="entr" presetSubtype="0" fill="hold" grpId="0" nodeType="withEffect">
+                                  <p:stCondLst>
+                                    <p:cond delay="1350"/>
+                                  </p:stCondLst>
+                                  <p:childTnLst>
+                                    <p:set>
+                                      <p:cBhvr>
+                                        <p:cTn id="72" dur="1" fill="hold">
+                                          <p:stCondLst>
+                                            <p:cond delay="0"/>
+                                          </p:stCondLst>
+                                        </p:cTn>
+                                        <p:tgtEl>
+                                          <p:spTgt spid="17"/>
+                                        </p:tgtEl>
+                                        <p:attrNameLst>
+                                          <p:attrName>style.visibility</p:attrName>
+                                        </p:attrNameLst>
+                                      </p:cBhvr>
+                                      <p:to>
+                                        <p:strVal val="visible"/>
+                                      </p:to>
+                                    </p:set>
+                                    <p:animEffect transition="in" filter="fade">
+                                      <p:cBhvr>
+                                        <p:cTn id="73" dur="480"/>
+                                        <p:tgtEl>
+                                          <p:spTgt spid="17"/>
+                                        </p:tgtEl>
+                                      </p:cBhvr>
+                                    </p:animEffect>
+                                    <p:anim calcmode="lin" valueType="num">
+                                      <p:cBhvr>
+                                        <p:cTn id="74" dur="480" fill="hold"/>
+                                        <p:tgtEl>
+                                          <p:spTgt spid="17"/>
+                                        </p:tgtEl>
+                                        <p:attrNameLst>
+                                          <p:attrName>ppt_y</p:attrName>
+                                        </p:attrNameLst>
+                                      </p:cBhvr>
+                                      <p:tavLst>
+                                        <p:tav tm="0">
+                                          <p:val>
+                                            <p:strVal val="#ppt_y+0.045"/>
+                                          </p:val>
+                                        </p:tav>
+                                        <p:tav tm="100000">
+                                          <p:val>
+                                            <p:strVal val="#ppt_y"/>
+                                          </p:val>
+                                        </p:tav>
+                                      </p:tavLst>
+                                    </p:anim>
+                                  </p:childTnLst>
+                                </p:cTn>
+                              </p:par>
+                              <p:par>
+                                <p:cTn id="75" presetID="10" presetClass="entr" presetSubtype="0" fill="hold" grpId="0" nodeType="withEffect">
+                                  <p:stCondLst>
+                                    <p:cond delay="1440"/>
+                                  </p:stCondLst>
+                                  <p:childTnLst>
+                                    <p:set>
+                                      <p:cBhvr>
+                                        <p:cTn id="76" dur="1" fill="hold">
+                                          <p:stCondLst>
+                                            <p:cond delay="0"/>
+                                          </p:stCondLst>
+                                        </p:cTn>
+                                        <p:tgtEl>
+                                          <p:spTgt spid="18"/>
+                                        </p:tgtEl>
+                                        <p:attrNameLst>
+                                          <p:attrName>style.visibility</p:attrName>
+                                        </p:attrNameLst>
+                                      </p:cBhvr>
+                                      <p:to>
+                                        <p:strVal val="visible"/>
+                                      </p:to>
+                                    </p:set>
+                                    <p:animEffect transition="in" filter="fade">
+                                      <p:cBhvr>
+                                        <p:cTn id="77" dur="480"/>
+                                        <p:tgtEl>
+                                          <p:spTgt spid="18"/>
+                                        </p:tgtEl>
+                                      </p:cBhvr>
+                                    </p:animEffect>
+                                    <p:anim calcmode="lin" valueType="num">
+                                      <p:cBhvr>
+                                        <p:cTn id="78" dur="480" fill="hold"/>
+                                        <p:tgtEl>
+                                          <p:spTgt spid="18"/>
+                                        </p:tgtEl>
+                                        <p:attrNameLst>
+                                          <p:attrName>ppt_y</p:attrName>
+                                        </p:attrNameLst>
+                                      </p:cBhvr>
+                                      <p:tavLst>
+                                        <p:tav tm="0">
+                                          <p:val>
+                                            <p:strVal val="#ppt_y+0.045"/>
+                                          </p:val>
+                                        </p:tav>
+                                        <p:tav tm="100000">
+                                          <p:val>
+                                            <p:strVal val="#ppt_y"/>
+                                          </p:val>
+                                        </p:tav>
+                                      </p:tavLst>
+                                    </p:anim>
+                                  </p:childTnLst>
+                                </p:cTn>
+                              </p:par>
+                              <p:par>
+                                <p:cTn id="79" presetID="10" presetClass="entr" presetSubtype="0" fill="hold" grpId="0" nodeType="withEffect">
+                                  <p:stCondLst>
+                                    <p:cond delay="1530"/>
+                                  </p:stCondLst>
+                                  <p:childTnLst>
+                                    <p:set>
+                                      <p:cBhvr>
+                                        <p:cTn id="80" dur="1" fill="hold">
+                                          <p:stCondLst>
+                                            <p:cond delay="0"/>
+                                          </p:stCondLst>
+                                        </p:cTn>
+                                        <p:tgtEl>
+                                          <p:spTgt spid="19"/>
+                                        </p:tgtEl>
+                                        <p:attrNameLst>
+                                          <p:attrName>style.visibility</p:attrName>
+                                        </p:attrNameLst>
+                                      </p:cBhvr>
+                                      <p:to>
+                                        <p:strVal val="visible"/>
+                                      </p:to>
+                                    </p:set>
+                                    <p:animEffect transition="in" filter="fade">
+                                      <p:cBhvr>
+                                        <p:cTn id="81" dur="480"/>
+                                        <p:tgtEl>
+                                          <p:spTgt spid="19"/>
+                                        </p:tgtEl>
+                                      </p:cBhvr>
+                                    </p:animEffect>
+                                    <p:anim calcmode="lin" valueType="num">
+                                      <p:cBhvr>
+                                        <p:cTn id="82" dur="480" fill="hold"/>
+                                        <p:tgtEl>
+                                          <p:spTgt spid="19"/>
+                                        </p:tgtEl>
+                                        <p:attrNameLst>
+                                          <p:attrName>ppt_y</p:attrName>
+                                        </p:attrNameLst>
+                                      </p:cBhvr>
+                                      <p:tavLst>
+                                        <p:tav tm="0">
+                                          <p:val>
+                                            <p:strVal val="#ppt_y+0.045"/>
+                                          </p:val>
+                                        </p:tav>
+                                        <p:tav tm="100000">
+                                          <p:val>
+                                            <p:strVal val="#ppt_y"/>
+                                          </p:val>
+                                        </p:tav>
+                                      </p:tavLst>
+                                    </p:anim>
+                                  </p:childTnLst>
+                                </p:cTn>
+                              </p:par>
+                              <p:par>
+                                <p:cTn id="83" presetID="10" presetClass="entr" presetSubtype="0" fill="hold" grpId="0" nodeType="withEffect">
+                                  <p:stCondLst>
+                                    <p:cond delay="1620"/>
+                                  </p:stCondLst>
+                                  <p:childTnLst>
+                                    <p:set>
+                                      <p:cBhvr>
+                                        <p:cTn id="84" dur="1" fill="hold">
+                                          <p:stCondLst>
+                                            <p:cond delay="0"/>
+                                          </p:stCondLst>
+                                        </p:cTn>
+                                        <p:tgtEl>
+                                          <p:spTgt spid="20"/>
+                                        </p:tgtEl>
+                                        <p:attrNameLst>
+                                          <p:attrName>style.visibility</p:attrName>
+                                        </p:attrNameLst>
+                                      </p:cBhvr>
+                                      <p:to>
+                                        <p:strVal val="visible"/>
+                                      </p:to>
+                                    </p:set>
+                                    <p:animEffect transition="in" filter="fade">
+                                      <p:cBhvr>
+                                        <p:cTn id="85" dur="480"/>
+                                        <p:tgtEl>
+                                          <p:spTgt spid="20"/>
+                                        </p:tgtEl>
+                                      </p:cBhvr>
+                                    </p:animEffect>
+                                    <p:anim calcmode="lin" valueType="num">
+                                      <p:cBhvr>
+                                        <p:cTn id="86" dur="480" fill="hold"/>
+                                        <p:tgtEl>
+                                          <p:spTgt spid="20"/>
+                                        </p:tgtEl>
+                                        <p:attrNameLst>
+                                          <p:attrName>ppt_y</p:attrName>
+                                        </p:attrNameLst>
+                                      </p:cBhvr>
+                                      <p:tavLst>
+                                        <p:tav tm="0">
+                                          <p:val>
+                                            <p:strVal val="#ppt_y+0.045"/>
+                                          </p:val>
+                                        </p:tav>
+                                        <p:tav tm="100000">
+                                          <p:val>
+                                            <p:strVal val="#ppt_y"/>
+                                          </p:val>
+                                        </p:tav>
+                                      </p:tavLst>
+                                    </p:anim>
+                                  </p:childTnLst>
+                                </p:cTn>
+                              </p:par>
+                              <p:par>
+                                <p:cTn id="87" presetID="10" presetClass="entr" presetSubtype="0" fill="hold" grpId="0" nodeType="withEffect">
+                                  <p:stCondLst>
+                                    <p:cond delay="1710"/>
+                                  </p:stCondLst>
+                                  <p:childTnLst>
+                                    <p:set>
+                                      <p:cBhvr>
+                                        <p:cTn id="88" dur="1" fill="hold">
+                                          <p:stCondLst>
+                                            <p:cond delay="0"/>
+                                          </p:stCondLst>
+                                        </p:cTn>
+                                        <p:tgtEl>
+                                          <p:spTgt spid="21"/>
+                                        </p:tgtEl>
+                                        <p:attrNameLst>
+                                          <p:attrName>style.visibility</p:attrName>
+                                        </p:attrNameLst>
+                                      </p:cBhvr>
+                                      <p:to>
+                                        <p:strVal val="visible"/>
+                                      </p:to>
+                                    </p:set>
+                                    <p:animEffect transition="in" filter="fade">
+                                      <p:cBhvr>
+                                        <p:cTn id="89" dur="480"/>
+                                        <p:tgtEl>
+                                          <p:spTgt spid="21"/>
+                                        </p:tgtEl>
+                                      </p:cBhvr>
+                                    </p:animEffect>
+                                    <p:anim calcmode="lin" valueType="num">
+                                      <p:cBhvr>
+                                        <p:cTn id="90" dur="480" fill="hold"/>
+                                        <p:tgtEl>
+                                          <p:spTgt spid="21"/>
+                                        </p:tgtEl>
+                                        <p:attrNameLst>
+                                          <p:attrName>ppt_y</p:attrName>
+                                        </p:attrNameLst>
+                                      </p:cBhvr>
+                                      <p:tavLst>
+                                        <p:tav tm="0">
+                                          <p:val>
+                                            <p:strVal val="#ppt_y+0.045"/>
+                                          </p:val>
+                                        </p:tav>
+                                        <p:tav tm="100000">
+                                          <p:val>
+                                            <p:strVal val="#ppt_y"/>
+                                          </p:val>
+                                        </p:tav>
+                                      </p:tavLst>
+                                    </p:anim>
+                                  </p:childTnLst>
+                                </p:cTn>
+                              </p:par>
+                            </p:childTnLst>
+                          </p:cTn>
+                        </p:par>
+                      </p:childTnLst>
+                    </p:cTn>
+                  </p:par>
+                </p:childTnLst>
+              </p:cTn>
+              <p:prevCondLst>
+                <p:cond evt="onPrev" delay="0">
+                  <p:tgtEl>
+                    <p:sldTgt/>
+                  </p:tgtEl>
+                </p:cond>
+              </p:prevCondLst>
+              <p:nextCondLst>
+                <p:cond evt="onNext" delay="0">
+                  <p:tgtEl>
+                    <p:sldTgt/>
+                  </p:tgtEl>
+                </p:cond>
+              </p:nextCondLst>
+            </p:seq>
+          </p:childTnLst>
+        </p:cTn>
+      </p:par>
+    </p:tnLst>
+    <p:bldLst>
+      <p:bldP spid="2" grpId="0" animBg="1"/>
+      <p:bldP spid="3" grpId="0"/>
+      <p:bldP spid="4" grpId="0" animBg="1"/>
+      <p:bldP spid="5" grpId="0"/>
+      <p:bldGraphic spid="6" grpId="0">
+        <p:bldAsOne/>
+      </p:bldGraphic>
+      <p:bldP spid="7" grpId="0" animBg="1"/>
+      <p:bldP spid="8" grpId="0" animBg="1"/>
+      <p:bldP spid="9" grpId="0"/>
+      <p:bldP spid="10" grpId="0"/>
+      <p:bldP spid="11" grpId="0" animBg="1"/>
+      <p:bldP spid="12" grpId="0" animBg="1"/>
+      <p:bldP spid="13" grpId="0"/>
+      <p:bldP spid="14" grpId="0"/>
+      <p:bldP spid="15" grpId="0" animBg="1"/>
+      <p:bldP spid="16" grpId="0" animBg="1"/>
+      <p:bldP spid="17" grpId="0"/>
+      <p:bldP spid="18" grpId="0"/>
+      <p:bldP spid="19" grpId="0" animBg="1"/>
+      <p:bldP spid="20" grpId="0"/>
+      <p:bldP spid="21" grpId="0"/>
+    </p:bldLst>
+  </p:timing>
+</p:sld>
+</file>
+
+<file path=ppt/slides/slide11.xml><?xml version="1.0" encoding="utf-8"?>
 <p:sld xmlns:a="http://schemas.openxmlformats.org/drawingml/2006/main" xmlns:p="http://schemas.openxmlformats.org/presentationml/2006/main" xmlns:r="http://schemas.openxmlformats.org/officeDocument/2006/relationships">
   <p:cSld>
     <p:bg>
@@ -5504,7 +8263,7 @@
                 </a:solidFill>
                 <a:latin typeface="Calibri"/>
               </a:rPr>
-              <a:t>10 / 14</a:t>
+              <a:t>11 / 15</a:t>
             </a:r>
           </a:p>
         </p:txBody>
@@ -7048,7 +9807,7 @@
 </p:sld>
 </file>
 
-<file path=ppt/slides/slide11.xml><?xml version="1.0" encoding="utf-8"?>
+<file path=ppt/slides/slide12.xml><?xml version="1.0" encoding="utf-8"?>
 <p:sld xmlns:a="http://schemas.openxmlformats.org/drawingml/2006/main" xmlns:p="http://schemas.openxmlformats.org/presentationml/2006/main" xmlns:r="http://schemas.openxmlformats.org/officeDocument/2006/relationships">
   <p:cSld>
     <p:bg>
@@ -8093,7 +10852,7 @@
                 </a:solidFill>
                 <a:latin typeface="Calibri"/>
               </a:rPr>
-              <a:t>11 / 14</a:t>
+              <a:t>12 / 15</a:t>
             </a:r>
           </a:p>
         </p:txBody>
@@ -9519,7 +12278,7 @@
 </p:sld>
 </file>
 
-<file path=ppt/slides/slide12.xml><?xml version="1.0" encoding="utf-8"?>
+<file path=ppt/slides/slide13.xml><?xml version="1.0" encoding="utf-8"?>
 <p:sld xmlns:a="http://schemas.openxmlformats.org/drawingml/2006/main" xmlns:p="http://schemas.openxmlformats.org/presentationml/2006/main" xmlns:r="http://schemas.openxmlformats.org/officeDocument/2006/relationships">
   <p:cSld>
     <p:bg>
@@ -10774,7 +13533,7 @@
                 </a:solidFill>
                 <a:latin typeface="Calibri"/>
               </a:rPr>
-              <a:t>12 / 14</a:t>
+              <a:t>13 / 15</a:t>
             </a:r>
           </a:p>
         </p:txBody>
@@ -12495,7 +15254,7 @@
 </p:sld>
 </file>
 
-<file path=ppt/slides/slide13.xml><?xml version="1.0" encoding="utf-8"?>
+<file path=ppt/slides/slide14.xml><?xml version="1.0" encoding="utf-8"?>
 <p:sld xmlns:a="http://schemas.openxmlformats.org/drawingml/2006/main" xmlns:p="http://schemas.openxmlformats.org/presentationml/2006/main" xmlns:r="http://schemas.openxmlformats.org/officeDocument/2006/relationships">
   <p:cSld>
     <p:bg>
@@ -13850,7 +16609,7 @@
                 </a:solidFill>
                 <a:latin typeface="Calibri"/>
               </a:rPr>
-              <a:t>13 / 14</a:t>
+              <a:t>14 / 15</a:t>
             </a:r>
           </a:p>
         </p:txBody>
@@ -15689,7 +18448,7 @@
 </p:sld>
 </file>
 
-<file path=ppt/slides/slide14.xml><?xml version="1.0" encoding="utf-8"?>
+<file path=ppt/slides/slide15.xml><?xml version="1.0" encoding="utf-8"?>
 <p:sld xmlns:a="http://schemas.openxmlformats.org/drawingml/2006/main" xmlns:p="http://schemas.openxmlformats.org/presentationml/2006/main" xmlns:r="http://schemas.openxmlformats.org/officeDocument/2006/relationships">
   <p:cSld>
     <p:bg>
@@ -16522,6 +19281,2963 @@
         <p:spPr>
           <a:xfrm>
             <a:off x="548640" y="411480"/>
+            <a:ext cx="1129284" cy="329184"/>
+          </a:xfrm>
+          <a:prstGeom prst="roundRect">
+            <a:avLst>
+              <a:gd name="adj" fmla="val 50000"/>
+            </a:avLst>
+          </a:prstGeom>
+          <a:solidFill>
+            <a:srgbClr val="E50914">
+              <a:alpha val="16000"/>
+            </a:srgbClr>
+          </a:solidFill>
+          <a:ln>
+            <a:noFill/>
+          </a:ln>
+          <a:effectLst/>
+        </p:spPr>
+        <p:style>
+          <a:lnRef idx="1">
+            <a:schemeClr val="accent1"/>
+          </a:lnRef>
+          <a:fillRef idx="3">
+            <a:schemeClr val="accent1"/>
+          </a:fillRef>
+          <a:effectRef idx="2">
+            <a:schemeClr val="accent1"/>
+          </a:effectRef>
+          <a:fontRef idx="minor">
+            <a:schemeClr val="lt1"/>
+          </a:fontRef>
+        </p:style>
+        <p:txBody>
+          <a:bodyPr rtlCol="0" anchor="ctr" wrap="square" lIns="45720" rIns="45720" tIns="27432" bIns="27432"/>
+          <a:lstStyle/>
+          <a:p>
+            <a:pPr algn="ctr">
+              <a:lnSpc>
+                <a:spcPct val="100000"/>
+              </a:lnSpc>
+              <a:spcAft>
+                <a:spcPts val="0"/>
+              </a:spcAft>
+            </a:pPr>
+            <a:r>
+              <a:rPr sz="1100" b="1" i="0" spc="150">
+                <a:solidFill>
+                  <a:srgbClr val="E50914"/>
+                </a:solidFill>
+                <a:latin typeface="Calibri"/>
+              </a:rPr>
+              <a:t>SUMÁRIO</a:t>
+            </a:r>
+          </a:p>
+        </p:txBody>
+      </p:sp>
+      <p:sp>
+        <p:nvSpPr>
+          <p:cNvPr id="3" name="TextBox 2"/>
+          <p:cNvSpPr txBox="1"/>
+          <p:nvPr/>
+        </p:nvSpPr>
+        <p:spPr>
+          <a:xfrm>
+            <a:off x="502920" y="822960"/>
+            <a:ext cx="11155680" cy="685800"/>
+          </a:xfrm>
+          <a:prstGeom prst="rect">
+            <a:avLst/>
+          </a:prstGeom>
+          <a:noFill/>
+        </p:spPr>
+        <p:txBody>
+          <a:bodyPr wrap="square" anchor="t" lIns="45720" rIns="45720" tIns="27432" bIns="27432">
+            <a:spAutoFit/>
+          </a:bodyPr>
+          <a:lstStyle/>
+          <a:p>
+            <a:pPr algn="l">
+              <a:lnSpc>
+                <a:spcPct val="100000"/>
+              </a:lnSpc>
+              <a:spcAft>
+                <a:spcPts val="0"/>
+              </a:spcAft>
+            </a:pPr>
+            <a:r>
+              <a:rPr sz="3600" b="1" i="0">
+                <a:solidFill>
+                  <a:srgbClr val="F8FAFC"/>
+                </a:solidFill>
+                <a:latin typeface="Calibri"/>
+              </a:rPr>
+              <a:t>Roteiro da apresentação</a:t>
+            </a:r>
+          </a:p>
+        </p:txBody>
+      </p:sp>
+      <p:sp>
+        <p:nvSpPr>
+          <p:cNvPr id="4" name="Rectangle 3"/>
+          <p:cNvSpPr/>
+          <p:nvPr/>
+        </p:nvSpPr>
+        <p:spPr>
+          <a:xfrm>
+            <a:off x="594360" y="1572768"/>
+            <a:ext cx="640080" cy="45720"/>
+          </a:xfrm>
+          <a:prstGeom prst="rect">
+            <a:avLst/>
+          </a:prstGeom>
+          <a:solidFill>
+            <a:srgbClr val="E50914"/>
+          </a:solidFill>
+          <a:ln>
+            <a:noFill/>
+          </a:ln>
+          <a:effectLst/>
+        </p:spPr>
+        <p:style>
+          <a:lnRef idx="1">
+            <a:schemeClr val="accent1"/>
+          </a:lnRef>
+          <a:fillRef idx="3">
+            <a:schemeClr val="accent1"/>
+          </a:fillRef>
+          <a:effectRef idx="2">
+            <a:schemeClr val="accent1"/>
+          </a:effectRef>
+          <a:fontRef idx="minor">
+            <a:schemeClr val="lt1"/>
+          </a:fontRef>
+        </p:style>
+        <p:txBody>
+          <a:bodyPr rtlCol="0" anchor="ctr"/>
+          <a:lstStyle/>
+          <a:p>
+            <a:pPr algn="ctr"/>
+          </a:p>
+        </p:txBody>
+      </p:sp>
+      <p:sp>
+        <p:nvSpPr>
+          <p:cNvPr id="5" name="Rounded Rectangle 4"/>
+          <p:cNvSpPr/>
+          <p:nvPr/>
+        </p:nvSpPr>
+        <p:spPr>
+          <a:xfrm>
+            <a:off x="2526347" y="1756103"/>
+            <a:ext cx="2352099" cy="501099"/>
+          </a:xfrm>
+          <a:prstGeom prst="roundRect">
+            <a:avLst>
+              <a:gd name="adj" fmla="val 12000"/>
+            </a:avLst>
+          </a:prstGeom>
+          <a:solidFill>
+            <a:srgbClr val="181B24">
+              <a:alpha val="40000"/>
+            </a:srgbClr>
+          </a:solidFill>
+          <a:ln w="12700">
+            <a:solidFill>
+              <a:srgbClr val="272C3D"/>
+            </a:solidFill>
+          </a:ln>
+          <a:effectLst/>
+        </p:spPr>
+        <p:style>
+          <a:lnRef idx="1">
+            <a:schemeClr val="accent1"/>
+          </a:lnRef>
+          <a:fillRef idx="3">
+            <a:schemeClr val="accent1"/>
+          </a:fillRef>
+          <a:effectRef idx="2">
+            <a:schemeClr val="accent1"/>
+          </a:effectRef>
+          <a:fontRef idx="minor">
+            <a:schemeClr val="lt1"/>
+          </a:fontRef>
+        </p:style>
+        <p:txBody>
+          <a:bodyPr rtlCol="0" anchor="ctr" wrap="square" lIns="274320" rIns="45720" tIns="27432" bIns="27432"/>
+          <a:lstStyle/>
+          <a:p>
+            <a:pPr algn="l">
+              <a:lnSpc>
+                <a:spcPct val="100000"/>
+              </a:lnSpc>
+              <a:spcAft>
+                <a:spcPts val="0"/>
+              </a:spcAft>
+            </a:pPr>
+            <a:r>
+              <a:rPr sz="900" b="1" i="0" spc="100">
+                <a:solidFill>
+                  <a:srgbClr val="94A3B8"/>
+                </a:solidFill>
+                <a:latin typeface="Calibri"/>
+              </a:rPr>
+              <a:t>05</a:t>
+            </a:r>
+          </a:p>
+          <a:p>
+            <a:pPr algn="l">
+              <a:lnSpc>
+                <a:spcPct val="100000"/>
+              </a:lnSpc>
+              <a:spcAft>
+                <a:spcPts val="0"/>
+              </a:spcAft>
+            </a:pPr>
+            <a:r>
+              <a:rPr sz="1100" b="0" i="0">
+                <a:solidFill>
+                  <a:srgbClr val="94A3B8"/>
+                </a:solidFill>
+                <a:latin typeface="Calibri"/>
+              </a:rPr>
+              <a:t>Objetivos</a:t>
+            </a:r>
+          </a:p>
+        </p:txBody>
+      </p:sp>
+      <p:sp>
+        <p:nvSpPr>
+          <p:cNvPr id="6" name="Rounded Rectangle 5"/>
+          <p:cNvSpPr/>
+          <p:nvPr/>
+        </p:nvSpPr>
+        <p:spPr>
+          <a:xfrm>
+            <a:off x="2215504" y="2465889"/>
+            <a:ext cx="3713889" cy="791219"/>
+          </a:xfrm>
+          <a:prstGeom prst="roundRect">
+            <a:avLst>
+              <a:gd name="adj" fmla="val 12000"/>
+            </a:avLst>
+          </a:prstGeom>
+          <a:solidFill>
+            <a:srgbClr val="181B24">
+              <a:alpha val="70000"/>
+            </a:srgbClr>
+          </a:solidFill>
+          <a:ln w="12700">
+            <a:solidFill>
+              <a:srgbClr val="272C3D"/>
+            </a:solidFill>
+          </a:ln>
+          <a:effectLst/>
+        </p:spPr>
+        <p:style>
+          <a:lnRef idx="1">
+            <a:schemeClr val="accent1"/>
+          </a:lnRef>
+          <a:fillRef idx="3">
+            <a:schemeClr val="accent1"/>
+          </a:fillRef>
+          <a:effectRef idx="2">
+            <a:schemeClr val="accent1"/>
+          </a:effectRef>
+          <a:fontRef idx="minor">
+            <a:schemeClr val="lt1"/>
+          </a:fontRef>
+        </p:style>
+        <p:txBody>
+          <a:bodyPr rtlCol="0" anchor="ctr" wrap="square" lIns="274320" rIns="45720" tIns="27432" bIns="27432"/>
+          <a:lstStyle/>
+          <a:p>
+            <a:pPr algn="l">
+              <a:lnSpc>
+                <a:spcPct val="100000"/>
+              </a:lnSpc>
+              <a:spcAft>
+                <a:spcPts val="0"/>
+              </a:spcAft>
+            </a:pPr>
+            <a:r>
+              <a:rPr sz="1100" b="1" i="0" spc="100">
+                <a:solidFill>
+                  <a:srgbClr val="94A3B8"/>
+                </a:solidFill>
+                <a:latin typeface="Calibri"/>
+              </a:rPr>
+              <a:t>06</a:t>
+            </a:r>
+          </a:p>
+          <a:p>
+            <a:pPr algn="l">
+              <a:lnSpc>
+                <a:spcPct val="100000"/>
+              </a:lnSpc>
+              <a:spcAft>
+                <a:spcPts val="0"/>
+              </a:spcAft>
+            </a:pPr>
+            <a:r>
+              <a:rPr sz="1800" b="0" i="0">
+                <a:solidFill>
+                  <a:srgbClr val="94A3B8"/>
+                </a:solidFill>
+                <a:latin typeface="Calibri"/>
+              </a:rPr>
+              <a:t>Metodologia · Scrum</a:t>
+            </a:r>
+          </a:p>
+        </p:txBody>
+      </p:sp>
+      <p:sp>
+        <p:nvSpPr>
+          <p:cNvPr id="7" name="Rounded Rectangle 6"/>
+          <p:cNvSpPr/>
+          <p:nvPr/>
+        </p:nvSpPr>
+        <p:spPr>
+          <a:xfrm>
+            <a:off x="2103120" y="3529583"/>
+            <a:ext cx="4206240" cy="896112"/>
+          </a:xfrm>
+          <a:prstGeom prst="roundRect">
+            <a:avLst>
+              <a:gd name="adj" fmla="val 12000"/>
+            </a:avLst>
+          </a:prstGeom>
+          <a:solidFill>
+            <a:srgbClr val="1F232F"/>
+          </a:solidFill>
+          <a:ln w="12700">
+            <a:solidFill>
+              <a:srgbClr val="E50914"/>
+            </a:solidFill>
+          </a:ln>
+          <a:effectLst/>
+        </p:spPr>
+        <p:style>
+          <a:lnRef idx="1">
+            <a:schemeClr val="accent1"/>
+          </a:lnRef>
+          <a:fillRef idx="3">
+            <a:schemeClr val="accent1"/>
+          </a:fillRef>
+          <a:effectRef idx="2">
+            <a:schemeClr val="accent1"/>
+          </a:effectRef>
+          <a:fontRef idx="minor">
+            <a:schemeClr val="lt1"/>
+          </a:fontRef>
+        </p:style>
+        <p:txBody>
+          <a:bodyPr rtlCol="0" anchor="ctr" wrap="square" lIns="274320" rIns="45720" tIns="27432" bIns="27432"/>
+          <a:lstStyle/>
+          <a:p>
+            <a:pPr algn="l">
+              <a:lnSpc>
+                <a:spcPct val="100000"/>
+              </a:lnSpc>
+              <a:spcAft>
+                <a:spcPts val="0"/>
+              </a:spcAft>
+            </a:pPr>
+            <a:r>
+              <a:rPr sz="1200" b="1" i="0" spc="100">
+                <a:solidFill>
+                  <a:srgbClr val="E50914"/>
+                </a:solidFill>
+                <a:latin typeface="Calibri"/>
+              </a:rPr>
+              <a:t>07</a:t>
+            </a:r>
+          </a:p>
+          <a:p>
+            <a:pPr algn="l">
+              <a:lnSpc>
+                <a:spcPct val="100000"/>
+              </a:lnSpc>
+              <a:spcAft>
+                <a:spcPts val="0"/>
+              </a:spcAft>
+            </a:pPr>
+            <a:r>
+              <a:rPr sz="2000" b="1" i="0">
+                <a:solidFill>
+                  <a:srgbClr val="F8FAFC"/>
+                </a:solidFill>
+                <a:latin typeface="Calibri"/>
+              </a:rPr>
+              <a:t>Requisitos e casos de uso</a:t>
+            </a:r>
+          </a:p>
+        </p:txBody>
+      </p:sp>
+      <p:sp>
+        <p:nvSpPr>
+          <p:cNvPr id="8" name="Rectangle 7"/>
+          <p:cNvSpPr/>
+          <p:nvPr/>
+        </p:nvSpPr>
+        <p:spPr>
+          <a:xfrm>
+            <a:off x="2103120" y="3529583"/>
+            <a:ext cx="82296" cy="896112"/>
+          </a:xfrm>
+          <a:prstGeom prst="rect">
+            <a:avLst/>
+          </a:prstGeom>
+          <a:solidFill>
+            <a:srgbClr val="E50914"/>
+          </a:solidFill>
+          <a:ln>
+            <a:noFill/>
+          </a:ln>
+          <a:effectLst/>
+        </p:spPr>
+        <p:style>
+          <a:lnRef idx="1">
+            <a:schemeClr val="accent1"/>
+          </a:lnRef>
+          <a:fillRef idx="3">
+            <a:schemeClr val="accent1"/>
+          </a:fillRef>
+          <a:effectRef idx="2">
+            <a:schemeClr val="accent1"/>
+          </a:effectRef>
+          <a:fontRef idx="minor">
+            <a:schemeClr val="lt1"/>
+          </a:fontRef>
+        </p:style>
+        <p:txBody>
+          <a:bodyPr rtlCol="0" anchor="ctr"/>
+          <a:lstStyle/>
+          <a:p>
+            <a:pPr algn="ctr"/>
+          </a:p>
+        </p:txBody>
+      </p:sp>
+      <p:sp>
+        <p:nvSpPr>
+          <p:cNvPr id="9" name="Rounded Rectangle 8"/>
+          <p:cNvSpPr/>
+          <p:nvPr/>
+        </p:nvSpPr>
+        <p:spPr>
+          <a:xfrm>
+            <a:off x="2215504" y="4698170"/>
+            <a:ext cx="3713889" cy="791219"/>
+          </a:xfrm>
+          <a:prstGeom prst="roundRect">
+            <a:avLst>
+              <a:gd name="adj" fmla="val 12000"/>
+            </a:avLst>
+          </a:prstGeom>
+          <a:solidFill>
+            <a:srgbClr val="181B24">
+              <a:alpha val="70000"/>
+            </a:srgbClr>
+          </a:solidFill>
+          <a:ln w="12700">
+            <a:solidFill>
+              <a:srgbClr val="272C3D"/>
+            </a:solidFill>
+          </a:ln>
+          <a:effectLst/>
+        </p:spPr>
+        <p:style>
+          <a:lnRef idx="1">
+            <a:schemeClr val="accent1"/>
+          </a:lnRef>
+          <a:fillRef idx="3">
+            <a:schemeClr val="accent1"/>
+          </a:fillRef>
+          <a:effectRef idx="2">
+            <a:schemeClr val="accent1"/>
+          </a:effectRef>
+          <a:fontRef idx="minor">
+            <a:schemeClr val="lt1"/>
+          </a:fontRef>
+        </p:style>
+        <p:txBody>
+          <a:bodyPr rtlCol="0" anchor="ctr" wrap="square" lIns="274320" rIns="45720" tIns="27432" bIns="27432"/>
+          <a:lstStyle/>
+          <a:p>
+            <a:pPr algn="l">
+              <a:lnSpc>
+                <a:spcPct val="100000"/>
+              </a:lnSpc>
+              <a:spcAft>
+                <a:spcPts val="0"/>
+              </a:spcAft>
+            </a:pPr>
+            <a:r>
+              <a:rPr sz="1100" b="1" i="0" spc="100">
+                <a:solidFill>
+                  <a:srgbClr val="94A3B8"/>
+                </a:solidFill>
+                <a:latin typeface="Calibri"/>
+              </a:rPr>
+              <a:t>08</a:t>
+            </a:r>
+          </a:p>
+          <a:p>
+            <a:pPr algn="l">
+              <a:lnSpc>
+                <a:spcPct val="100000"/>
+              </a:lnSpc>
+              <a:spcAft>
+                <a:spcPts val="0"/>
+              </a:spcAft>
+            </a:pPr>
+            <a:r>
+              <a:rPr sz="1800" b="0" i="0">
+                <a:solidFill>
+                  <a:srgbClr val="94A3B8"/>
+                </a:solidFill>
+                <a:latin typeface="Calibri"/>
+              </a:rPr>
+              <a:t>Hierarquia de papéis</a:t>
+            </a:r>
+          </a:p>
+        </p:txBody>
+      </p:sp>
+      <p:sp>
+        <p:nvSpPr>
+          <p:cNvPr id="10" name="Rounded Rectangle 9"/>
+          <p:cNvSpPr/>
+          <p:nvPr/>
+        </p:nvSpPr>
+        <p:spPr>
+          <a:xfrm>
+            <a:off x="2526347" y="5698077"/>
+            <a:ext cx="2352099" cy="501099"/>
+          </a:xfrm>
+          <a:prstGeom prst="roundRect">
+            <a:avLst>
+              <a:gd name="adj" fmla="val 12000"/>
+            </a:avLst>
+          </a:prstGeom>
+          <a:solidFill>
+            <a:srgbClr val="181B24">
+              <a:alpha val="40000"/>
+            </a:srgbClr>
+          </a:solidFill>
+          <a:ln w="12700">
+            <a:solidFill>
+              <a:srgbClr val="272C3D"/>
+            </a:solidFill>
+          </a:ln>
+          <a:effectLst/>
+        </p:spPr>
+        <p:style>
+          <a:lnRef idx="1">
+            <a:schemeClr val="accent1"/>
+          </a:lnRef>
+          <a:fillRef idx="3">
+            <a:schemeClr val="accent1"/>
+          </a:fillRef>
+          <a:effectRef idx="2">
+            <a:schemeClr val="accent1"/>
+          </a:effectRef>
+          <a:fontRef idx="minor">
+            <a:schemeClr val="lt1"/>
+          </a:fontRef>
+        </p:style>
+        <p:txBody>
+          <a:bodyPr rtlCol="0" anchor="ctr" wrap="square" lIns="274320" rIns="45720" tIns="27432" bIns="27432"/>
+          <a:lstStyle/>
+          <a:p>
+            <a:pPr algn="l">
+              <a:lnSpc>
+                <a:spcPct val="100000"/>
+              </a:lnSpc>
+              <a:spcAft>
+                <a:spcPts val="0"/>
+              </a:spcAft>
+            </a:pPr>
+            <a:r>
+              <a:rPr sz="900" b="1" i="0" spc="100">
+                <a:solidFill>
+                  <a:srgbClr val="94A3B8"/>
+                </a:solidFill>
+                <a:latin typeface="Calibri"/>
+              </a:rPr>
+              <a:t>09</a:t>
+            </a:r>
+          </a:p>
+          <a:p>
+            <a:pPr algn="l">
+              <a:lnSpc>
+                <a:spcPct val="100000"/>
+              </a:lnSpc>
+              <a:spcAft>
+                <a:spcPts val="0"/>
+              </a:spcAft>
+            </a:pPr>
+            <a:r>
+              <a:rPr sz="1100" b="0" i="0">
+                <a:solidFill>
+                  <a:srgbClr val="94A3B8"/>
+                </a:solidFill>
+                <a:latin typeface="Calibri"/>
+              </a:rPr>
+              <a:t>Arquitetura</a:t>
+            </a:r>
+          </a:p>
+        </p:txBody>
+      </p:sp>
+      <p:sp>
+        <p:nvSpPr>
+          <p:cNvPr id="11" name="TextBox 10"/>
+          <p:cNvSpPr txBox="1"/>
+          <p:nvPr/>
+        </p:nvSpPr>
+        <p:spPr>
+          <a:xfrm>
+            <a:off x="8732520" y="2011680"/>
+            <a:ext cx="2926080" cy="274320"/>
+          </a:xfrm>
+          <a:prstGeom prst="rect">
+            <a:avLst/>
+          </a:prstGeom>
+          <a:noFill/>
+        </p:spPr>
+        <p:txBody>
+          <a:bodyPr wrap="square" anchor="t" lIns="45720" rIns="45720" tIns="27432" bIns="27432">
+            <a:spAutoFit/>
+          </a:bodyPr>
+          <a:lstStyle/>
+          <a:p>
+            <a:pPr algn="l">
+              <a:lnSpc>
+                <a:spcPct val="100000"/>
+              </a:lnSpc>
+              <a:spcAft>
+                <a:spcPts val="0"/>
+              </a:spcAft>
+            </a:pPr>
+            <a:r>
+              <a:rPr sz="1100" b="1" i="0" spc="150">
+                <a:solidFill>
+                  <a:srgbClr val="94A3B8"/>
+                </a:solidFill>
+                <a:latin typeface="Calibri"/>
+              </a:rPr>
+              <a:t>ÍNDICE</a:t>
+            </a:r>
+          </a:p>
+        </p:txBody>
+      </p:sp>
+      <p:sp>
+        <p:nvSpPr>
+          <p:cNvPr id="12" name="TextBox 11"/>
+          <p:cNvSpPr txBox="1"/>
+          <p:nvPr/>
+        </p:nvSpPr>
+        <p:spPr>
+          <a:xfrm>
+            <a:off x="8732520" y="2377440"/>
+            <a:ext cx="3017520" cy="274320"/>
+          </a:xfrm>
+          <a:prstGeom prst="rect">
+            <a:avLst/>
+          </a:prstGeom>
+          <a:noFill/>
+        </p:spPr>
+        <p:txBody>
+          <a:bodyPr wrap="square" anchor="t" lIns="45720" rIns="45720" tIns="27432" bIns="27432">
+            <a:spAutoFit/>
+          </a:bodyPr>
+          <a:lstStyle/>
+          <a:p>
+            <a:pPr algn="l">
+              <a:lnSpc>
+                <a:spcPct val="100000"/>
+              </a:lnSpc>
+              <a:spcAft>
+                <a:spcPts val="0"/>
+              </a:spcAft>
+            </a:pPr>
+            <a:r>
+              <a:rPr sz="1200" b="0" i="0">
+                <a:solidFill>
+                  <a:srgbClr val="64748B"/>
+                </a:solidFill>
+                <a:latin typeface="Calibri"/>
+              </a:rPr>
+              <a:t>03   Daily Scrum</a:t>
+            </a:r>
+          </a:p>
+        </p:txBody>
+      </p:sp>
+      <p:sp>
+        <p:nvSpPr>
+          <p:cNvPr id="13" name="TextBox 12"/>
+          <p:cNvSpPr txBox="1"/>
+          <p:nvPr/>
+        </p:nvSpPr>
+        <p:spPr>
+          <a:xfrm>
+            <a:off x="8732520" y="2660904"/>
+            <a:ext cx="3017520" cy="274320"/>
+          </a:xfrm>
+          <a:prstGeom prst="rect">
+            <a:avLst/>
+          </a:prstGeom>
+          <a:noFill/>
+        </p:spPr>
+        <p:txBody>
+          <a:bodyPr wrap="square" anchor="t" lIns="45720" rIns="45720" tIns="27432" bIns="27432">
+            <a:spAutoFit/>
+          </a:bodyPr>
+          <a:lstStyle/>
+          <a:p>
+            <a:pPr algn="l">
+              <a:lnSpc>
+                <a:spcPct val="100000"/>
+              </a:lnSpc>
+              <a:spcAft>
+                <a:spcPts val="0"/>
+              </a:spcAft>
+            </a:pPr>
+            <a:r>
+              <a:rPr sz="1200" b="0" i="0">
+                <a:solidFill>
+                  <a:srgbClr val="64748B"/>
+                </a:solidFill>
+                <a:latin typeface="Calibri"/>
+              </a:rPr>
+              <a:t>04   Problema e justificativa</a:t>
+            </a:r>
+          </a:p>
+        </p:txBody>
+      </p:sp>
+      <p:sp>
+        <p:nvSpPr>
+          <p:cNvPr id="14" name="TextBox 13"/>
+          <p:cNvSpPr txBox="1"/>
+          <p:nvPr/>
+        </p:nvSpPr>
+        <p:spPr>
+          <a:xfrm>
+            <a:off x="8732520" y="2944368"/>
+            <a:ext cx="3017520" cy="274320"/>
+          </a:xfrm>
+          <a:prstGeom prst="rect">
+            <a:avLst/>
+          </a:prstGeom>
+          <a:noFill/>
+        </p:spPr>
+        <p:txBody>
+          <a:bodyPr wrap="square" anchor="t" lIns="45720" rIns="45720" tIns="27432" bIns="27432">
+            <a:spAutoFit/>
+          </a:bodyPr>
+          <a:lstStyle/>
+          <a:p>
+            <a:pPr algn="l">
+              <a:lnSpc>
+                <a:spcPct val="100000"/>
+              </a:lnSpc>
+              <a:spcAft>
+                <a:spcPts val="0"/>
+              </a:spcAft>
+            </a:pPr>
+            <a:r>
+              <a:rPr sz="1200" b="0" i="0">
+                <a:solidFill>
+                  <a:srgbClr val="64748B"/>
+                </a:solidFill>
+                <a:latin typeface="Calibri"/>
+              </a:rPr>
+              <a:t>05   Objetivos</a:t>
+            </a:r>
+          </a:p>
+        </p:txBody>
+      </p:sp>
+      <p:sp>
+        <p:nvSpPr>
+          <p:cNvPr id="15" name="TextBox 14"/>
+          <p:cNvSpPr txBox="1"/>
+          <p:nvPr/>
+        </p:nvSpPr>
+        <p:spPr>
+          <a:xfrm>
+            <a:off x="8732520" y="3227832"/>
+            <a:ext cx="3017520" cy="274320"/>
+          </a:xfrm>
+          <a:prstGeom prst="rect">
+            <a:avLst/>
+          </a:prstGeom>
+          <a:noFill/>
+        </p:spPr>
+        <p:txBody>
+          <a:bodyPr wrap="square" anchor="t" lIns="45720" rIns="45720" tIns="27432" bIns="27432">
+            <a:spAutoFit/>
+          </a:bodyPr>
+          <a:lstStyle/>
+          <a:p>
+            <a:pPr algn="l">
+              <a:lnSpc>
+                <a:spcPct val="100000"/>
+              </a:lnSpc>
+              <a:spcAft>
+                <a:spcPts val="0"/>
+              </a:spcAft>
+            </a:pPr>
+            <a:r>
+              <a:rPr sz="1200" b="0" i="0">
+                <a:solidFill>
+                  <a:srgbClr val="64748B"/>
+                </a:solidFill>
+                <a:latin typeface="Calibri"/>
+              </a:rPr>
+              <a:t>06   Metodologia · Scrum</a:t>
+            </a:r>
+          </a:p>
+        </p:txBody>
+      </p:sp>
+      <p:sp>
+        <p:nvSpPr>
+          <p:cNvPr id="16" name="TextBox 15"/>
+          <p:cNvSpPr txBox="1"/>
+          <p:nvPr/>
+        </p:nvSpPr>
+        <p:spPr>
+          <a:xfrm>
+            <a:off x="8732520" y="3511296"/>
+            <a:ext cx="3017520" cy="274320"/>
+          </a:xfrm>
+          <a:prstGeom prst="rect">
+            <a:avLst/>
+          </a:prstGeom>
+          <a:noFill/>
+        </p:spPr>
+        <p:txBody>
+          <a:bodyPr wrap="square" anchor="t" lIns="45720" rIns="45720" tIns="27432" bIns="27432">
+            <a:spAutoFit/>
+          </a:bodyPr>
+          <a:lstStyle/>
+          <a:p>
+            <a:pPr algn="l">
+              <a:lnSpc>
+                <a:spcPct val="100000"/>
+              </a:lnSpc>
+              <a:spcAft>
+                <a:spcPts val="0"/>
+              </a:spcAft>
+            </a:pPr>
+            <a:r>
+              <a:rPr sz="1200" b="1" i="0">
+                <a:solidFill>
+                  <a:srgbClr val="E50914"/>
+                </a:solidFill>
+                <a:latin typeface="Calibri"/>
+              </a:rPr>
+              <a:t>07   Requisitos e casos de uso</a:t>
+            </a:r>
+          </a:p>
+        </p:txBody>
+      </p:sp>
+      <p:sp>
+        <p:nvSpPr>
+          <p:cNvPr id="17" name="TextBox 16"/>
+          <p:cNvSpPr txBox="1"/>
+          <p:nvPr/>
+        </p:nvSpPr>
+        <p:spPr>
+          <a:xfrm>
+            <a:off x="8732520" y="3794760"/>
+            <a:ext cx="3017520" cy="274320"/>
+          </a:xfrm>
+          <a:prstGeom prst="rect">
+            <a:avLst/>
+          </a:prstGeom>
+          <a:noFill/>
+        </p:spPr>
+        <p:txBody>
+          <a:bodyPr wrap="square" anchor="t" lIns="45720" rIns="45720" tIns="27432" bIns="27432">
+            <a:spAutoFit/>
+          </a:bodyPr>
+          <a:lstStyle/>
+          <a:p>
+            <a:pPr algn="l">
+              <a:lnSpc>
+                <a:spcPct val="100000"/>
+              </a:lnSpc>
+              <a:spcAft>
+                <a:spcPts val="0"/>
+              </a:spcAft>
+            </a:pPr>
+            <a:r>
+              <a:rPr sz="1200" b="0" i="0">
+                <a:solidFill>
+                  <a:srgbClr val="64748B"/>
+                </a:solidFill>
+                <a:latin typeface="Calibri"/>
+              </a:rPr>
+              <a:t>08   Hierarquia de papéis</a:t>
+            </a:r>
+          </a:p>
+        </p:txBody>
+      </p:sp>
+      <p:sp>
+        <p:nvSpPr>
+          <p:cNvPr id="18" name="TextBox 17"/>
+          <p:cNvSpPr txBox="1"/>
+          <p:nvPr/>
+        </p:nvSpPr>
+        <p:spPr>
+          <a:xfrm>
+            <a:off x="8732520" y="4078224"/>
+            <a:ext cx="3017520" cy="274320"/>
+          </a:xfrm>
+          <a:prstGeom prst="rect">
+            <a:avLst/>
+          </a:prstGeom>
+          <a:noFill/>
+        </p:spPr>
+        <p:txBody>
+          <a:bodyPr wrap="square" anchor="t" lIns="45720" rIns="45720" tIns="27432" bIns="27432">
+            <a:spAutoFit/>
+          </a:bodyPr>
+          <a:lstStyle/>
+          <a:p>
+            <a:pPr algn="l">
+              <a:lnSpc>
+                <a:spcPct val="100000"/>
+              </a:lnSpc>
+              <a:spcAft>
+                <a:spcPts val="0"/>
+              </a:spcAft>
+            </a:pPr>
+            <a:r>
+              <a:rPr sz="1200" b="0" i="0">
+                <a:solidFill>
+                  <a:srgbClr val="64748B"/>
+                </a:solidFill>
+                <a:latin typeface="Calibri"/>
+              </a:rPr>
+              <a:t>09   Arquitetura</a:t>
+            </a:r>
+          </a:p>
+        </p:txBody>
+      </p:sp>
+      <p:sp>
+        <p:nvSpPr>
+          <p:cNvPr id="19" name="TextBox 18"/>
+          <p:cNvSpPr txBox="1"/>
+          <p:nvPr/>
+        </p:nvSpPr>
+        <p:spPr>
+          <a:xfrm>
+            <a:off x="8732520" y="4361688"/>
+            <a:ext cx="3017520" cy="274320"/>
+          </a:xfrm>
+          <a:prstGeom prst="rect">
+            <a:avLst/>
+          </a:prstGeom>
+          <a:noFill/>
+        </p:spPr>
+        <p:txBody>
+          <a:bodyPr wrap="square" anchor="t" lIns="45720" rIns="45720" tIns="27432" bIns="27432">
+            <a:spAutoFit/>
+          </a:bodyPr>
+          <a:lstStyle/>
+          <a:p>
+            <a:pPr algn="l">
+              <a:lnSpc>
+                <a:spcPct val="100000"/>
+              </a:lnSpc>
+              <a:spcAft>
+                <a:spcPts val="0"/>
+              </a:spcAft>
+            </a:pPr>
+            <a:r>
+              <a:rPr sz="1200" b="0" i="0">
+                <a:solidFill>
+                  <a:srgbClr val="64748B"/>
+                </a:solidFill>
+                <a:latin typeface="Calibri"/>
+              </a:rPr>
+              <a:t>10   Segurança</a:t>
+            </a:r>
+          </a:p>
+        </p:txBody>
+      </p:sp>
+      <p:sp>
+        <p:nvSpPr>
+          <p:cNvPr id="20" name="TextBox 19"/>
+          <p:cNvSpPr txBox="1"/>
+          <p:nvPr/>
+        </p:nvSpPr>
+        <p:spPr>
+          <a:xfrm>
+            <a:off x="8732520" y="4645152"/>
+            <a:ext cx="3017520" cy="274320"/>
+          </a:xfrm>
+          <a:prstGeom prst="rect">
+            <a:avLst/>
+          </a:prstGeom>
+          <a:noFill/>
+        </p:spPr>
+        <p:txBody>
+          <a:bodyPr wrap="square" anchor="t" lIns="45720" rIns="45720" tIns="27432" bIns="27432">
+            <a:spAutoFit/>
+          </a:bodyPr>
+          <a:lstStyle/>
+          <a:p>
+            <a:pPr algn="l">
+              <a:lnSpc>
+                <a:spcPct val="100000"/>
+              </a:lnSpc>
+              <a:spcAft>
+                <a:spcPts val="0"/>
+              </a:spcAft>
+            </a:pPr>
+            <a:r>
+              <a:rPr sz="1200" b="0" i="0">
+                <a:solidFill>
+                  <a:srgbClr val="64748B"/>
+                </a:solidFill>
+                <a:latin typeface="Calibri"/>
+              </a:rPr>
+              <a:t>11   Demonstração</a:t>
+            </a:r>
+          </a:p>
+        </p:txBody>
+      </p:sp>
+      <p:sp>
+        <p:nvSpPr>
+          <p:cNvPr id="21" name="TextBox 20"/>
+          <p:cNvSpPr txBox="1"/>
+          <p:nvPr/>
+        </p:nvSpPr>
+        <p:spPr>
+          <a:xfrm>
+            <a:off x="8732520" y="4928616"/>
+            <a:ext cx="3017520" cy="274320"/>
+          </a:xfrm>
+          <a:prstGeom prst="rect">
+            <a:avLst/>
+          </a:prstGeom>
+          <a:noFill/>
+        </p:spPr>
+        <p:txBody>
+          <a:bodyPr wrap="square" anchor="t" lIns="45720" rIns="45720" tIns="27432" bIns="27432">
+            <a:spAutoFit/>
+          </a:bodyPr>
+          <a:lstStyle/>
+          <a:p>
+            <a:pPr algn="l">
+              <a:lnSpc>
+                <a:spcPct val="100000"/>
+              </a:lnSpc>
+              <a:spcAft>
+                <a:spcPts val="0"/>
+              </a:spcAft>
+            </a:pPr>
+            <a:r>
+              <a:rPr sz="1200" b="0" i="0">
+                <a:solidFill>
+                  <a:srgbClr val="64748B"/>
+                </a:solidFill>
+                <a:latin typeface="Calibri"/>
+              </a:rPr>
+              <a:t>12   Testes e validação</a:t>
+            </a:r>
+          </a:p>
+        </p:txBody>
+      </p:sp>
+      <p:sp>
+        <p:nvSpPr>
+          <p:cNvPr id="22" name="TextBox 21"/>
+          <p:cNvSpPr txBox="1"/>
+          <p:nvPr/>
+        </p:nvSpPr>
+        <p:spPr>
+          <a:xfrm>
+            <a:off x="8732520" y="5212080"/>
+            <a:ext cx="3017520" cy="274320"/>
+          </a:xfrm>
+          <a:prstGeom prst="rect">
+            <a:avLst/>
+          </a:prstGeom>
+          <a:noFill/>
+        </p:spPr>
+        <p:txBody>
+          <a:bodyPr wrap="square" anchor="t" lIns="45720" rIns="45720" tIns="27432" bIns="27432">
+            <a:spAutoFit/>
+          </a:bodyPr>
+          <a:lstStyle/>
+          <a:p>
+            <a:pPr algn="l">
+              <a:lnSpc>
+                <a:spcPct val="100000"/>
+              </a:lnSpc>
+              <a:spcAft>
+                <a:spcPts val="0"/>
+              </a:spcAft>
+            </a:pPr>
+            <a:r>
+              <a:rPr sz="1200" b="0" i="0">
+                <a:solidFill>
+                  <a:srgbClr val="64748B"/>
+                </a:solidFill>
+                <a:latin typeface="Calibri"/>
+              </a:rPr>
+              <a:t>13   Limitações e trabalhos futuros</a:t>
+            </a:r>
+          </a:p>
+        </p:txBody>
+      </p:sp>
+      <p:sp>
+        <p:nvSpPr>
+          <p:cNvPr id="23" name="TextBox 22"/>
+          <p:cNvSpPr txBox="1"/>
+          <p:nvPr/>
+        </p:nvSpPr>
+        <p:spPr>
+          <a:xfrm>
+            <a:off x="8732520" y="5495544"/>
+            <a:ext cx="3017520" cy="274320"/>
+          </a:xfrm>
+          <a:prstGeom prst="rect">
+            <a:avLst/>
+          </a:prstGeom>
+          <a:noFill/>
+        </p:spPr>
+        <p:txBody>
+          <a:bodyPr wrap="square" anchor="t" lIns="45720" rIns="45720" tIns="27432" bIns="27432">
+            <a:spAutoFit/>
+          </a:bodyPr>
+          <a:lstStyle/>
+          <a:p>
+            <a:pPr algn="l">
+              <a:lnSpc>
+                <a:spcPct val="100000"/>
+              </a:lnSpc>
+              <a:spcAft>
+                <a:spcPts val="0"/>
+              </a:spcAft>
+            </a:pPr>
+            <a:r>
+              <a:rPr sz="1200" b="0" i="0">
+                <a:solidFill>
+                  <a:srgbClr val="64748B"/>
+                </a:solidFill>
+                <a:latin typeface="Calibri"/>
+              </a:rPr>
+              <a:t>14   Links do projeto</a:t>
+            </a:r>
+          </a:p>
+        </p:txBody>
+      </p:sp>
+      <p:sp>
+        <p:nvSpPr>
+          <p:cNvPr id="24" name="TextBox 23"/>
+          <p:cNvSpPr txBox="1"/>
+          <p:nvPr/>
+        </p:nvSpPr>
+        <p:spPr>
+          <a:xfrm>
+            <a:off x="8732520" y="5779008"/>
+            <a:ext cx="3017520" cy="274320"/>
+          </a:xfrm>
+          <a:prstGeom prst="rect">
+            <a:avLst/>
+          </a:prstGeom>
+          <a:noFill/>
+        </p:spPr>
+        <p:txBody>
+          <a:bodyPr wrap="square" anchor="t" lIns="45720" rIns="45720" tIns="27432" bIns="27432">
+            <a:spAutoFit/>
+          </a:bodyPr>
+          <a:lstStyle/>
+          <a:p>
+            <a:pPr algn="l">
+              <a:lnSpc>
+                <a:spcPct val="100000"/>
+              </a:lnSpc>
+              <a:spcAft>
+                <a:spcPts val="0"/>
+              </a:spcAft>
+            </a:pPr>
+            <a:r>
+              <a:rPr sz="1200" b="0" i="0">
+                <a:solidFill>
+                  <a:srgbClr val="64748B"/>
+                </a:solidFill>
+                <a:latin typeface="Calibri"/>
+              </a:rPr>
+              <a:t>15   Encerramento</a:t>
+            </a:r>
+          </a:p>
+        </p:txBody>
+      </p:sp>
+      <p:sp>
+        <p:nvSpPr>
+          <p:cNvPr id="25" name="Rectangle 24"/>
+          <p:cNvSpPr/>
+          <p:nvPr/>
+        </p:nvSpPr>
+        <p:spPr>
+          <a:xfrm>
+            <a:off x="548640" y="6327648"/>
+            <a:ext cx="11091672" cy="9144"/>
+          </a:xfrm>
+          <a:prstGeom prst="rect">
+            <a:avLst/>
+          </a:prstGeom>
+          <a:solidFill>
+            <a:srgbClr val="272C3D"/>
+          </a:solidFill>
+          <a:ln>
+            <a:noFill/>
+          </a:ln>
+          <a:effectLst/>
+        </p:spPr>
+        <p:style>
+          <a:lnRef idx="1">
+            <a:schemeClr val="accent1"/>
+          </a:lnRef>
+          <a:fillRef idx="3">
+            <a:schemeClr val="accent1"/>
+          </a:fillRef>
+          <a:effectRef idx="2">
+            <a:schemeClr val="accent1"/>
+          </a:effectRef>
+          <a:fontRef idx="minor">
+            <a:schemeClr val="lt1"/>
+          </a:fontRef>
+        </p:style>
+        <p:txBody>
+          <a:bodyPr rtlCol="0" anchor="ctr"/>
+          <a:lstStyle/>
+          <a:p>
+            <a:pPr algn="ctr"/>
+          </a:p>
+        </p:txBody>
+      </p:sp>
+      <p:sp>
+        <p:nvSpPr>
+          <p:cNvPr id="26" name="TextBox 25"/>
+          <p:cNvSpPr txBox="1"/>
+          <p:nvPr/>
+        </p:nvSpPr>
+        <p:spPr>
+          <a:xfrm>
+            <a:off x="548640" y="6382512"/>
+            <a:ext cx="5486400" cy="274320"/>
+          </a:xfrm>
+          <a:prstGeom prst="rect">
+            <a:avLst/>
+          </a:prstGeom>
+          <a:noFill/>
+        </p:spPr>
+        <p:txBody>
+          <a:bodyPr wrap="square" anchor="t" lIns="45720" rIns="45720" tIns="27432" bIns="27432">
+            <a:spAutoFit/>
+          </a:bodyPr>
+          <a:lstStyle/>
+          <a:p>
+            <a:pPr algn="l">
+              <a:lnSpc>
+                <a:spcPct val="100000"/>
+              </a:lnSpc>
+              <a:spcAft>
+                <a:spcPts val="0"/>
+              </a:spcAft>
+            </a:pPr>
+            <a:r>
+              <a:rPr sz="1000" b="0" i="0" spc="60">
+                <a:solidFill>
+                  <a:srgbClr val="64748B"/>
+                </a:solidFill>
+                <a:latin typeface="Calibri"/>
+              </a:rPr>
+              <a:t>CoreMotiom  ·  Etapa 5 (TCC)</a:t>
+            </a:r>
+          </a:p>
+        </p:txBody>
+      </p:sp>
+      <p:sp>
+        <p:nvSpPr>
+          <p:cNvPr id="27" name="TextBox 26"/>
+          <p:cNvSpPr txBox="1"/>
+          <p:nvPr/>
+        </p:nvSpPr>
+        <p:spPr>
+          <a:xfrm>
+            <a:off x="9784080" y="6382512"/>
+            <a:ext cx="1828800" cy="274320"/>
+          </a:xfrm>
+          <a:prstGeom prst="rect">
+            <a:avLst/>
+          </a:prstGeom>
+          <a:noFill/>
+        </p:spPr>
+        <p:txBody>
+          <a:bodyPr wrap="square" anchor="t" lIns="45720" rIns="45720" tIns="27432" bIns="27432">
+            <a:spAutoFit/>
+          </a:bodyPr>
+          <a:lstStyle/>
+          <a:p>
+            <a:pPr algn="r">
+              <a:lnSpc>
+                <a:spcPct val="100000"/>
+              </a:lnSpc>
+              <a:spcAft>
+                <a:spcPts val="0"/>
+              </a:spcAft>
+            </a:pPr>
+            <a:r>
+              <a:rPr sz="1000" b="0" i="0">
+                <a:solidFill>
+                  <a:srgbClr val="64748B"/>
+                </a:solidFill>
+                <a:latin typeface="Calibri"/>
+              </a:rPr>
+              <a:t>02 / 15</a:t>
+            </a:r>
+          </a:p>
+        </p:txBody>
+      </p:sp>
+    </p:spTree>
+  </p:cSld>
+  <p:clrMapOvr>
+    <a:masterClrMapping/>
+  </p:clrMapOvr>
+  <p:transition spd="med">
+    <p:push dir="u"/>
+  </p:transition>
+  <p:timing>
+    <p:tnLst>
+      <p:par>
+        <p:cTn id="1" dur="indefinite" restart="never" nodeType="tmRoot">
+          <p:childTnLst>
+            <p:seq concurrent="1" nextAc="seek">
+              <p:cTn id="2" dur="indefinite" nodeType="mainSeq">
+                <p:childTnLst>
+                  <p:par>
+                    <p:cTn id="3" fill="hold">
+                      <p:stCondLst>
+                        <p:cond delay="indefinite"/>
+                        <p:cond evt="onBegin" delay="0">
+                          <p:tn val="2"/>
+                        </p:cond>
+                      </p:stCondLst>
+                      <p:childTnLst>
+                        <p:par>
+                          <p:cTn id="4" fill="hold">
+                            <p:stCondLst>
+                              <p:cond delay="0"/>
+                            </p:stCondLst>
+                            <p:childTnLst>
+                              <p:par>
+                                <p:cTn id="11" presetID="10" presetClass="entr" presetSubtype="0" fill="hold" grpId="0" nodeType="withEffect">
+                                  <p:stCondLst>
+                                    <p:cond delay="0"/>
+                                  </p:stCondLst>
+                                  <p:childTnLst>
+                                    <p:set>
+                                      <p:cBhvr>
+                                        <p:cTn id="12" dur="1" fill="hold">
+                                          <p:stCondLst>
+                                            <p:cond delay="0"/>
+                                          </p:stCondLst>
+                                        </p:cTn>
+                                        <p:tgtEl>
+                                          <p:spTgt spid="2"/>
+                                        </p:tgtEl>
+                                        <p:attrNameLst>
+                                          <p:attrName>style.visibility</p:attrName>
+                                        </p:attrNameLst>
+                                      </p:cBhvr>
+                                      <p:to>
+                                        <p:strVal val="visible"/>
+                                      </p:to>
+                                    </p:set>
+                                    <p:animEffect transition="in" filter="fade">
+                                      <p:cBhvr>
+                                        <p:cTn id="13" dur="480"/>
+                                        <p:tgtEl>
+                                          <p:spTgt spid="2"/>
+                                        </p:tgtEl>
+                                      </p:cBhvr>
+                                    </p:animEffect>
+                                    <p:anim calcmode="lin" valueType="num">
+                                      <p:cBhvr>
+                                        <p:cTn id="14" dur="480" fill="hold"/>
+                                        <p:tgtEl>
+                                          <p:spTgt spid="2"/>
+                                        </p:tgtEl>
+                                        <p:attrNameLst>
+                                          <p:attrName>ppt_y</p:attrName>
+                                        </p:attrNameLst>
+                                      </p:cBhvr>
+                                      <p:tavLst>
+                                        <p:tav tm="0">
+                                          <p:val>
+                                            <p:strVal val="#ppt_y+0.045"/>
+                                          </p:val>
+                                        </p:tav>
+                                        <p:tav tm="100000">
+                                          <p:val>
+                                            <p:strVal val="#ppt_y"/>
+                                          </p:val>
+                                        </p:tav>
+                                      </p:tavLst>
+                                    </p:anim>
+                                  </p:childTnLst>
+                                </p:cTn>
+                              </p:par>
+                              <p:par>
+                                <p:cTn id="15" presetID="10" presetClass="entr" presetSubtype="0" fill="hold" grpId="0" nodeType="withEffect">
+                                  <p:stCondLst>
+                                    <p:cond delay="69"/>
+                                  </p:stCondLst>
+                                  <p:childTnLst>
+                                    <p:set>
+                                      <p:cBhvr>
+                                        <p:cTn id="16" dur="1" fill="hold">
+                                          <p:stCondLst>
+                                            <p:cond delay="0"/>
+                                          </p:stCondLst>
+                                        </p:cTn>
+                                        <p:tgtEl>
+                                          <p:spTgt spid="3"/>
+                                        </p:tgtEl>
+                                        <p:attrNameLst>
+                                          <p:attrName>style.visibility</p:attrName>
+                                        </p:attrNameLst>
+                                      </p:cBhvr>
+                                      <p:to>
+                                        <p:strVal val="visible"/>
+                                      </p:to>
+                                    </p:set>
+                                    <p:animEffect transition="in" filter="fade">
+                                      <p:cBhvr>
+                                        <p:cTn id="17" dur="480"/>
+                                        <p:tgtEl>
+                                          <p:spTgt spid="3"/>
+                                        </p:tgtEl>
+                                      </p:cBhvr>
+                                    </p:animEffect>
+                                    <p:anim calcmode="lin" valueType="num">
+                                      <p:cBhvr>
+                                        <p:cTn id="18" dur="480" fill="hold"/>
+                                        <p:tgtEl>
+                                          <p:spTgt spid="3"/>
+                                        </p:tgtEl>
+                                        <p:attrNameLst>
+                                          <p:attrName>ppt_y</p:attrName>
+                                        </p:attrNameLst>
+                                      </p:cBhvr>
+                                      <p:tavLst>
+                                        <p:tav tm="0">
+                                          <p:val>
+                                            <p:strVal val="#ppt_y+0.045"/>
+                                          </p:val>
+                                        </p:tav>
+                                        <p:tav tm="100000">
+                                          <p:val>
+                                            <p:strVal val="#ppt_y"/>
+                                          </p:val>
+                                        </p:tav>
+                                      </p:tavLst>
+                                    </p:anim>
+                                  </p:childTnLst>
+                                </p:cTn>
+                              </p:par>
+                              <p:par>
+                                <p:cTn id="19" presetID="10" presetClass="entr" presetSubtype="0" fill="hold" grpId="0" nodeType="withEffect">
+                                  <p:stCondLst>
+                                    <p:cond delay="138"/>
+                                  </p:stCondLst>
+                                  <p:childTnLst>
+                                    <p:set>
+                                      <p:cBhvr>
+                                        <p:cTn id="20" dur="1" fill="hold">
+                                          <p:stCondLst>
+                                            <p:cond delay="0"/>
+                                          </p:stCondLst>
+                                        </p:cTn>
+                                        <p:tgtEl>
+                                          <p:spTgt spid="4"/>
+                                        </p:tgtEl>
+                                        <p:attrNameLst>
+                                          <p:attrName>style.visibility</p:attrName>
+                                        </p:attrNameLst>
+                                      </p:cBhvr>
+                                      <p:to>
+                                        <p:strVal val="visible"/>
+                                      </p:to>
+                                    </p:set>
+                                    <p:animEffect transition="in" filter="fade">
+                                      <p:cBhvr>
+                                        <p:cTn id="21" dur="480"/>
+                                        <p:tgtEl>
+                                          <p:spTgt spid="4"/>
+                                        </p:tgtEl>
+                                      </p:cBhvr>
+                                    </p:animEffect>
+                                    <p:anim calcmode="lin" valueType="num">
+                                      <p:cBhvr>
+                                        <p:cTn id="22" dur="480" fill="hold"/>
+                                        <p:tgtEl>
+                                          <p:spTgt spid="4"/>
+                                        </p:tgtEl>
+                                        <p:attrNameLst>
+                                          <p:attrName>ppt_y</p:attrName>
+                                        </p:attrNameLst>
+                                      </p:cBhvr>
+                                      <p:tavLst>
+                                        <p:tav tm="0">
+                                          <p:val>
+                                            <p:strVal val="#ppt_y+0.045"/>
+                                          </p:val>
+                                        </p:tav>
+                                        <p:tav tm="100000">
+                                          <p:val>
+                                            <p:strVal val="#ppt_y"/>
+                                          </p:val>
+                                        </p:tav>
+                                      </p:tavLst>
+                                    </p:anim>
+                                  </p:childTnLst>
+                                </p:cTn>
+                              </p:par>
+                              <p:par>
+                                <p:cTn id="23" presetID="10" presetClass="entr" presetSubtype="0" fill="hold" grpId="0" nodeType="withEffect">
+                                  <p:stCondLst>
+                                    <p:cond delay="207"/>
+                                  </p:stCondLst>
+                                  <p:childTnLst>
+                                    <p:set>
+                                      <p:cBhvr>
+                                        <p:cTn id="24" dur="1" fill="hold">
+                                          <p:stCondLst>
+                                            <p:cond delay="0"/>
+                                          </p:stCondLst>
+                                        </p:cTn>
+                                        <p:tgtEl>
+                                          <p:spTgt spid="5"/>
+                                        </p:tgtEl>
+                                        <p:attrNameLst>
+                                          <p:attrName>style.visibility</p:attrName>
+                                        </p:attrNameLst>
+                                      </p:cBhvr>
+                                      <p:to>
+                                        <p:strVal val="visible"/>
+                                      </p:to>
+                                    </p:set>
+                                    <p:animEffect transition="in" filter="fade">
+                                      <p:cBhvr>
+                                        <p:cTn id="25" dur="480"/>
+                                        <p:tgtEl>
+                                          <p:spTgt spid="5"/>
+                                        </p:tgtEl>
+                                      </p:cBhvr>
+                                    </p:animEffect>
+                                    <p:anim calcmode="lin" valueType="num">
+                                      <p:cBhvr>
+                                        <p:cTn id="26" dur="480" fill="hold"/>
+                                        <p:tgtEl>
+                                          <p:spTgt spid="5"/>
+                                        </p:tgtEl>
+                                        <p:attrNameLst>
+                                          <p:attrName>ppt_y</p:attrName>
+                                        </p:attrNameLst>
+                                      </p:cBhvr>
+                                      <p:tavLst>
+                                        <p:tav tm="0">
+                                          <p:val>
+                                            <p:strVal val="#ppt_y+0.045"/>
+                                          </p:val>
+                                        </p:tav>
+                                        <p:tav tm="100000">
+                                          <p:val>
+                                            <p:strVal val="#ppt_y"/>
+                                          </p:val>
+                                        </p:tav>
+                                      </p:tavLst>
+                                    </p:anim>
+                                  </p:childTnLst>
+                                </p:cTn>
+                              </p:par>
+                              <p:par>
+                                <p:cTn id="27" presetID="10" presetClass="entr" presetSubtype="0" fill="hold" grpId="0" nodeType="withEffect">
+                                  <p:stCondLst>
+                                    <p:cond delay="276"/>
+                                  </p:stCondLst>
+                                  <p:childTnLst>
+                                    <p:set>
+                                      <p:cBhvr>
+                                        <p:cTn id="28" dur="1" fill="hold">
+                                          <p:stCondLst>
+                                            <p:cond delay="0"/>
+                                          </p:stCondLst>
+                                        </p:cTn>
+                                        <p:tgtEl>
+                                          <p:spTgt spid="6"/>
+                                        </p:tgtEl>
+                                        <p:attrNameLst>
+                                          <p:attrName>style.visibility</p:attrName>
+                                        </p:attrNameLst>
+                                      </p:cBhvr>
+                                      <p:to>
+                                        <p:strVal val="visible"/>
+                                      </p:to>
+                                    </p:set>
+                                    <p:animEffect transition="in" filter="fade">
+                                      <p:cBhvr>
+                                        <p:cTn id="29" dur="480"/>
+                                        <p:tgtEl>
+                                          <p:spTgt spid="6"/>
+                                        </p:tgtEl>
+                                      </p:cBhvr>
+                                    </p:animEffect>
+                                    <p:anim calcmode="lin" valueType="num">
+                                      <p:cBhvr>
+                                        <p:cTn id="30" dur="480" fill="hold"/>
+                                        <p:tgtEl>
+                                          <p:spTgt spid="6"/>
+                                        </p:tgtEl>
+                                        <p:attrNameLst>
+                                          <p:attrName>ppt_y</p:attrName>
+                                        </p:attrNameLst>
+                                      </p:cBhvr>
+                                      <p:tavLst>
+                                        <p:tav tm="0">
+                                          <p:val>
+                                            <p:strVal val="#ppt_y+0.045"/>
+                                          </p:val>
+                                        </p:tav>
+                                        <p:tav tm="100000">
+                                          <p:val>
+                                            <p:strVal val="#ppt_y"/>
+                                          </p:val>
+                                        </p:tav>
+                                      </p:tavLst>
+                                    </p:anim>
+                                  </p:childTnLst>
+                                </p:cTn>
+                              </p:par>
+                              <p:par>
+                                <p:cTn id="31" presetID="10" presetClass="entr" presetSubtype="0" fill="hold" grpId="0" nodeType="withEffect">
+                                  <p:stCondLst>
+                                    <p:cond delay="345"/>
+                                  </p:stCondLst>
+                                  <p:childTnLst>
+                                    <p:set>
+                                      <p:cBhvr>
+                                        <p:cTn id="32" dur="1" fill="hold">
+                                          <p:stCondLst>
+                                            <p:cond delay="0"/>
+                                          </p:stCondLst>
+                                        </p:cTn>
+                                        <p:tgtEl>
+                                          <p:spTgt spid="7"/>
+                                        </p:tgtEl>
+                                        <p:attrNameLst>
+                                          <p:attrName>style.visibility</p:attrName>
+                                        </p:attrNameLst>
+                                      </p:cBhvr>
+                                      <p:to>
+                                        <p:strVal val="visible"/>
+                                      </p:to>
+                                    </p:set>
+                                    <p:animEffect transition="in" filter="fade">
+                                      <p:cBhvr>
+                                        <p:cTn id="33" dur="480"/>
+                                        <p:tgtEl>
+                                          <p:spTgt spid="7"/>
+                                        </p:tgtEl>
+                                      </p:cBhvr>
+                                    </p:animEffect>
+                                    <p:anim calcmode="lin" valueType="num">
+                                      <p:cBhvr>
+                                        <p:cTn id="34" dur="480" fill="hold"/>
+                                        <p:tgtEl>
+                                          <p:spTgt spid="7"/>
+                                        </p:tgtEl>
+                                        <p:attrNameLst>
+                                          <p:attrName>ppt_y</p:attrName>
+                                        </p:attrNameLst>
+                                      </p:cBhvr>
+                                      <p:tavLst>
+                                        <p:tav tm="0">
+                                          <p:val>
+                                            <p:strVal val="#ppt_y+0.045"/>
+                                          </p:val>
+                                        </p:tav>
+                                        <p:tav tm="100000">
+                                          <p:val>
+                                            <p:strVal val="#ppt_y"/>
+                                          </p:val>
+                                        </p:tav>
+                                      </p:tavLst>
+                                    </p:anim>
+                                  </p:childTnLst>
+                                </p:cTn>
+                              </p:par>
+                              <p:par>
+                                <p:cTn id="35" presetID="10" presetClass="entr" presetSubtype="0" fill="hold" grpId="0" nodeType="withEffect">
+                                  <p:stCondLst>
+                                    <p:cond delay="414"/>
+                                  </p:stCondLst>
+                                  <p:childTnLst>
+                                    <p:set>
+                                      <p:cBhvr>
+                                        <p:cTn id="36" dur="1" fill="hold">
+                                          <p:stCondLst>
+                                            <p:cond delay="0"/>
+                                          </p:stCondLst>
+                                        </p:cTn>
+                                        <p:tgtEl>
+                                          <p:spTgt spid="8"/>
+                                        </p:tgtEl>
+                                        <p:attrNameLst>
+                                          <p:attrName>style.visibility</p:attrName>
+                                        </p:attrNameLst>
+                                      </p:cBhvr>
+                                      <p:to>
+                                        <p:strVal val="visible"/>
+                                      </p:to>
+                                    </p:set>
+                                    <p:animEffect transition="in" filter="fade">
+                                      <p:cBhvr>
+                                        <p:cTn id="37" dur="480"/>
+                                        <p:tgtEl>
+                                          <p:spTgt spid="8"/>
+                                        </p:tgtEl>
+                                      </p:cBhvr>
+                                    </p:animEffect>
+                                    <p:anim calcmode="lin" valueType="num">
+                                      <p:cBhvr>
+                                        <p:cTn id="38" dur="480" fill="hold"/>
+                                        <p:tgtEl>
+                                          <p:spTgt spid="8"/>
+                                        </p:tgtEl>
+                                        <p:attrNameLst>
+                                          <p:attrName>ppt_y</p:attrName>
+                                        </p:attrNameLst>
+                                      </p:cBhvr>
+                                      <p:tavLst>
+                                        <p:tav tm="0">
+                                          <p:val>
+                                            <p:strVal val="#ppt_y+0.045"/>
+                                          </p:val>
+                                        </p:tav>
+                                        <p:tav tm="100000">
+                                          <p:val>
+                                            <p:strVal val="#ppt_y"/>
+                                          </p:val>
+                                        </p:tav>
+                                      </p:tavLst>
+                                    </p:anim>
+                                  </p:childTnLst>
+                                </p:cTn>
+                              </p:par>
+                              <p:par>
+                                <p:cTn id="39" presetID="10" presetClass="entr" presetSubtype="0" fill="hold" grpId="0" nodeType="withEffect">
+                                  <p:stCondLst>
+                                    <p:cond delay="483"/>
+                                  </p:stCondLst>
+                                  <p:childTnLst>
+                                    <p:set>
+                                      <p:cBhvr>
+                                        <p:cTn id="40" dur="1" fill="hold">
+                                          <p:stCondLst>
+                                            <p:cond delay="0"/>
+                                          </p:stCondLst>
+                                        </p:cTn>
+                                        <p:tgtEl>
+                                          <p:spTgt spid="9"/>
+                                        </p:tgtEl>
+                                        <p:attrNameLst>
+                                          <p:attrName>style.visibility</p:attrName>
+                                        </p:attrNameLst>
+                                      </p:cBhvr>
+                                      <p:to>
+                                        <p:strVal val="visible"/>
+                                      </p:to>
+                                    </p:set>
+                                    <p:animEffect transition="in" filter="fade">
+                                      <p:cBhvr>
+                                        <p:cTn id="41" dur="480"/>
+                                        <p:tgtEl>
+                                          <p:spTgt spid="9"/>
+                                        </p:tgtEl>
+                                      </p:cBhvr>
+                                    </p:animEffect>
+                                    <p:anim calcmode="lin" valueType="num">
+                                      <p:cBhvr>
+                                        <p:cTn id="42" dur="480" fill="hold"/>
+                                        <p:tgtEl>
+                                          <p:spTgt spid="9"/>
+                                        </p:tgtEl>
+                                        <p:attrNameLst>
+                                          <p:attrName>ppt_y</p:attrName>
+                                        </p:attrNameLst>
+                                      </p:cBhvr>
+                                      <p:tavLst>
+                                        <p:tav tm="0">
+                                          <p:val>
+                                            <p:strVal val="#ppt_y+0.045"/>
+                                          </p:val>
+                                        </p:tav>
+                                        <p:tav tm="100000">
+                                          <p:val>
+                                            <p:strVal val="#ppt_y"/>
+                                          </p:val>
+                                        </p:tav>
+                                      </p:tavLst>
+                                    </p:anim>
+                                  </p:childTnLst>
+                                </p:cTn>
+                              </p:par>
+                              <p:par>
+                                <p:cTn id="43" presetID="10" presetClass="entr" presetSubtype="0" fill="hold" grpId="0" nodeType="withEffect">
+                                  <p:stCondLst>
+                                    <p:cond delay="552"/>
+                                  </p:stCondLst>
+                                  <p:childTnLst>
+                                    <p:set>
+                                      <p:cBhvr>
+                                        <p:cTn id="44" dur="1" fill="hold">
+                                          <p:stCondLst>
+                                            <p:cond delay="0"/>
+                                          </p:stCondLst>
+                                        </p:cTn>
+                                        <p:tgtEl>
+                                          <p:spTgt spid="10"/>
+                                        </p:tgtEl>
+                                        <p:attrNameLst>
+                                          <p:attrName>style.visibility</p:attrName>
+                                        </p:attrNameLst>
+                                      </p:cBhvr>
+                                      <p:to>
+                                        <p:strVal val="visible"/>
+                                      </p:to>
+                                    </p:set>
+                                    <p:animEffect transition="in" filter="fade">
+                                      <p:cBhvr>
+                                        <p:cTn id="45" dur="480"/>
+                                        <p:tgtEl>
+                                          <p:spTgt spid="10"/>
+                                        </p:tgtEl>
+                                      </p:cBhvr>
+                                    </p:animEffect>
+                                    <p:anim calcmode="lin" valueType="num">
+                                      <p:cBhvr>
+                                        <p:cTn id="46" dur="480" fill="hold"/>
+                                        <p:tgtEl>
+                                          <p:spTgt spid="10"/>
+                                        </p:tgtEl>
+                                        <p:attrNameLst>
+                                          <p:attrName>ppt_y</p:attrName>
+                                        </p:attrNameLst>
+                                      </p:cBhvr>
+                                      <p:tavLst>
+                                        <p:tav tm="0">
+                                          <p:val>
+                                            <p:strVal val="#ppt_y+0.045"/>
+                                          </p:val>
+                                        </p:tav>
+                                        <p:tav tm="100000">
+                                          <p:val>
+                                            <p:strVal val="#ppt_y"/>
+                                          </p:val>
+                                        </p:tav>
+                                      </p:tavLst>
+                                    </p:anim>
+                                  </p:childTnLst>
+                                </p:cTn>
+                              </p:par>
+                              <p:par>
+                                <p:cTn id="47" presetID="10" presetClass="entr" presetSubtype="0" fill="hold" grpId="0" nodeType="withEffect">
+                                  <p:stCondLst>
+                                    <p:cond delay="621"/>
+                                  </p:stCondLst>
+                                  <p:childTnLst>
+                                    <p:set>
+                                      <p:cBhvr>
+                                        <p:cTn id="48" dur="1" fill="hold">
+                                          <p:stCondLst>
+                                            <p:cond delay="0"/>
+                                          </p:stCondLst>
+                                        </p:cTn>
+                                        <p:tgtEl>
+                                          <p:spTgt spid="11"/>
+                                        </p:tgtEl>
+                                        <p:attrNameLst>
+                                          <p:attrName>style.visibility</p:attrName>
+                                        </p:attrNameLst>
+                                      </p:cBhvr>
+                                      <p:to>
+                                        <p:strVal val="visible"/>
+                                      </p:to>
+                                    </p:set>
+                                    <p:animEffect transition="in" filter="fade">
+                                      <p:cBhvr>
+                                        <p:cTn id="49" dur="480"/>
+                                        <p:tgtEl>
+                                          <p:spTgt spid="11"/>
+                                        </p:tgtEl>
+                                      </p:cBhvr>
+                                    </p:animEffect>
+                                    <p:anim calcmode="lin" valueType="num">
+                                      <p:cBhvr>
+                                        <p:cTn id="50" dur="480" fill="hold"/>
+                                        <p:tgtEl>
+                                          <p:spTgt spid="11"/>
+                                        </p:tgtEl>
+                                        <p:attrNameLst>
+                                          <p:attrName>ppt_y</p:attrName>
+                                        </p:attrNameLst>
+                                      </p:cBhvr>
+                                      <p:tavLst>
+                                        <p:tav tm="0">
+                                          <p:val>
+                                            <p:strVal val="#ppt_y+0.045"/>
+                                          </p:val>
+                                        </p:tav>
+                                        <p:tav tm="100000">
+                                          <p:val>
+                                            <p:strVal val="#ppt_y"/>
+                                          </p:val>
+                                        </p:tav>
+                                      </p:tavLst>
+                                    </p:anim>
+                                  </p:childTnLst>
+                                </p:cTn>
+                              </p:par>
+                              <p:par>
+                                <p:cTn id="51" presetID="10" presetClass="entr" presetSubtype="0" fill="hold" grpId="0" nodeType="withEffect">
+                                  <p:stCondLst>
+                                    <p:cond delay="690"/>
+                                  </p:stCondLst>
+                                  <p:childTnLst>
+                                    <p:set>
+                                      <p:cBhvr>
+                                        <p:cTn id="52" dur="1" fill="hold">
+                                          <p:stCondLst>
+                                            <p:cond delay="0"/>
+                                          </p:stCondLst>
+                                        </p:cTn>
+                                        <p:tgtEl>
+                                          <p:spTgt spid="12"/>
+                                        </p:tgtEl>
+                                        <p:attrNameLst>
+                                          <p:attrName>style.visibility</p:attrName>
+                                        </p:attrNameLst>
+                                      </p:cBhvr>
+                                      <p:to>
+                                        <p:strVal val="visible"/>
+                                      </p:to>
+                                    </p:set>
+                                    <p:animEffect transition="in" filter="fade">
+                                      <p:cBhvr>
+                                        <p:cTn id="53" dur="480"/>
+                                        <p:tgtEl>
+                                          <p:spTgt spid="12"/>
+                                        </p:tgtEl>
+                                      </p:cBhvr>
+                                    </p:animEffect>
+                                    <p:anim calcmode="lin" valueType="num">
+                                      <p:cBhvr>
+                                        <p:cTn id="54" dur="480" fill="hold"/>
+                                        <p:tgtEl>
+                                          <p:spTgt spid="12"/>
+                                        </p:tgtEl>
+                                        <p:attrNameLst>
+                                          <p:attrName>ppt_y</p:attrName>
+                                        </p:attrNameLst>
+                                      </p:cBhvr>
+                                      <p:tavLst>
+                                        <p:tav tm="0">
+                                          <p:val>
+                                            <p:strVal val="#ppt_y+0.045"/>
+                                          </p:val>
+                                        </p:tav>
+                                        <p:tav tm="100000">
+                                          <p:val>
+                                            <p:strVal val="#ppt_y"/>
+                                          </p:val>
+                                        </p:tav>
+                                      </p:tavLst>
+                                    </p:anim>
+                                  </p:childTnLst>
+                                </p:cTn>
+                              </p:par>
+                              <p:par>
+                                <p:cTn id="55" presetID="10" presetClass="entr" presetSubtype="0" fill="hold" grpId="0" nodeType="withEffect">
+                                  <p:stCondLst>
+                                    <p:cond delay="759"/>
+                                  </p:stCondLst>
+                                  <p:childTnLst>
+                                    <p:set>
+                                      <p:cBhvr>
+                                        <p:cTn id="56" dur="1" fill="hold">
+                                          <p:stCondLst>
+                                            <p:cond delay="0"/>
+                                          </p:stCondLst>
+                                        </p:cTn>
+                                        <p:tgtEl>
+                                          <p:spTgt spid="13"/>
+                                        </p:tgtEl>
+                                        <p:attrNameLst>
+                                          <p:attrName>style.visibility</p:attrName>
+                                        </p:attrNameLst>
+                                      </p:cBhvr>
+                                      <p:to>
+                                        <p:strVal val="visible"/>
+                                      </p:to>
+                                    </p:set>
+                                    <p:animEffect transition="in" filter="fade">
+                                      <p:cBhvr>
+                                        <p:cTn id="57" dur="480"/>
+                                        <p:tgtEl>
+                                          <p:spTgt spid="13"/>
+                                        </p:tgtEl>
+                                      </p:cBhvr>
+                                    </p:animEffect>
+                                    <p:anim calcmode="lin" valueType="num">
+                                      <p:cBhvr>
+                                        <p:cTn id="58" dur="480" fill="hold"/>
+                                        <p:tgtEl>
+                                          <p:spTgt spid="13"/>
+                                        </p:tgtEl>
+                                        <p:attrNameLst>
+                                          <p:attrName>ppt_y</p:attrName>
+                                        </p:attrNameLst>
+                                      </p:cBhvr>
+                                      <p:tavLst>
+                                        <p:tav tm="0">
+                                          <p:val>
+                                            <p:strVal val="#ppt_y+0.045"/>
+                                          </p:val>
+                                        </p:tav>
+                                        <p:tav tm="100000">
+                                          <p:val>
+                                            <p:strVal val="#ppt_y"/>
+                                          </p:val>
+                                        </p:tav>
+                                      </p:tavLst>
+                                    </p:anim>
+                                  </p:childTnLst>
+                                </p:cTn>
+                              </p:par>
+                              <p:par>
+                                <p:cTn id="59" presetID="10" presetClass="entr" presetSubtype="0" fill="hold" grpId="0" nodeType="withEffect">
+                                  <p:stCondLst>
+                                    <p:cond delay="828"/>
+                                  </p:stCondLst>
+                                  <p:childTnLst>
+                                    <p:set>
+                                      <p:cBhvr>
+                                        <p:cTn id="60" dur="1" fill="hold">
+                                          <p:stCondLst>
+                                            <p:cond delay="0"/>
+                                          </p:stCondLst>
+                                        </p:cTn>
+                                        <p:tgtEl>
+                                          <p:spTgt spid="14"/>
+                                        </p:tgtEl>
+                                        <p:attrNameLst>
+                                          <p:attrName>style.visibility</p:attrName>
+                                        </p:attrNameLst>
+                                      </p:cBhvr>
+                                      <p:to>
+                                        <p:strVal val="visible"/>
+                                      </p:to>
+                                    </p:set>
+                                    <p:animEffect transition="in" filter="fade">
+                                      <p:cBhvr>
+                                        <p:cTn id="61" dur="480"/>
+                                        <p:tgtEl>
+                                          <p:spTgt spid="14"/>
+                                        </p:tgtEl>
+                                      </p:cBhvr>
+                                    </p:animEffect>
+                                    <p:anim calcmode="lin" valueType="num">
+                                      <p:cBhvr>
+                                        <p:cTn id="62" dur="480" fill="hold"/>
+                                        <p:tgtEl>
+                                          <p:spTgt spid="14"/>
+                                        </p:tgtEl>
+                                        <p:attrNameLst>
+                                          <p:attrName>ppt_y</p:attrName>
+                                        </p:attrNameLst>
+                                      </p:cBhvr>
+                                      <p:tavLst>
+                                        <p:tav tm="0">
+                                          <p:val>
+                                            <p:strVal val="#ppt_y+0.045"/>
+                                          </p:val>
+                                        </p:tav>
+                                        <p:tav tm="100000">
+                                          <p:val>
+                                            <p:strVal val="#ppt_y"/>
+                                          </p:val>
+                                        </p:tav>
+                                      </p:tavLst>
+                                    </p:anim>
+                                  </p:childTnLst>
+                                </p:cTn>
+                              </p:par>
+                              <p:par>
+                                <p:cTn id="63" presetID="10" presetClass="entr" presetSubtype="0" fill="hold" grpId="0" nodeType="withEffect">
+                                  <p:stCondLst>
+                                    <p:cond delay="897"/>
+                                  </p:stCondLst>
+                                  <p:childTnLst>
+                                    <p:set>
+                                      <p:cBhvr>
+                                        <p:cTn id="64" dur="1" fill="hold">
+                                          <p:stCondLst>
+                                            <p:cond delay="0"/>
+                                          </p:stCondLst>
+                                        </p:cTn>
+                                        <p:tgtEl>
+                                          <p:spTgt spid="15"/>
+                                        </p:tgtEl>
+                                        <p:attrNameLst>
+                                          <p:attrName>style.visibility</p:attrName>
+                                        </p:attrNameLst>
+                                      </p:cBhvr>
+                                      <p:to>
+                                        <p:strVal val="visible"/>
+                                      </p:to>
+                                    </p:set>
+                                    <p:animEffect transition="in" filter="fade">
+                                      <p:cBhvr>
+                                        <p:cTn id="65" dur="480"/>
+                                        <p:tgtEl>
+                                          <p:spTgt spid="15"/>
+                                        </p:tgtEl>
+                                      </p:cBhvr>
+                                    </p:animEffect>
+                                    <p:anim calcmode="lin" valueType="num">
+                                      <p:cBhvr>
+                                        <p:cTn id="66" dur="480" fill="hold"/>
+                                        <p:tgtEl>
+                                          <p:spTgt spid="15"/>
+                                        </p:tgtEl>
+                                        <p:attrNameLst>
+                                          <p:attrName>ppt_y</p:attrName>
+                                        </p:attrNameLst>
+                                      </p:cBhvr>
+                                      <p:tavLst>
+                                        <p:tav tm="0">
+                                          <p:val>
+                                            <p:strVal val="#ppt_y+0.045"/>
+                                          </p:val>
+                                        </p:tav>
+                                        <p:tav tm="100000">
+                                          <p:val>
+                                            <p:strVal val="#ppt_y"/>
+                                          </p:val>
+                                        </p:tav>
+                                      </p:tavLst>
+                                    </p:anim>
+                                  </p:childTnLst>
+                                </p:cTn>
+                              </p:par>
+                              <p:par>
+                                <p:cTn id="67" presetID="10" presetClass="entr" presetSubtype="0" fill="hold" grpId="0" nodeType="withEffect">
+                                  <p:stCondLst>
+                                    <p:cond delay="966"/>
+                                  </p:stCondLst>
+                                  <p:childTnLst>
+                                    <p:set>
+                                      <p:cBhvr>
+                                        <p:cTn id="68" dur="1" fill="hold">
+                                          <p:stCondLst>
+                                            <p:cond delay="0"/>
+                                          </p:stCondLst>
+                                        </p:cTn>
+                                        <p:tgtEl>
+                                          <p:spTgt spid="16"/>
+                                        </p:tgtEl>
+                                        <p:attrNameLst>
+                                          <p:attrName>style.visibility</p:attrName>
+                                        </p:attrNameLst>
+                                      </p:cBhvr>
+                                      <p:to>
+                                        <p:strVal val="visible"/>
+                                      </p:to>
+                                    </p:set>
+                                    <p:animEffect transition="in" filter="fade">
+                                      <p:cBhvr>
+                                        <p:cTn id="69" dur="480"/>
+                                        <p:tgtEl>
+                                          <p:spTgt spid="16"/>
+                                        </p:tgtEl>
+                                      </p:cBhvr>
+                                    </p:animEffect>
+                                    <p:anim calcmode="lin" valueType="num">
+                                      <p:cBhvr>
+                                        <p:cTn id="70" dur="480" fill="hold"/>
+                                        <p:tgtEl>
+                                          <p:spTgt spid="16"/>
+                                        </p:tgtEl>
+                                        <p:attrNameLst>
+                                          <p:attrName>ppt_y</p:attrName>
+                                        </p:attrNameLst>
+                                      </p:cBhvr>
+                                      <p:tavLst>
+                                        <p:tav tm="0">
+                                          <p:val>
+                                            <p:strVal val="#ppt_y+0.045"/>
+                                          </p:val>
+                                        </p:tav>
+                                        <p:tav tm="100000">
+                                          <p:val>
+                                            <p:strVal val="#ppt_y"/>
+                                          </p:val>
+                                        </p:tav>
+                                      </p:tavLst>
+                                    </p:anim>
+                                  </p:childTnLst>
+                                </p:cTn>
+                              </p:par>
+                              <p:par>
+                                <p:cTn id="71" presetID="10" presetClass="entr" presetSubtype="0" fill="hold" grpId="0" nodeType="withEffect">
+                                  <p:stCondLst>
+                                    <p:cond delay="1035"/>
+                                  </p:stCondLst>
+                                  <p:childTnLst>
+                                    <p:set>
+                                      <p:cBhvr>
+                                        <p:cTn id="72" dur="1" fill="hold">
+                                          <p:stCondLst>
+                                            <p:cond delay="0"/>
+                                          </p:stCondLst>
+                                        </p:cTn>
+                                        <p:tgtEl>
+                                          <p:spTgt spid="17"/>
+                                        </p:tgtEl>
+                                        <p:attrNameLst>
+                                          <p:attrName>style.visibility</p:attrName>
+                                        </p:attrNameLst>
+                                      </p:cBhvr>
+                                      <p:to>
+                                        <p:strVal val="visible"/>
+                                      </p:to>
+                                    </p:set>
+                                    <p:animEffect transition="in" filter="fade">
+                                      <p:cBhvr>
+                                        <p:cTn id="73" dur="480"/>
+                                        <p:tgtEl>
+                                          <p:spTgt spid="17"/>
+                                        </p:tgtEl>
+                                      </p:cBhvr>
+                                    </p:animEffect>
+                                    <p:anim calcmode="lin" valueType="num">
+                                      <p:cBhvr>
+                                        <p:cTn id="74" dur="480" fill="hold"/>
+                                        <p:tgtEl>
+                                          <p:spTgt spid="17"/>
+                                        </p:tgtEl>
+                                        <p:attrNameLst>
+                                          <p:attrName>ppt_y</p:attrName>
+                                        </p:attrNameLst>
+                                      </p:cBhvr>
+                                      <p:tavLst>
+                                        <p:tav tm="0">
+                                          <p:val>
+                                            <p:strVal val="#ppt_y+0.045"/>
+                                          </p:val>
+                                        </p:tav>
+                                        <p:tav tm="100000">
+                                          <p:val>
+                                            <p:strVal val="#ppt_y"/>
+                                          </p:val>
+                                        </p:tav>
+                                      </p:tavLst>
+                                    </p:anim>
+                                  </p:childTnLst>
+                                </p:cTn>
+                              </p:par>
+                              <p:par>
+                                <p:cTn id="75" presetID="10" presetClass="entr" presetSubtype="0" fill="hold" grpId="0" nodeType="withEffect">
+                                  <p:stCondLst>
+                                    <p:cond delay="1104"/>
+                                  </p:stCondLst>
+                                  <p:childTnLst>
+                                    <p:set>
+                                      <p:cBhvr>
+                                        <p:cTn id="76" dur="1" fill="hold">
+                                          <p:stCondLst>
+                                            <p:cond delay="0"/>
+                                          </p:stCondLst>
+                                        </p:cTn>
+                                        <p:tgtEl>
+                                          <p:spTgt spid="18"/>
+                                        </p:tgtEl>
+                                        <p:attrNameLst>
+                                          <p:attrName>style.visibility</p:attrName>
+                                        </p:attrNameLst>
+                                      </p:cBhvr>
+                                      <p:to>
+                                        <p:strVal val="visible"/>
+                                      </p:to>
+                                    </p:set>
+                                    <p:animEffect transition="in" filter="fade">
+                                      <p:cBhvr>
+                                        <p:cTn id="77" dur="480"/>
+                                        <p:tgtEl>
+                                          <p:spTgt spid="18"/>
+                                        </p:tgtEl>
+                                      </p:cBhvr>
+                                    </p:animEffect>
+                                    <p:anim calcmode="lin" valueType="num">
+                                      <p:cBhvr>
+                                        <p:cTn id="78" dur="480" fill="hold"/>
+                                        <p:tgtEl>
+                                          <p:spTgt spid="18"/>
+                                        </p:tgtEl>
+                                        <p:attrNameLst>
+                                          <p:attrName>ppt_y</p:attrName>
+                                        </p:attrNameLst>
+                                      </p:cBhvr>
+                                      <p:tavLst>
+                                        <p:tav tm="0">
+                                          <p:val>
+                                            <p:strVal val="#ppt_y+0.045"/>
+                                          </p:val>
+                                        </p:tav>
+                                        <p:tav tm="100000">
+                                          <p:val>
+                                            <p:strVal val="#ppt_y"/>
+                                          </p:val>
+                                        </p:tav>
+                                      </p:tavLst>
+                                    </p:anim>
+                                  </p:childTnLst>
+                                </p:cTn>
+                              </p:par>
+                              <p:par>
+                                <p:cTn id="79" presetID="10" presetClass="entr" presetSubtype="0" fill="hold" grpId="0" nodeType="withEffect">
+                                  <p:stCondLst>
+                                    <p:cond delay="1173"/>
+                                  </p:stCondLst>
+                                  <p:childTnLst>
+                                    <p:set>
+                                      <p:cBhvr>
+                                        <p:cTn id="80" dur="1" fill="hold">
+                                          <p:stCondLst>
+                                            <p:cond delay="0"/>
+                                          </p:stCondLst>
+                                        </p:cTn>
+                                        <p:tgtEl>
+                                          <p:spTgt spid="19"/>
+                                        </p:tgtEl>
+                                        <p:attrNameLst>
+                                          <p:attrName>style.visibility</p:attrName>
+                                        </p:attrNameLst>
+                                      </p:cBhvr>
+                                      <p:to>
+                                        <p:strVal val="visible"/>
+                                      </p:to>
+                                    </p:set>
+                                    <p:animEffect transition="in" filter="fade">
+                                      <p:cBhvr>
+                                        <p:cTn id="81" dur="480"/>
+                                        <p:tgtEl>
+                                          <p:spTgt spid="19"/>
+                                        </p:tgtEl>
+                                      </p:cBhvr>
+                                    </p:animEffect>
+                                    <p:anim calcmode="lin" valueType="num">
+                                      <p:cBhvr>
+                                        <p:cTn id="82" dur="480" fill="hold"/>
+                                        <p:tgtEl>
+                                          <p:spTgt spid="19"/>
+                                        </p:tgtEl>
+                                        <p:attrNameLst>
+                                          <p:attrName>ppt_y</p:attrName>
+                                        </p:attrNameLst>
+                                      </p:cBhvr>
+                                      <p:tavLst>
+                                        <p:tav tm="0">
+                                          <p:val>
+                                            <p:strVal val="#ppt_y+0.045"/>
+                                          </p:val>
+                                        </p:tav>
+                                        <p:tav tm="100000">
+                                          <p:val>
+                                            <p:strVal val="#ppt_y"/>
+                                          </p:val>
+                                        </p:tav>
+                                      </p:tavLst>
+                                    </p:anim>
+                                  </p:childTnLst>
+                                </p:cTn>
+                              </p:par>
+                              <p:par>
+                                <p:cTn id="83" presetID="10" presetClass="entr" presetSubtype="0" fill="hold" grpId="0" nodeType="withEffect">
+                                  <p:stCondLst>
+                                    <p:cond delay="1242"/>
+                                  </p:stCondLst>
+                                  <p:childTnLst>
+                                    <p:set>
+                                      <p:cBhvr>
+                                        <p:cTn id="84" dur="1" fill="hold">
+                                          <p:stCondLst>
+                                            <p:cond delay="0"/>
+                                          </p:stCondLst>
+                                        </p:cTn>
+                                        <p:tgtEl>
+                                          <p:spTgt spid="20"/>
+                                        </p:tgtEl>
+                                        <p:attrNameLst>
+                                          <p:attrName>style.visibility</p:attrName>
+                                        </p:attrNameLst>
+                                      </p:cBhvr>
+                                      <p:to>
+                                        <p:strVal val="visible"/>
+                                      </p:to>
+                                    </p:set>
+                                    <p:animEffect transition="in" filter="fade">
+                                      <p:cBhvr>
+                                        <p:cTn id="85" dur="480"/>
+                                        <p:tgtEl>
+                                          <p:spTgt spid="20"/>
+                                        </p:tgtEl>
+                                      </p:cBhvr>
+                                    </p:animEffect>
+                                    <p:anim calcmode="lin" valueType="num">
+                                      <p:cBhvr>
+                                        <p:cTn id="86" dur="480" fill="hold"/>
+                                        <p:tgtEl>
+                                          <p:spTgt spid="20"/>
+                                        </p:tgtEl>
+                                        <p:attrNameLst>
+                                          <p:attrName>ppt_y</p:attrName>
+                                        </p:attrNameLst>
+                                      </p:cBhvr>
+                                      <p:tavLst>
+                                        <p:tav tm="0">
+                                          <p:val>
+                                            <p:strVal val="#ppt_y+0.045"/>
+                                          </p:val>
+                                        </p:tav>
+                                        <p:tav tm="100000">
+                                          <p:val>
+                                            <p:strVal val="#ppt_y"/>
+                                          </p:val>
+                                        </p:tav>
+                                      </p:tavLst>
+                                    </p:anim>
+                                  </p:childTnLst>
+                                </p:cTn>
+                              </p:par>
+                              <p:par>
+                                <p:cTn id="87" presetID="10" presetClass="entr" presetSubtype="0" fill="hold" grpId="0" nodeType="withEffect">
+                                  <p:stCondLst>
+                                    <p:cond delay="1311"/>
+                                  </p:stCondLst>
+                                  <p:childTnLst>
+                                    <p:set>
+                                      <p:cBhvr>
+                                        <p:cTn id="88" dur="1" fill="hold">
+                                          <p:stCondLst>
+                                            <p:cond delay="0"/>
+                                          </p:stCondLst>
+                                        </p:cTn>
+                                        <p:tgtEl>
+                                          <p:spTgt spid="21"/>
+                                        </p:tgtEl>
+                                        <p:attrNameLst>
+                                          <p:attrName>style.visibility</p:attrName>
+                                        </p:attrNameLst>
+                                      </p:cBhvr>
+                                      <p:to>
+                                        <p:strVal val="visible"/>
+                                      </p:to>
+                                    </p:set>
+                                    <p:animEffect transition="in" filter="fade">
+                                      <p:cBhvr>
+                                        <p:cTn id="89" dur="480"/>
+                                        <p:tgtEl>
+                                          <p:spTgt spid="21"/>
+                                        </p:tgtEl>
+                                      </p:cBhvr>
+                                    </p:animEffect>
+                                    <p:anim calcmode="lin" valueType="num">
+                                      <p:cBhvr>
+                                        <p:cTn id="90" dur="480" fill="hold"/>
+                                        <p:tgtEl>
+                                          <p:spTgt spid="21"/>
+                                        </p:tgtEl>
+                                        <p:attrNameLst>
+                                          <p:attrName>ppt_y</p:attrName>
+                                        </p:attrNameLst>
+                                      </p:cBhvr>
+                                      <p:tavLst>
+                                        <p:tav tm="0">
+                                          <p:val>
+                                            <p:strVal val="#ppt_y+0.045"/>
+                                          </p:val>
+                                        </p:tav>
+                                        <p:tav tm="100000">
+                                          <p:val>
+                                            <p:strVal val="#ppt_y"/>
+                                          </p:val>
+                                        </p:tav>
+                                      </p:tavLst>
+                                    </p:anim>
+                                  </p:childTnLst>
+                                </p:cTn>
+                              </p:par>
+                              <p:par>
+                                <p:cTn id="91" presetID="10" presetClass="entr" presetSubtype="0" fill="hold" grpId="0" nodeType="withEffect">
+                                  <p:stCondLst>
+                                    <p:cond delay="1380"/>
+                                  </p:stCondLst>
+                                  <p:childTnLst>
+                                    <p:set>
+                                      <p:cBhvr>
+                                        <p:cTn id="92" dur="1" fill="hold">
+                                          <p:stCondLst>
+                                            <p:cond delay="0"/>
+                                          </p:stCondLst>
+                                        </p:cTn>
+                                        <p:tgtEl>
+                                          <p:spTgt spid="22"/>
+                                        </p:tgtEl>
+                                        <p:attrNameLst>
+                                          <p:attrName>style.visibility</p:attrName>
+                                        </p:attrNameLst>
+                                      </p:cBhvr>
+                                      <p:to>
+                                        <p:strVal val="visible"/>
+                                      </p:to>
+                                    </p:set>
+                                    <p:animEffect transition="in" filter="fade">
+                                      <p:cBhvr>
+                                        <p:cTn id="93" dur="480"/>
+                                        <p:tgtEl>
+                                          <p:spTgt spid="22"/>
+                                        </p:tgtEl>
+                                      </p:cBhvr>
+                                    </p:animEffect>
+                                    <p:anim calcmode="lin" valueType="num">
+                                      <p:cBhvr>
+                                        <p:cTn id="94" dur="480" fill="hold"/>
+                                        <p:tgtEl>
+                                          <p:spTgt spid="22"/>
+                                        </p:tgtEl>
+                                        <p:attrNameLst>
+                                          <p:attrName>ppt_y</p:attrName>
+                                        </p:attrNameLst>
+                                      </p:cBhvr>
+                                      <p:tavLst>
+                                        <p:tav tm="0">
+                                          <p:val>
+                                            <p:strVal val="#ppt_y+0.045"/>
+                                          </p:val>
+                                        </p:tav>
+                                        <p:tav tm="100000">
+                                          <p:val>
+                                            <p:strVal val="#ppt_y"/>
+                                          </p:val>
+                                        </p:tav>
+                                      </p:tavLst>
+                                    </p:anim>
+                                  </p:childTnLst>
+                                </p:cTn>
+                              </p:par>
+                              <p:par>
+                                <p:cTn id="95" presetID="10" presetClass="entr" presetSubtype="0" fill="hold" grpId="0" nodeType="withEffect">
+                                  <p:stCondLst>
+                                    <p:cond delay="1449"/>
+                                  </p:stCondLst>
+                                  <p:childTnLst>
+                                    <p:set>
+                                      <p:cBhvr>
+                                        <p:cTn id="96" dur="1" fill="hold">
+                                          <p:stCondLst>
+                                            <p:cond delay="0"/>
+                                          </p:stCondLst>
+                                        </p:cTn>
+                                        <p:tgtEl>
+                                          <p:spTgt spid="23"/>
+                                        </p:tgtEl>
+                                        <p:attrNameLst>
+                                          <p:attrName>style.visibility</p:attrName>
+                                        </p:attrNameLst>
+                                      </p:cBhvr>
+                                      <p:to>
+                                        <p:strVal val="visible"/>
+                                      </p:to>
+                                    </p:set>
+                                    <p:animEffect transition="in" filter="fade">
+                                      <p:cBhvr>
+                                        <p:cTn id="97" dur="480"/>
+                                        <p:tgtEl>
+                                          <p:spTgt spid="23"/>
+                                        </p:tgtEl>
+                                      </p:cBhvr>
+                                    </p:animEffect>
+                                    <p:anim calcmode="lin" valueType="num">
+                                      <p:cBhvr>
+                                        <p:cTn id="98" dur="480" fill="hold"/>
+                                        <p:tgtEl>
+                                          <p:spTgt spid="23"/>
+                                        </p:tgtEl>
+                                        <p:attrNameLst>
+                                          <p:attrName>ppt_y</p:attrName>
+                                        </p:attrNameLst>
+                                      </p:cBhvr>
+                                      <p:tavLst>
+                                        <p:tav tm="0">
+                                          <p:val>
+                                            <p:strVal val="#ppt_y+0.045"/>
+                                          </p:val>
+                                        </p:tav>
+                                        <p:tav tm="100000">
+                                          <p:val>
+                                            <p:strVal val="#ppt_y"/>
+                                          </p:val>
+                                        </p:tav>
+                                      </p:tavLst>
+                                    </p:anim>
+                                  </p:childTnLst>
+                                </p:cTn>
+                              </p:par>
+                              <p:par>
+                                <p:cTn id="99" presetID="10" presetClass="entr" presetSubtype="0" fill="hold" grpId="0" nodeType="withEffect">
+                                  <p:stCondLst>
+                                    <p:cond delay="1518"/>
+                                  </p:stCondLst>
+                                  <p:childTnLst>
+                                    <p:set>
+                                      <p:cBhvr>
+                                        <p:cTn id="100" dur="1" fill="hold">
+                                          <p:stCondLst>
+                                            <p:cond delay="0"/>
+                                          </p:stCondLst>
+                                        </p:cTn>
+                                        <p:tgtEl>
+                                          <p:spTgt spid="24"/>
+                                        </p:tgtEl>
+                                        <p:attrNameLst>
+                                          <p:attrName>style.visibility</p:attrName>
+                                        </p:attrNameLst>
+                                      </p:cBhvr>
+                                      <p:to>
+                                        <p:strVal val="visible"/>
+                                      </p:to>
+                                    </p:set>
+                                    <p:animEffect transition="in" filter="fade">
+                                      <p:cBhvr>
+                                        <p:cTn id="101" dur="480"/>
+                                        <p:tgtEl>
+                                          <p:spTgt spid="24"/>
+                                        </p:tgtEl>
+                                      </p:cBhvr>
+                                    </p:animEffect>
+                                    <p:anim calcmode="lin" valueType="num">
+                                      <p:cBhvr>
+                                        <p:cTn id="102" dur="480" fill="hold"/>
+                                        <p:tgtEl>
+                                          <p:spTgt spid="24"/>
+                                        </p:tgtEl>
+                                        <p:attrNameLst>
+                                          <p:attrName>ppt_y</p:attrName>
+                                        </p:attrNameLst>
+                                      </p:cBhvr>
+                                      <p:tavLst>
+                                        <p:tav tm="0">
+                                          <p:val>
+                                            <p:strVal val="#ppt_y+0.045"/>
+                                          </p:val>
+                                        </p:tav>
+                                        <p:tav tm="100000">
+                                          <p:val>
+                                            <p:strVal val="#ppt_y"/>
+                                          </p:val>
+                                        </p:tav>
+                                      </p:tavLst>
+                                    </p:anim>
+                                  </p:childTnLst>
+                                </p:cTn>
+                              </p:par>
+                              <p:par>
+                                <p:cTn id="103" presetID="10" presetClass="entr" presetSubtype="0" fill="hold" grpId="0" nodeType="withEffect">
+                                  <p:stCondLst>
+                                    <p:cond delay="1587"/>
+                                  </p:stCondLst>
+                                  <p:childTnLst>
+                                    <p:set>
+                                      <p:cBhvr>
+                                        <p:cTn id="104" dur="1" fill="hold">
+                                          <p:stCondLst>
+                                            <p:cond delay="0"/>
+                                          </p:stCondLst>
+                                        </p:cTn>
+                                        <p:tgtEl>
+                                          <p:spTgt spid="25"/>
+                                        </p:tgtEl>
+                                        <p:attrNameLst>
+                                          <p:attrName>style.visibility</p:attrName>
+                                        </p:attrNameLst>
+                                      </p:cBhvr>
+                                      <p:to>
+                                        <p:strVal val="visible"/>
+                                      </p:to>
+                                    </p:set>
+                                    <p:animEffect transition="in" filter="fade">
+                                      <p:cBhvr>
+                                        <p:cTn id="105" dur="480"/>
+                                        <p:tgtEl>
+                                          <p:spTgt spid="25"/>
+                                        </p:tgtEl>
+                                      </p:cBhvr>
+                                    </p:animEffect>
+                                    <p:anim calcmode="lin" valueType="num">
+                                      <p:cBhvr>
+                                        <p:cTn id="106" dur="480" fill="hold"/>
+                                        <p:tgtEl>
+                                          <p:spTgt spid="25"/>
+                                        </p:tgtEl>
+                                        <p:attrNameLst>
+                                          <p:attrName>ppt_y</p:attrName>
+                                        </p:attrNameLst>
+                                      </p:cBhvr>
+                                      <p:tavLst>
+                                        <p:tav tm="0">
+                                          <p:val>
+                                            <p:strVal val="#ppt_y+0.045"/>
+                                          </p:val>
+                                        </p:tav>
+                                        <p:tav tm="100000">
+                                          <p:val>
+                                            <p:strVal val="#ppt_y"/>
+                                          </p:val>
+                                        </p:tav>
+                                      </p:tavLst>
+                                    </p:anim>
+                                  </p:childTnLst>
+                                </p:cTn>
+                              </p:par>
+                              <p:par>
+                                <p:cTn id="107" presetID="10" presetClass="entr" presetSubtype="0" fill="hold" grpId="0" nodeType="withEffect">
+                                  <p:stCondLst>
+                                    <p:cond delay="1656"/>
+                                  </p:stCondLst>
+                                  <p:childTnLst>
+                                    <p:set>
+                                      <p:cBhvr>
+                                        <p:cTn id="108" dur="1" fill="hold">
+                                          <p:stCondLst>
+                                            <p:cond delay="0"/>
+                                          </p:stCondLst>
+                                        </p:cTn>
+                                        <p:tgtEl>
+                                          <p:spTgt spid="26"/>
+                                        </p:tgtEl>
+                                        <p:attrNameLst>
+                                          <p:attrName>style.visibility</p:attrName>
+                                        </p:attrNameLst>
+                                      </p:cBhvr>
+                                      <p:to>
+                                        <p:strVal val="visible"/>
+                                      </p:to>
+                                    </p:set>
+                                    <p:animEffect transition="in" filter="fade">
+                                      <p:cBhvr>
+                                        <p:cTn id="109" dur="480"/>
+                                        <p:tgtEl>
+                                          <p:spTgt spid="26"/>
+                                        </p:tgtEl>
+                                      </p:cBhvr>
+                                    </p:animEffect>
+                                    <p:anim calcmode="lin" valueType="num">
+                                      <p:cBhvr>
+                                        <p:cTn id="110" dur="480" fill="hold"/>
+                                        <p:tgtEl>
+                                          <p:spTgt spid="26"/>
+                                        </p:tgtEl>
+                                        <p:attrNameLst>
+                                          <p:attrName>ppt_y</p:attrName>
+                                        </p:attrNameLst>
+                                      </p:cBhvr>
+                                      <p:tavLst>
+                                        <p:tav tm="0">
+                                          <p:val>
+                                            <p:strVal val="#ppt_y+0.045"/>
+                                          </p:val>
+                                        </p:tav>
+                                        <p:tav tm="100000">
+                                          <p:val>
+                                            <p:strVal val="#ppt_y"/>
+                                          </p:val>
+                                        </p:tav>
+                                      </p:tavLst>
+                                    </p:anim>
+                                  </p:childTnLst>
+                                </p:cTn>
+                              </p:par>
+                              <p:par>
+                                <p:cTn id="111" presetID="10" presetClass="entr" presetSubtype="0" fill="hold" grpId="0" nodeType="withEffect">
+                                  <p:stCondLst>
+                                    <p:cond delay="1725"/>
+                                  </p:stCondLst>
+                                  <p:childTnLst>
+                                    <p:set>
+                                      <p:cBhvr>
+                                        <p:cTn id="112" dur="1" fill="hold">
+                                          <p:stCondLst>
+                                            <p:cond delay="0"/>
+                                          </p:stCondLst>
+                                        </p:cTn>
+                                        <p:tgtEl>
+                                          <p:spTgt spid="27"/>
+                                        </p:tgtEl>
+                                        <p:attrNameLst>
+                                          <p:attrName>style.visibility</p:attrName>
+                                        </p:attrNameLst>
+                                      </p:cBhvr>
+                                      <p:to>
+                                        <p:strVal val="visible"/>
+                                      </p:to>
+                                    </p:set>
+                                    <p:animEffect transition="in" filter="fade">
+                                      <p:cBhvr>
+                                        <p:cTn id="113" dur="480"/>
+                                        <p:tgtEl>
+                                          <p:spTgt spid="27"/>
+                                        </p:tgtEl>
+                                      </p:cBhvr>
+                                    </p:animEffect>
+                                    <p:anim calcmode="lin" valueType="num">
+                                      <p:cBhvr>
+                                        <p:cTn id="114" dur="480" fill="hold"/>
+                                        <p:tgtEl>
+                                          <p:spTgt spid="27"/>
+                                        </p:tgtEl>
+                                        <p:attrNameLst>
+                                          <p:attrName>ppt_y</p:attrName>
+                                        </p:attrNameLst>
+                                      </p:cBhvr>
+                                      <p:tavLst>
+                                        <p:tav tm="0">
+                                          <p:val>
+                                            <p:strVal val="#ppt_y+0.045"/>
+                                          </p:val>
+                                        </p:tav>
+                                        <p:tav tm="100000">
+                                          <p:val>
+                                            <p:strVal val="#ppt_y"/>
+                                          </p:val>
+                                        </p:tav>
+                                      </p:tavLst>
+                                    </p:anim>
+                                  </p:childTnLst>
+                                </p:cTn>
+                              </p:par>
+                            </p:childTnLst>
+                          </p:cTn>
+                        </p:par>
+                      </p:childTnLst>
+                    </p:cTn>
+                  </p:par>
+                </p:childTnLst>
+              </p:cTn>
+              <p:prevCondLst>
+                <p:cond evt="onPrev" delay="0">
+                  <p:tgtEl>
+                    <p:sldTgt/>
+                  </p:tgtEl>
+                </p:cond>
+              </p:prevCondLst>
+              <p:nextCondLst>
+                <p:cond evt="onNext" delay="0">
+                  <p:tgtEl>
+                    <p:sldTgt/>
+                  </p:tgtEl>
+                </p:cond>
+              </p:nextCondLst>
+            </p:seq>
+          </p:childTnLst>
+        </p:cTn>
+      </p:par>
+    </p:tnLst>
+    <p:bldLst>
+      <p:bldP spid="2" grpId="0" animBg="1"/>
+      <p:bldP spid="3" grpId="0"/>
+      <p:bldP spid="4" grpId="0" animBg="1"/>
+      <p:bldP spid="5" grpId="0" animBg="1"/>
+      <p:bldP spid="6" grpId="0" animBg="1"/>
+      <p:bldP spid="7" grpId="0" animBg="1"/>
+      <p:bldP spid="8" grpId="0" animBg="1"/>
+      <p:bldP spid="9" grpId="0" animBg="1"/>
+      <p:bldP spid="10" grpId="0" animBg="1"/>
+      <p:bldP spid="11" grpId="0"/>
+      <p:bldP spid="12" grpId="0"/>
+      <p:bldP spid="13" grpId="0"/>
+      <p:bldP spid="14" grpId="0"/>
+      <p:bldP spid="15" grpId="0"/>
+      <p:bldP spid="16" grpId="0"/>
+      <p:bldP spid="17" grpId="0"/>
+      <p:bldP spid="18" grpId="0"/>
+      <p:bldP spid="19" grpId="0"/>
+      <p:bldP spid="20" grpId="0"/>
+      <p:bldP spid="21" grpId="0"/>
+      <p:bldP spid="22" grpId="0"/>
+      <p:bldP spid="23" grpId="0"/>
+      <p:bldP spid="24" grpId="0"/>
+      <p:bldP spid="25" grpId="0" animBg="1"/>
+      <p:bldP spid="26" grpId="0"/>
+      <p:bldP spid="27" grpId="0"/>
+    </p:bldLst>
+  </p:timing>
+</p:sld>
+</file>
+
+<file path=ppt/slides/slide3.xml><?xml version="1.0" encoding="utf-8"?>
+<p:sld xmlns:a="http://schemas.openxmlformats.org/drawingml/2006/main" xmlns:p="http://schemas.openxmlformats.org/presentationml/2006/main" xmlns:r="http://schemas.openxmlformats.org/officeDocument/2006/relationships">
+  <p:cSld>
+    <p:bg>
+      <p:bgPr>
+        <a:gradFill rotWithShape="1">
+          <a:gsLst>
+            <a:gs pos="0">
+              <a:srgbClr val="121319"/>
+            </a:gs>
+            <a:gs pos="100000">
+              <a:srgbClr val="07080A"/>
+            </a:gs>
+          </a:gsLst>
+          <a:lin scaled="0" ang="16200000"/>
+        </a:gradFill>
+        <a:effectLst/>
+      </p:bgPr>
+    </p:bg>
+    <p:spTree>
+      <p:nvGrpSpPr>
+        <p:cNvPr id="1" name=""/>
+        <p:cNvGrpSpPr/>
+        <p:nvPr/>
+      </p:nvGrpSpPr>
+      <p:grpSpPr/>
+      <p:sp>
+        <p:nvSpPr>
+          <p:cNvPr id="2" name="Rounded Rectangle 1"/>
+          <p:cNvSpPr/>
+          <p:nvPr/>
+        </p:nvSpPr>
+        <p:spPr>
+          <a:xfrm>
+            <a:off x="548640" y="411480"/>
             <a:ext cx="1513332" cy="329184"/>
           </a:xfrm>
           <a:prstGeom prst="roundRect">
@@ -18438,7 +24154,7 @@
                 </a:solidFill>
                 <a:latin typeface="Calibri"/>
               </a:rPr>
-              <a:t>02 / 14</a:t>
+              <a:t>03 / 15</a:t>
             </a:r>
           </a:p>
         </p:txBody>
@@ -20985,7 +26701,7 @@
 </p:sld>
 </file>
 
-<file path=ppt/slides/slide3.xml><?xml version="1.0" encoding="utf-8"?>
+<file path=ppt/slides/slide4.xml><?xml version="1.0" encoding="utf-8"?>
 <p:sld xmlns:a="http://schemas.openxmlformats.org/drawingml/2006/main" xmlns:p="http://schemas.openxmlformats.org/presentationml/2006/main" xmlns:r="http://schemas.openxmlformats.org/officeDocument/2006/relationships">
   <p:cSld>
     <p:bg>
@@ -21830,7 +27546,7 @@
                 </a:solidFill>
                 <a:latin typeface="Calibri"/>
               </a:rPr>
-              <a:t>03 / 14</a:t>
+              <a:t>04 / 15</a:t>
             </a:r>
           </a:p>
         </p:txBody>
@@ -22961,7 +28677,7 @@
 </p:sld>
 </file>
 
-<file path=ppt/slides/slide4.xml><?xml version="1.0" encoding="utf-8"?>
+<file path=ppt/slides/slide5.xml><?xml version="1.0" encoding="utf-8"?>
 <p:sld xmlns:a="http://schemas.openxmlformats.org/drawingml/2006/main" xmlns:p="http://schemas.openxmlformats.org/presentationml/2006/main" xmlns:r="http://schemas.openxmlformats.org/officeDocument/2006/relationships">
   <p:cSld>
     <p:bg>
@@ -24344,7 +30060,7 @@
                 </a:solidFill>
                 <a:latin typeface="Calibri"/>
               </a:rPr>
-              <a:t>04 / 14</a:t>
+              <a:t>05 / 15</a:t>
             </a:r>
           </a:p>
         </p:txBody>
@@ -26041,7 +31757,7 @@
 </p:sld>
 </file>
 
-<file path=ppt/slides/slide5.xml><?xml version="1.0" encoding="utf-8"?>
+<file path=ppt/slides/slide6.xml><?xml version="1.0" encoding="utf-8"?>
 <p:sld xmlns:a="http://schemas.openxmlformats.org/drawingml/2006/main" xmlns:p="http://schemas.openxmlformats.org/presentationml/2006/main" xmlns:r="http://schemas.openxmlformats.org/officeDocument/2006/relationships">
   <p:cSld>
     <p:bg>
@@ -27306,7 +33022,7 @@
                 </a:solidFill>
                 <a:latin typeface="Calibri"/>
               </a:rPr>
-              <a:t>05 / 14</a:t>
+              <a:t>06 / 15</a:t>
             </a:r>
           </a:p>
         </p:txBody>
@@ -28850,7 +34566,7 @@
 </p:sld>
 </file>
 
-<file path=ppt/slides/slide6.xml><?xml version="1.0" encoding="utf-8"?>
+<file path=ppt/slides/slide7.xml><?xml version="1.0" encoding="utf-8"?>
 <p:sld xmlns:a="http://schemas.openxmlformats.org/drawingml/2006/main" xmlns:p="http://schemas.openxmlformats.org/presentationml/2006/main" xmlns:r="http://schemas.openxmlformats.org/officeDocument/2006/relationships">
   <p:cSld>
     <p:bg>
@@ -29630,7 +35346,7 @@
                 </a:solidFill>
                 <a:latin typeface="Calibri"/>
               </a:rPr>
-              <a:t>06 / 14</a:t>
+              <a:t>07 / 15</a:t>
             </a:r>
           </a:p>
         </p:txBody>
@@ -30619,7 +36335,7 @@
 </p:sld>
 </file>
 
-<file path=ppt/slides/slide7.xml><?xml version="1.0" encoding="utf-8"?>
+<file path=ppt/slides/slide8.xml><?xml version="1.0" encoding="utf-8"?>
 <p:sld xmlns:a="http://schemas.openxmlformats.org/drawingml/2006/main" xmlns:p="http://schemas.openxmlformats.org/presentationml/2006/main" xmlns:r="http://schemas.openxmlformats.org/officeDocument/2006/relationships">
   <p:cSld>
     <p:bg>
@@ -31610,7 +37326,7 @@
                 </a:solidFill>
                 <a:latin typeface="Calibri"/>
               </a:rPr>
-              <a:t>07 / 14</a:t>
+              <a:t>08 / 15</a:t>
             </a:r>
           </a:p>
         </p:txBody>
@@ -32977,7 +38693,7 @@
 </p:sld>
 </file>
 
-<file path=ppt/slides/slide8.xml><?xml version="1.0" encoding="utf-8"?>
+<file path=ppt/slides/slide9.xml><?xml version="1.0" encoding="utf-8"?>
 <p:sld xmlns:a="http://schemas.openxmlformats.org/drawingml/2006/main" xmlns:p="http://schemas.openxmlformats.org/presentationml/2006/main" xmlns:r="http://schemas.openxmlformats.org/officeDocument/2006/relationships">
   <p:cSld>
     <p:bg>
@@ -34212,7 +39928,7 @@
                 </a:solidFill>
                 <a:latin typeface="Calibri"/>
               </a:rPr>
-              <a:t>08 / 14</a:t>
+              <a:t>09 / 15</a:t>
             </a:r>
           </a:p>
         </p:txBody>
@@ -35869,2144 +41585,6 @@
       <p:bldP spid="26" grpId="0" animBg="1"/>
       <p:bldP spid="27" grpId="0"/>
       <p:bldP spid="28" grpId="0"/>
-    </p:bldLst>
-  </p:timing>
-</p:sld>
-</file>
-
-<file path=ppt/slides/slide9.xml><?xml version="1.0" encoding="utf-8"?>
-<p:sld xmlns:a="http://schemas.openxmlformats.org/drawingml/2006/main" xmlns:p="http://schemas.openxmlformats.org/presentationml/2006/main" xmlns:r="http://schemas.openxmlformats.org/officeDocument/2006/relationships">
-  <p:cSld>
-    <p:bg>
-      <p:bgPr>
-        <a:gradFill rotWithShape="1">
-          <a:gsLst>
-            <a:gs pos="0">
-              <a:srgbClr val="121319"/>
-            </a:gs>
-            <a:gs pos="100000">
-              <a:srgbClr val="07080A"/>
-            </a:gs>
-          </a:gsLst>
-          <a:lin scaled="0" ang="16200000"/>
-        </a:gradFill>
-        <a:effectLst/>
-      </p:bgPr>
-    </p:bg>
-    <p:spTree>
-      <p:nvGrpSpPr>
-        <p:cNvPr id="1" name=""/>
-        <p:cNvGrpSpPr/>
-        <p:nvPr/>
-      </p:nvGrpSpPr>
-      <p:grpSpPr/>
-      <p:sp>
-        <p:nvSpPr>
-          <p:cNvPr id="2" name="Rounded Rectangle 1"/>
-          <p:cNvSpPr/>
-          <p:nvPr/>
-        </p:nvSpPr>
-        <p:spPr>
-          <a:xfrm>
-            <a:off x="548640" y="411480"/>
-            <a:ext cx="1321307" cy="329184"/>
-          </a:xfrm>
-          <a:prstGeom prst="roundRect">
-            <a:avLst>
-              <a:gd name="adj" fmla="val 50000"/>
-            </a:avLst>
-          </a:prstGeom>
-          <a:solidFill>
-            <a:srgbClr val="E50914">
-              <a:alpha val="16000"/>
-            </a:srgbClr>
-          </a:solidFill>
-          <a:ln>
-            <a:noFill/>
-          </a:ln>
-          <a:effectLst/>
-        </p:spPr>
-        <p:style>
-          <a:lnRef idx="1">
-            <a:schemeClr val="accent1"/>
-          </a:lnRef>
-          <a:fillRef idx="3">
-            <a:schemeClr val="accent1"/>
-          </a:fillRef>
-          <a:effectRef idx="2">
-            <a:schemeClr val="accent1"/>
-          </a:effectRef>
-          <a:fontRef idx="minor">
-            <a:schemeClr val="lt1"/>
-          </a:fontRef>
-        </p:style>
-        <p:txBody>
-          <a:bodyPr rtlCol="0" anchor="ctr" wrap="square" lIns="45720" rIns="45720" tIns="27432" bIns="27432"/>
-          <a:lstStyle/>
-          <a:p>
-            <a:pPr algn="ctr">
-              <a:lnSpc>
-                <a:spcPct val="100000"/>
-              </a:lnSpc>
-              <a:spcAft>
-                <a:spcPts val="0"/>
-              </a:spcAft>
-            </a:pPr>
-            <a:r>
-              <a:rPr sz="1100" b="1" i="0" spc="150">
-                <a:solidFill>
-                  <a:srgbClr val="E50914"/>
-                </a:solidFill>
-                <a:latin typeface="Calibri"/>
-              </a:rPr>
-              <a:t>SEGURANÇA</a:t>
-            </a:r>
-          </a:p>
-        </p:txBody>
-      </p:sp>
-      <p:sp>
-        <p:nvSpPr>
-          <p:cNvPr id="3" name="TextBox 2"/>
-          <p:cNvSpPr txBox="1"/>
-          <p:nvPr/>
-        </p:nvSpPr>
-        <p:spPr>
-          <a:xfrm>
-            <a:off x="502920" y="822960"/>
-            <a:ext cx="11155680" cy="685800"/>
-          </a:xfrm>
-          <a:prstGeom prst="rect">
-            <a:avLst/>
-          </a:prstGeom>
-          <a:noFill/>
-        </p:spPr>
-        <p:txBody>
-          <a:bodyPr wrap="square" anchor="t" lIns="45720" rIns="45720" tIns="27432" bIns="27432">
-            <a:spAutoFit/>
-          </a:bodyPr>
-          <a:lstStyle/>
-          <a:p>
-            <a:pPr algn="l">
-              <a:lnSpc>
-                <a:spcPct val="100000"/>
-              </a:lnSpc>
-              <a:spcAft>
-                <a:spcPts val="0"/>
-              </a:spcAft>
-            </a:pPr>
-            <a:r>
-              <a:rPr sz="3600" b="1" i="0">
-                <a:solidFill>
-                  <a:srgbClr val="F8FAFC"/>
-                </a:solidFill>
-                <a:latin typeface="Calibri"/>
-              </a:rPr>
-              <a:t>Achados e correções</a:t>
-            </a:r>
-          </a:p>
-        </p:txBody>
-      </p:sp>
-      <p:sp>
-        <p:nvSpPr>
-          <p:cNvPr id="4" name="Rectangle 3"/>
-          <p:cNvSpPr/>
-          <p:nvPr/>
-        </p:nvSpPr>
-        <p:spPr>
-          <a:xfrm>
-            <a:off x="594360" y="1572768"/>
-            <a:ext cx="640080" cy="45720"/>
-          </a:xfrm>
-          <a:prstGeom prst="rect">
-            <a:avLst/>
-          </a:prstGeom>
-          <a:solidFill>
-            <a:srgbClr val="E50914"/>
-          </a:solidFill>
-          <a:ln>
-            <a:noFill/>
-          </a:ln>
-          <a:effectLst/>
-        </p:spPr>
-        <p:style>
-          <a:lnRef idx="1">
-            <a:schemeClr val="accent1"/>
-          </a:lnRef>
-          <a:fillRef idx="3">
-            <a:schemeClr val="accent1"/>
-          </a:fillRef>
-          <a:effectRef idx="2">
-            <a:schemeClr val="accent1"/>
-          </a:effectRef>
-          <a:fontRef idx="minor">
-            <a:schemeClr val="lt1"/>
-          </a:fontRef>
-        </p:style>
-        <p:txBody>
-          <a:bodyPr rtlCol="0" anchor="ctr"/>
-          <a:lstStyle/>
-          <a:p>
-            <a:pPr algn="ctr"/>
-          </a:p>
-        </p:txBody>
-      </p:sp>
-      <p:sp>
-        <p:nvSpPr>
-          <p:cNvPr id="5" name="TextBox 4"/>
-          <p:cNvSpPr txBox="1"/>
-          <p:nvPr/>
-        </p:nvSpPr>
-        <p:spPr>
-          <a:xfrm>
-            <a:off x="548640" y="2148840"/>
-            <a:ext cx="5760720" cy="365760"/>
-          </a:xfrm>
-          <a:prstGeom prst="rect">
-            <a:avLst/>
-          </a:prstGeom>
-          <a:noFill/>
-        </p:spPr>
-        <p:txBody>
-          <a:bodyPr wrap="square" anchor="t" lIns="45720" rIns="45720" tIns="27432" bIns="27432">
-            <a:spAutoFit/>
-          </a:bodyPr>
-          <a:lstStyle/>
-          <a:p>
-            <a:pPr algn="l">
-              <a:lnSpc>
-                <a:spcPct val="100000"/>
-              </a:lnSpc>
-              <a:spcAft>
-                <a:spcPts val="0"/>
-              </a:spcAft>
-            </a:pPr>
-            <a:r>
-              <a:rPr sz="1200" b="1" i="0" spc="100">
-                <a:solidFill>
-                  <a:srgbClr val="94A3B8"/>
-                </a:solidFill>
-                <a:latin typeface="Calibri"/>
-              </a:rPr>
-              <a:t>CENÁRIOS DE AUTORIZAÇÃO DO BANCO (TOTAL: 47)</a:t>
-            </a:r>
-          </a:p>
-        </p:txBody>
-      </p:sp>
-      <p:graphicFrame>
-        <p:nvGraphicFramePr>
-          <p:cNvPr id="6" name="Chart 5"/>
-          <p:cNvGraphicFramePr>
-            <a:graphicFrameLocks noGrp="1"/>
-          </p:cNvGraphicFramePr>
-          <p:nvPr/>
-        </p:nvGraphicFramePr>
-        <p:xfrm>
-          <a:off x="548640" y="2560320"/>
-          <a:ext cx="5669280" cy="3566160"/>
-        </p:xfrm>
-        <a:graphic>
-          <a:graphicData uri="http://schemas.openxmlformats.org/drawingml/2006/chart">
-            <c:chart xmlns:c="http://schemas.openxmlformats.org/drawingml/2006/chart" r:id="rId2"/>
-          </a:graphicData>
-        </a:graphic>
-      </p:graphicFrame>
-      <p:sp>
-        <p:nvSpPr>
-          <p:cNvPr id="7" name="Rounded Rectangle 6"/>
-          <p:cNvSpPr/>
-          <p:nvPr/>
-        </p:nvSpPr>
-        <p:spPr>
-          <a:xfrm>
-            <a:off x="6583680" y="2240280"/>
-            <a:ext cx="5074920" cy="1188720"/>
-          </a:xfrm>
-          <a:prstGeom prst="roundRect">
-            <a:avLst>
-              <a:gd name="adj" fmla="val 7000"/>
-            </a:avLst>
-          </a:prstGeom>
-          <a:solidFill>
-            <a:srgbClr val="181B24"/>
-          </a:solidFill>
-          <a:ln w="12700">
-            <a:solidFill>
-              <a:srgbClr val="272C3D"/>
-            </a:solidFill>
-          </a:ln>
-          <a:effectLst/>
-        </p:spPr>
-        <p:style>
-          <a:lnRef idx="1">
-            <a:schemeClr val="accent1"/>
-          </a:lnRef>
-          <a:fillRef idx="3">
-            <a:schemeClr val="accent1"/>
-          </a:fillRef>
-          <a:effectRef idx="2">
-            <a:schemeClr val="accent1"/>
-          </a:effectRef>
-          <a:fontRef idx="minor">
-            <a:schemeClr val="lt1"/>
-          </a:fontRef>
-        </p:style>
-        <p:txBody>
-          <a:bodyPr rtlCol="0" anchor="ctr"/>
-          <a:lstStyle/>
-          <a:p>
-            <a:pPr algn="ctr"/>
-          </a:p>
-        </p:txBody>
-      </p:sp>
-      <p:sp>
-        <p:nvSpPr>
-          <p:cNvPr id="8" name="Rectangle 7"/>
-          <p:cNvSpPr/>
-          <p:nvPr/>
-        </p:nvSpPr>
-        <p:spPr>
-          <a:xfrm>
-            <a:off x="6583680" y="2240280"/>
-            <a:ext cx="73152" cy="1188720"/>
-          </a:xfrm>
-          <a:prstGeom prst="rect">
-            <a:avLst/>
-          </a:prstGeom>
-          <a:solidFill>
-            <a:srgbClr val="E50914"/>
-          </a:solidFill>
-          <a:ln>
-            <a:noFill/>
-          </a:ln>
-          <a:effectLst/>
-        </p:spPr>
-        <p:style>
-          <a:lnRef idx="1">
-            <a:schemeClr val="accent1"/>
-          </a:lnRef>
-          <a:fillRef idx="3">
-            <a:schemeClr val="accent1"/>
-          </a:fillRef>
-          <a:effectRef idx="2">
-            <a:schemeClr val="accent1"/>
-          </a:effectRef>
-          <a:fontRef idx="minor">
-            <a:schemeClr val="lt1"/>
-          </a:fontRef>
-        </p:style>
-        <p:txBody>
-          <a:bodyPr rtlCol="0" anchor="ctr"/>
-          <a:lstStyle/>
-          <a:p>
-            <a:pPr algn="ctr"/>
-          </a:p>
-        </p:txBody>
-      </p:sp>
-      <p:sp>
-        <p:nvSpPr>
-          <p:cNvPr id="9" name="TextBox 8"/>
-          <p:cNvSpPr txBox="1"/>
-          <p:nvPr/>
-        </p:nvSpPr>
-        <p:spPr>
-          <a:xfrm>
-            <a:off x="6858000" y="2350008"/>
-            <a:ext cx="4663440" cy="365760"/>
-          </a:xfrm>
-          <a:prstGeom prst="rect">
-            <a:avLst/>
-          </a:prstGeom>
-          <a:noFill/>
-        </p:spPr>
-        <p:txBody>
-          <a:bodyPr wrap="square" anchor="t" lIns="45720" rIns="45720" tIns="27432" bIns="27432">
-            <a:spAutoFit/>
-          </a:bodyPr>
-          <a:lstStyle/>
-          <a:p>
-            <a:pPr algn="l">
-              <a:lnSpc>
-                <a:spcPct val="100000"/>
-              </a:lnSpc>
-              <a:spcAft>
-                <a:spcPts val="0"/>
-              </a:spcAft>
-            </a:pPr>
-            <a:r>
-              <a:rPr sz="1600" b="1" i="0">
-                <a:solidFill>
-                  <a:srgbClr val="F8FAFC"/>
-                </a:solidFill>
-                <a:latin typeface="Calibri"/>
-              </a:rPr>
-              <a:t>Falhas corrigidas</a:t>
-            </a:r>
-          </a:p>
-        </p:txBody>
-      </p:sp>
-      <p:sp>
-        <p:nvSpPr>
-          <p:cNvPr id="10" name="TextBox 9"/>
-          <p:cNvSpPr txBox="1"/>
-          <p:nvPr/>
-        </p:nvSpPr>
-        <p:spPr>
-          <a:xfrm>
-            <a:off x="6858000" y="2697480"/>
-            <a:ext cx="4663440" cy="731520"/>
-          </a:xfrm>
-          <a:prstGeom prst="rect">
-            <a:avLst/>
-          </a:prstGeom>
-          <a:noFill/>
-        </p:spPr>
-        <p:txBody>
-          <a:bodyPr wrap="square" anchor="t" lIns="45720" rIns="45720" tIns="27432" bIns="27432">
-            <a:spAutoFit/>
-          </a:bodyPr>
-          <a:lstStyle/>
-          <a:p>
-            <a:pPr algn="l">
-              <a:lnSpc>
-                <a:spcPct val="105000"/>
-              </a:lnSpc>
-              <a:spcAft>
-                <a:spcPts val="0"/>
-              </a:spcAft>
-            </a:pPr>
-            <a:r>
-              <a:rPr sz="1300" b="0" i="0">
-                <a:solidFill>
-                  <a:srgbClr val="94A3B8"/>
-                </a:solidFill>
-                <a:latin typeface="Calibri"/>
-              </a:rPr>
-              <a:t>Escalonamento de papel, leitura anônima de perfis, pedido marcado como pago pelo cliente e TRUNCATE por usuários autenticados.</a:t>
-            </a:r>
-          </a:p>
-        </p:txBody>
-      </p:sp>
-      <p:sp>
-        <p:nvSpPr>
-          <p:cNvPr id="11" name="Rounded Rectangle 10"/>
-          <p:cNvSpPr/>
-          <p:nvPr/>
-        </p:nvSpPr>
-        <p:spPr>
-          <a:xfrm>
-            <a:off x="6583680" y="3566160"/>
-            <a:ext cx="5074920" cy="1188720"/>
-          </a:xfrm>
-          <a:prstGeom prst="roundRect">
-            <a:avLst>
-              <a:gd name="adj" fmla="val 7000"/>
-            </a:avLst>
-          </a:prstGeom>
-          <a:solidFill>
-            <a:srgbClr val="181B24"/>
-          </a:solidFill>
-          <a:ln w="12700">
-            <a:solidFill>
-              <a:srgbClr val="272C3D"/>
-            </a:solidFill>
-          </a:ln>
-          <a:effectLst/>
-        </p:spPr>
-        <p:style>
-          <a:lnRef idx="1">
-            <a:schemeClr val="accent1"/>
-          </a:lnRef>
-          <a:fillRef idx="3">
-            <a:schemeClr val="accent1"/>
-          </a:fillRef>
-          <a:effectRef idx="2">
-            <a:schemeClr val="accent1"/>
-          </a:effectRef>
-          <a:fontRef idx="minor">
-            <a:schemeClr val="lt1"/>
-          </a:fontRef>
-        </p:style>
-        <p:txBody>
-          <a:bodyPr rtlCol="0" anchor="ctr"/>
-          <a:lstStyle/>
-          <a:p>
-            <a:pPr algn="ctr"/>
-          </a:p>
-        </p:txBody>
-      </p:sp>
-      <p:sp>
-        <p:nvSpPr>
-          <p:cNvPr id="12" name="Rectangle 11"/>
-          <p:cNvSpPr/>
-          <p:nvPr/>
-        </p:nvSpPr>
-        <p:spPr>
-          <a:xfrm>
-            <a:off x="6583680" y="3566160"/>
-            <a:ext cx="73152" cy="1188720"/>
-          </a:xfrm>
-          <a:prstGeom prst="rect">
-            <a:avLst/>
-          </a:prstGeom>
-          <a:solidFill>
-            <a:srgbClr val="E50914"/>
-          </a:solidFill>
-          <a:ln>
-            <a:noFill/>
-          </a:ln>
-          <a:effectLst/>
-        </p:spPr>
-        <p:style>
-          <a:lnRef idx="1">
-            <a:schemeClr val="accent1"/>
-          </a:lnRef>
-          <a:fillRef idx="3">
-            <a:schemeClr val="accent1"/>
-          </a:fillRef>
-          <a:effectRef idx="2">
-            <a:schemeClr val="accent1"/>
-          </a:effectRef>
-          <a:fontRef idx="minor">
-            <a:schemeClr val="lt1"/>
-          </a:fontRef>
-        </p:style>
-        <p:txBody>
-          <a:bodyPr rtlCol="0" anchor="ctr"/>
-          <a:lstStyle/>
-          <a:p>
-            <a:pPr algn="ctr"/>
-          </a:p>
-        </p:txBody>
-      </p:sp>
-      <p:sp>
-        <p:nvSpPr>
-          <p:cNvPr id="13" name="TextBox 12"/>
-          <p:cNvSpPr txBox="1"/>
-          <p:nvPr/>
-        </p:nvSpPr>
-        <p:spPr>
-          <a:xfrm>
-            <a:off x="6858000" y="3675888"/>
-            <a:ext cx="4663440" cy="365760"/>
-          </a:xfrm>
-          <a:prstGeom prst="rect">
-            <a:avLst/>
-          </a:prstGeom>
-          <a:noFill/>
-        </p:spPr>
-        <p:txBody>
-          <a:bodyPr wrap="square" anchor="t" lIns="45720" rIns="45720" tIns="27432" bIns="27432">
-            <a:spAutoFit/>
-          </a:bodyPr>
-          <a:lstStyle/>
-          <a:p>
-            <a:pPr algn="l">
-              <a:lnSpc>
-                <a:spcPct val="100000"/>
-              </a:lnSpc>
-              <a:spcAft>
-                <a:spcPts val="0"/>
-              </a:spcAft>
-            </a:pPr>
-            <a:r>
-              <a:rPr sz="1600" b="1" i="0">
-                <a:solidFill>
-                  <a:srgbClr val="F8FAFC"/>
-                </a:solidFill>
-                <a:latin typeface="Calibri"/>
-              </a:rPr>
-              <a:t>22 de 22 verificações</a:t>
-            </a:r>
-          </a:p>
-        </p:txBody>
-      </p:sp>
-      <p:sp>
-        <p:nvSpPr>
-          <p:cNvPr id="14" name="TextBox 13"/>
-          <p:cNvSpPr txBox="1"/>
-          <p:nvPr/>
-        </p:nvSpPr>
-        <p:spPr>
-          <a:xfrm>
-            <a:off x="6858000" y="4023360"/>
-            <a:ext cx="4663440" cy="731520"/>
-          </a:xfrm>
-          <a:prstGeom prst="rect">
-            <a:avLst/>
-          </a:prstGeom>
-          <a:noFill/>
-        </p:spPr>
-        <p:txBody>
-          <a:bodyPr wrap="square" anchor="t" lIns="45720" rIns="45720" tIns="27432" bIns="27432">
-            <a:spAutoFit/>
-          </a:bodyPr>
-          <a:lstStyle/>
-          <a:p>
-            <a:pPr algn="l">
-              <a:lnSpc>
-                <a:spcPct val="105000"/>
-              </a:lnSpc>
-              <a:spcAft>
-                <a:spcPts val="0"/>
-              </a:spcAft>
-            </a:pPr>
-            <a:r>
-              <a:rPr sz="1300" b="0" i="0">
-                <a:solidFill>
-                  <a:srgbClr val="94A3B8"/>
-                </a:solidFill>
-                <a:latin typeface="Calibri"/>
-              </a:rPr>
-              <a:t>Rotas de escrita da API retornam 401 sem token e com token forjado.</a:t>
-            </a:r>
-          </a:p>
-        </p:txBody>
-      </p:sp>
-      <p:sp>
-        <p:nvSpPr>
-          <p:cNvPr id="15" name="Rounded Rectangle 14"/>
-          <p:cNvSpPr/>
-          <p:nvPr/>
-        </p:nvSpPr>
-        <p:spPr>
-          <a:xfrm>
-            <a:off x="6583680" y="4892040"/>
-            <a:ext cx="5074920" cy="1188720"/>
-          </a:xfrm>
-          <a:prstGeom prst="roundRect">
-            <a:avLst>
-              <a:gd name="adj" fmla="val 7000"/>
-            </a:avLst>
-          </a:prstGeom>
-          <a:solidFill>
-            <a:srgbClr val="181B24"/>
-          </a:solidFill>
-          <a:ln w="12700">
-            <a:solidFill>
-              <a:srgbClr val="E50914"/>
-            </a:solidFill>
-          </a:ln>
-          <a:effectLst/>
-        </p:spPr>
-        <p:style>
-          <a:lnRef idx="1">
-            <a:schemeClr val="accent1"/>
-          </a:lnRef>
-          <a:fillRef idx="3">
-            <a:schemeClr val="accent1"/>
-          </a:fillRef>
-          <a:effectRef idx="2">
-            <a:schemeClr val="accent1"/>
-          </a:effectRef>
-          <a:fontRef idx="minor">
-            <a:schemeClr val="lt1"/>
-          </a:fontRef>
-        </p:style>
-        <p:txBody>
-          <a:bodyPr rtlCol="0" anchor="ctr"/>
-          <a:lstStyle/>
-          <a:p>
-            <a:pPr algn="ctr"/>
-          </a:p>
-        </p:txBody>
-      </p:sp>
-      <p:sp>
-        <p:nvSpPr>
-          <p:cNvPr id="16" name="Rectangle 15"/>
-          <p:cNvSpPr/>
-          <p:nvPr/>
-        </p:nvSpPr>
-        <p:spPr>
-          <a:xfrm>
-            <a:off x="6583680" y="4892040"/>
-            <a:ext cx="73152" cy="1188720"/>
-          </a:xfrm>
-          <a:prstGeom prst="rect">
-            <a:avLst/>
-          </a:prstGeom>
-          <a:solidFill>
-            <a:srgbClr val="E50914"/>
-          </a:solidFill>
-          <a:ln>
-            <a:noFill/>
-          </a:ln>
-          <a:effectLst/>
-        </p:spPr>
-        <p:style>
-          <a:lnRef idx="1">
-            <a:schemeClr val="accent1"/>
-          </a:lnRef>
-          <a:fillRef idx="3">
-            <a:schemeClr val="accent1"/>
-          </a:fillRef>
-          <a:effectRef idx="2">
-            <a:schemeClr val="accent1"/>
-          </a:effectRef>
-          <a:fontRef idx="minor">
-            <a:schemeClr val="lt1"/>
-          </a:fontRef>
-        </p:style>
-        <p:txBody>
-          <a:bodyPr rtlCol="0" anchor="ctr"/>
-          <a:lstStyle/>
-          <a:p>
-            <a:pPr algn="ctr"/>
-          </a:p>
-        </p:txBody>
-      </p:sp>
-      <p:sp>
-        <p:nvSpPr>
-          <p:cNvPr id="17" name="TextBox 16"/>
-          <p:cNvSpPr txBox="1"/>
-          <p:nvPr/>
-        </p:nvSpPr>
-        <p:spPr>
-          <a:xfrm>
-            <a:off x="6858000" y="5001768"/>
-            <a:ext cx="4663440" cy="365760"/>
-          </a:xfrm>
-          <a:prstGeom prst="rect">
-            <a:avLst/>
-          </a:prstGeom>
-          <a:noFill/>
-        </p:spPr>
-        <p:txBody>
-          <a:bodyPr wrap="square" anchor="t" lIns="45720" rIns="45720" tIns="27432" bIns="27432">
-            <a:spAutoFit/>
-          </a:bodyPr>
-          <a:lstStyle/>
-          <a:p>
-            <a:pPr algn="l">
-              <a:lnSpc>
-                <a:spcPct val="100000"/>
-              </a:lnSpc>
-              <a:spcAft>
-                <a:spcPts val="0"/>
-              </a:spcAft>
-            </a:pPr>
-            <a:r>
-              <a:rPr sz="1600" b="1" i="0">
-                <a:solidFill>
-                  <a:srgbClr val="E50914"/>
-                </a:solidFill>
-                <a:latin typeface="Calibri"/>
-              </a:rPr>
-              <a:t>Ação antes da publicação</a:t>
-            </a:r>
-          </a:p>
-        </p:txBody>
-      </p:sp>
-      <p:sp>
-        <p:nvSpPr>
-          <p:cNvPr id="18" name="TextBox 17"/>
-          <p:cNvSpPr txBox="1"/>
-          <p:nvPr/>
-        </p:nvSpPr>
-        <p:spPr>
-          <a:xfrm>
-            <a:off x="6858000" y="5349240"/>
-            <a:ext cx="4663440" cy="731520"/>
-          </a:xfrm>
-          <a:prstGeom prst="rect">
-            <a:avLst/>
-          </a:prstGeom>
-          <a:noFill/>
-        </p:spPr>
-        <p:txBody>
-          <a:bodyPr wrap="square" anchor="t" lIns="45720" rIns="45720" tIns="27432" bIns="27432">
-            <a:spAutoFit/>
-          </a:bodyPr>
-          <a:lstStyle/>
-          <a:p>
-            <a:pPr algn="l">
-              <a:lnSpc>
-                <a:spcPct val="105000"/>
-              </a:lnSpc>
-              <a:spcAft>
-                <a:spcPts val="0"/>
-              </a:spcAft>
-            </a:pPr>
-            <a:r>
-              <a:rPr sz="1300" b="0" i="0">
-                <a:solidFill>
-                  <a:srgbClr val="94A3B8"/>
-                </a:solidFill>
-                <a:latin typeface="Calibri"/>
-              </a:rPr>
-              <a:t>Credencial removida do código; a senha do banco deve ser redefinida no Supabase.</a:t>
-            </a:r>
-          </a:p>
-        </p:txBody>
-      </p:sp>
-      <p:sp>
-        <p:nvSpPr>
-          <p:cNvPr id="19" name="Rectangle 18"/>
-          <p:cNvSpPr/>
-          <p:nvPr/>
-        </p:nvSpPr>
-        <p:spPr>
-          <a:xfrm>
-            <a:off x="548640" y="6327648"/>
-            <a:ext cx="11091672" cy="9144"/>
-          </a:xfrm>
-          <a:prstGeom prst="rect">
-            <a:avLst/>
-          </a:prstGeom>
-          <a:solidFill>
-            <a:srgbClr val="272C3D"/>
-          </a:solidFill>
-          <a:ln>
-            <a:noFill/>
-          </a:ln>
-          <a:effectLst/>
-        </p:spPr>
-        <p:style>
-          <a:lnRef idx="1">
-            <a:schemeClr val="accent1"/>
-          </a:lnRef>
-          <a:fillRef idx="3">
-            <a:schemeClr val="accent1"/>
-          </a:fillRef>
-          <a:effectRef idx="2">
-            <a:schemeClr val="accent1"/>
-          </a:effectRef>
-          <a:fontRef idx="minor">
-            <a:schemeClr val="lt1"/>
-          </a:fontRef>
-        </p:style>
-        <p:txBody>
-          <a:bodyPr rtlCol="0" anchor="ctr"/>
-          <a:lstStyle/>
-          <a:p>
-            <a:pPr algn="ctr"/>
-          </a:p>
-        </p:txBody>
-      </p:sp>
-      <p:sp>
-        <p:nvSpPr>
-          <p:cNvPr id="20" name="TextBox 19"/>
-          <p:cNvSpPr txBox="1"/>
-          <p:nvPr/>
-        </p:nvSpPr>
-        <p:spPr>
-          <a:xfrm>
-            <a:off x="548640" y="6382512"/>
-            <a:ext cx="5486400" cy="274320"/>
-          </a:xfrm>
-          <a:prstGeom prst="rect">
-            <a:avLst/>
-          </a:prstGeom>
-          <a:noFill/>
-        </p:spPr>
-        <p:txBody>
-          <a:bodyPr wrap="square" anchor="t" lIns="45720" rIns="45720" tIns="27432" bIns="27432">
-            <a:spAutoFit/>
-          </a:bodyPr>
-          <a:lstStyle/>
-          <a:p>
-            <a:pPr algn="l">
-              <a:lnSpc>
-                <a:spcPct val="100000"/>
-              </a:lnSpc>
-              <a:spcAft>
-                <a:spcPts val="0"/>
-              </a:spcAft>
-            </a:pPr>
-            <a:r>
-              <a:rPr sz="1000" b="0" i="0" spc="60">
-                <a:solidFill>
-                  <a:srgbClr val="64748B"/>
-                </a:solidFill>
-                <a:latin typeface="Calibri"/>
-              </a:rPr>
-              <a:t>CoreMotiom  ·  Etapa 5 (TCC)</a:t>
-            </a:r>
-          </a:p>
-        </p:txBody>
-      </p:sp>
-      <p:sp>
-        <p:nvSpPr>
-          <p:cNvPr id="21" name="TextBox 20"/>
-          <p:cNvSpPr txBox="1"/>
-          <p:nvPr/>
-        </p:nvSpPr>
-        <p:spPr>
-          <a:xfrm>
-            <a:off x="9784080" y="6382512"/>
-            <a:ext cx="1828800" cy="274320"/>
-          </a:xfrm>
-          <a:prstGeom prst="rect">
-            <a:avLst/>
-          </a:prstGeom>
-          <a:noFill/>
-        </p:spPr>
-        <p:txBody>
-          <a:bodyPr wrap="square" anchor="t" lIns="45720" rIns="45720" tIns="27432" bIns="27432">
-            <a:spAutoFit/>
-          </a:bodyPr>
-          <a:lstStyle/>
-          <a:p>
-            <a:pPr algn="r">
-              <a:lnSpc>
-                <a:spcPct val="100000"/>
-              </a:lnSpc>
-              <a:spcAft>
-                <a:spcPts val="0"/>
-              </a:spcAft>
-            </a:pPr>
-            <a:r>
-              <a:rPr sz="1000" b="0" i="0">
-                <a:solidFill>
-                  <a:srgbClr val="64748B"/>
-                </a:solidFill>
-                <a:latin typeface="Calibri"/>
-              </a:rPr>
-              <a:t>09 / 14</a:t>
-            </a:r>
-          </a:p>
-        </p:txBody>
-      </p:sp>
-    </p:spTree>
-  </p:cSld>
-  <p:clrMapOvr>
-    <a:masterClrMapping/>
-  </p:clrMapOvr>
-  <p:transition spd="med">
-    <p:wipe dir="r"/>
-  </p:transition>
-  <p:timing>
-    <p:tnLst>
-      <p:par>
-        <p:cTn id="1" dur="indefinite" restart="never" nodeType="tmRoot">
-          <p:childTnLst>
-            <p:seq concurrent="1" nextAc="seek">
-              <p:cTn id="2" dur="indefinite" nodeType="mainSeq">
-                <p:childTnLst>
-                  <p:par>
-                    <p:cTn id="3" fill="hold">
-                      <p:stCondLst>
-                        <p:cond delay="indefinite"/>
-                        <p:cond evt="onBegin" delay="0">
-                          <p:tn val="2"/>
-                        </p:cond>
-                      </p:stCondLst>
-                      <p:childTnLst>
-                        <p:par>
-                          <p:cTn id="4" fill="hold">
-                            <p:stCondLst>
-                              <p:cond delay="0"/>
-                            </p:stCondLst>
-                            <p:childTnLst>
-                              <p:par>
-                                <p:cTn id="11" presetID="10" presetClass="entr" presetSubtype="0" fill="hold" grpId="0" nodeType="withEffect">
-                                  <p:stCondLst>
-                                    <p:cond delay="0"/>
-                                  </p:stCondLst>
-                                  <p:childTnLst>
-                                    <p:set>
-                                      <p:cBhvr>
-                                        <p:cTn id="12" dur="1" fill="hold">
-                                          <p:stCondLst>
-                                            <p:cond delay="0"/>
-                                          </p:stCondLst>
-                                        </p:cTn>
-                                        <p:tgtEl>
-                                          <p:spTgt spid="2"/>
-                                        </p:tgtEl>
-                                        <p:attrNameLst>
-                                          <p:attrName>style.visibility</p:attrName>
-                                        </p:attrNameLst>
-                                      </p:cBhvr>
-                                      <p:to>
-                                        <p:strVal val="visible"/>
-                                      </p:to>
-                                    </p:set>
-                                    <p:animEffect transition="in" filter="fade">
-                                      <p:cBhvr>
-                                        <p:cTn id="13" dur="480"/>
-                                        <p:tgtEl>
-                                          <p:spTgt spid="2"/>
-                                        </p:tgtEl>
-                                      </p:cBhvr>
-                                    </p:animEffect>
-                                    <p:anim calcmode="lin" valueType="num">
-                                      <p:cBhvr>
-                                        <p:cTn id="14" dur="480" fill="hold"/>
-                                        <p:tgtEl>
-                                          <p:spTgt spid="2"/>
-                                        </p:tgtEl>
-                                        <p:attrNameLst>
-                                          <p:attrName>ppt_y</p:attrName>
-                                        </p:attrNameLst>
-                                      </p:cBhvr>
-                                      <p:tavLst>
-                                        <p:tav tm="0">
-                                          <p:val>
-                                            <p:strVal val="#ppt_y+0.045"/>
-                                          </p:val>
-                                        </p:tav>
-                                        <p:tav tm="100000">
-                                          <p:val>
-                                            <p:strVal val="#ppt_y"/>
-                                          </p:val>
-                                        </p:tav>
-                                      </p:tavLst>
-                                    </p:anim>
-                                  </p:childTnLst>
-                                </p:cTn>
-                              </p:par>
-                              <p:par>
-                                <p:cTn id="15" presetID="10" presetClass="entr" presetSubtype="0" fill="hold" grpId="0" nodeType="withEffect">
-                                  <p:stCondLst>
-                                    <p:cond delay="90"/>
-                                  </p:stCondLst>
-                                  <p:childTnLst>
-                                    <p:set>
-                                      <p:cBhvr>
-                                        <p:cTn id="16" dur="1" fill="hold">
-                                          <p:stCondLst>
-                                            <p:cond delay="0"/>
-                                          </p:stCondLst>
-                                        </p:cTn>
-                                        <p:tgtEl>
-                                          <p:spTgt spid="3"/>
-                                        </p:tgtEl>
-                                        <p:attrNameLst>
-                                          <p:attrName>style.visibility</p:attrName>
-                                        </p:attrNameLst>
-                                      </p:cBhvr>
-                                      <p:to>
-                                        <p:strVal val="visible"/>
-                                      </p:to>
-                                    </p:set>
-                                    <p:animEffect transition="in" filter="fade">
-                                      <p:cBhvr>
-                                        <p:cTn id="17" dur="480"/>
-                                        <p:tgtEl>
-                                          <p:spTgt spid="3"/>
-                                        </p:tgtEl>
-                                      </p:cBhvr>
-                                    </p:animEffect>
-                                    <p:anim calcmode="lin" valueType="num">
-                                      <p:cBhvr>
-                                        <p:cTn id="18" dur="480" fill="hold"/>
-                                        <p:tgtEl>
-                                          <p:spTgt spid="3"/>
-                                        </p:tgtEl>
-                                        <p:attrNameLst>
-                                          <p:attrName>ppt_y</p:attrName>
-                                        </p:attrNameLst>
-                                      </p:cBhvr>
-                                      <p:tavLst>
-                                        <p:tav tm="0">
-                                          <p:val>
-                                            <p:strVal val="#ppt_y+0.045"/>
-                                          </p:val>
-                                        </p:tav>
-                                        <p:tav tm="100000">
-                                          <p:val>
-                                            <p:strVal val="#ppt_y"/>
-                                          </p:val>
-                                        </p:tav>
-                                      </p:tavLst>
-                                    </p:anim>
-                                  </p:childTnLst>
-                                </p:cTn>
-                              </p:par>
-                              <p:par>
-                                <p:cTn id="19" presetID="10" presetClass="entr" presetSubtype="0" fill="hold" grpId="0" nodeType="withEffect">
-                                  <p:stCondLst>
-                                    <p:cond delay="180"/>
-                                  </p:stCondLst>
-                                  <p:childTnLst>
-                                    <p:set>
-                                      <p:cBhvr>
-                                        <p:cTn id="20" dur="1" fill="hold">
-                                          <p:stCondLst>
-                                            <p:cond delay="0"/>
-                                          </p:stCondLst>
-                                        </p:cTn>
-                                        <p:tgtEl>
-                                          <p:spTgt spid="4"/>
-                                        </p:tgtEl>
-                                        <p:attrNameLst>
-                                          <p:attrName>style.visibility</p:attrName>
-                                        </p:attrNameLst>
-                                      </p:cBhvr>
-                                      <p:to>
-                                        <p:strVal val="visible"/>
-                                      </p:to>
-                                    </p:set>
-                                    <p:animEffect transition="in" filter="fade">
-                                      <p:cBhvr>
-                                        <p:cTn id="21" dur="480"/>
-                                        <p:tgtEl>
-                                          <p:spTgt spid="4"/>
-                                        </p:tgtEl>
-                                      </p:cBhvr>
-                                    </p:animEffect>
-                                    <p:anim calcmode="lin" valueType="num">
-                                      <p:cBhvr>
-                                        <p:cTn id="22" dur="480" fill="hold"/>
-                                        <p:tgtEl>
-                                          <p:spTgt spid="4"/>
-                                        </p:tgtEl>
-                                        <p:attrNameLst>
-                                          <p:attrName>ppt_y</p:attrName>
-                                        </p:attrNameLst>
-                                      </p:cBhvr>
-                                      <p:tavLst>
-                                        <p:tav tm="0">
-                                          <p:val>
-                                            <p:strVal val="#ppt_y+0.045"/>
-                                          </p:val>
-                                        </p:tav>
-                                        <p:tav tm="100000">
-                                          <p:val>
-                                            <p:strVal val="#ppt_y"/>
-                                          </p:val>
-                                        </p:tav>
-                                      </p:tavLst>
-                                    </p:anim>
-                                  </p:childTnLst>
-                                </p:cTn>
-                              </p:par>
-                              <p:par>
-                                <p:cTn id="23" presetID="10" presetClass="entr" presetSubtype="0" fill="hold" grpId="0" nodeType="withEffect">
-                                  <p:stCondLst>
-                                    <p:cond delay="270"/>
-                                  </p:stCondLst>
-                                  <p:childTnLst>
-                                    <p:set>
-                                      <p:cBhvr>
-                                        <p:cTn id="24" dur="1" fill="hold">
-                                          <p:stCondLst>
-                                            <p:cond delay="0"/>
-                                          </p:stCondLst>
-                                        </p:cTn>
-                                        <p:tgtEl>
-                                          <p:spTgt spid="5"/>
-                                        </p:tgtEl>
-                                        <p:attrNameLst>
-                                          <p:attrName>style.visibility</p:attrName>
-                                        </p:attrNameLst>
-                                      </p:cBhvr>
-                                      <p:to>
-                                        <p:strVal val="visible"/>
-                                      </p:to>
-                                    </p:set>
-                                    <p:animEffect transition="in" filter="fade">
-                                      <p:cBhvr>
-                                        <p:cTn id="25" dur="480"/>
-                                        <p:tgtEl>
-                                          <p:spTgt spid="5"/>
-                                        </p:tgtEl>
-                                      </p:cBhvr>
-                                    </p:animEffect>
-                                    <p:anim calcmode="lin" valueType="num">
-                                      <p:cBhvr>
-                                        <p:cTn id="26" dur="480" fill="hold"/>
-                                        <p:tgtEl>
-                                          <p:spTgt spid="5"/>
-                                        </p:tgtEl>
-                                        <p:attrNameLst>
-                                          <p:attrName>ppt_y</p:attrName>
-                                        </p:attrNameLst>
-                                      </p:cBhvr>
-                                      <p:tavLst>
-                                        <p:tav tm="0">
-                                          <p:val>
-                                            <p:strVal val="#ppt_y+0.045"/>
-                                          </p:val>
-                                        </p:tav>
-                                        <p:tav tm="100000">
-                                          <p:val>
-                                            <p:strVal val="#ppt_y"/>
-                                          </p:val>
-                                        </p:tav>
-                                      </p:tavLst>
-                                    </p:anim>
-                                  </p:childTnLst>
-                                </p:cTn>
-                              </p:par>
-                              <p:par>
-                                <p:cTn id="27" presetID="10" presetClass="entr" presetSubtype="0" fill="hold" grpId="0" nodeType="withEffect">
-                                  <p:stCondLst>
-                                    <p:cond delay="360"/>
-                                  </p:stCondLst>
-                                  <p:childTnLst>
-                                    <p:set>
-                                      <p:cBhvr>
-                                        <p:cTn id="28" dur="1" fill="hold">
-                                          <p:stCondLst>
-                                            <p:cond delay="0"/>
-                                          </p:stCondLst>
-                                        </p:cTn>
-                                        <p:tgtEl>
-                                          <p:spTgt spid="6"/>
-                                        </p:tgtEl>
-                                        <p:attrNameLst>
-                                          <p:attrName>style.visibility</p:attrName>
-                                        </p:attrNameLst>
-                                      </p:cBhvr>
-                                      <p:to>
-                                        <p:strVal val="visible"/>
-                                      </p:to>
-                                    </p:set>
-                                    <p:animEffect transition="in" filter="fade">
-                                      <p:cBhvr>
-                                        <p:cTn id="29" dur="480"/>
-                                        <p:tgtEl>
-                                          <p:spTgt spid="6"/>
-                                        </p:tgtEl>
-                                      </p:cBhvr>
-                                    </p:animEffect>
-                                    <p:anim calcmode="lin" valueType="num">
-                                      <p:cBhvr>
-                                        <p:cTn id="30" dur="480" fill="hold"/>
-                                        <p:tgtEl>
-                                          <p:spTgt spid="6"/>
-                                        </p:tgtEl>
-                                        <p:attrNameLst>
-                                          <p:attrName>ppt_y</p:attrName>
-                                        </p:attrNameLst>
-                                      </p:cBhvr>
-                                      <p:tavLst>
-                                        <p:tav tm="0">
-                                          <p:val>
-                                            <p:strVal val="#ppt_y+0.045"/>
-                                          </p:val>
-                                        </p:tav>
-                                        <p:tav tm="100000">
-                                          <p:val>
-                                            <p:strVal val="#ppt_y"/>
-                                          </p:val>
-                                        </p:tav>
-                                      </p:tavLst>
-                                    </p:anim>
-                                  </p:childTnLst>
-                                </p:cTn>
-                              </p:par>
-                              <p:par>
-                                <p:cTn id="31" presetID="10" presetClass="entr" presetSubtype="0" fill="hold" grpId="0" nodeType="withEffect">
-                                  <p:stCondLst>
-                                    <p:cond delay="450"/>
-                                  </p:stCondLst>
-                                  <p:childTnLst>
-                                    <p:set>
-                                      <p:cBhvr>
-                                        <p:cTn id="32" dur="1" fill="hold">
-                                          <p:stCondLst>
-                                            <p:cond delay="0"/>
-                                          </p:stCondLst>
-                                        </p:cTn>
-                                        <p:tgtEl>
-                                          <p:spTgt spid="7"/>
-                                        </p:tgtEl>
-                                        <p:attrNameLst>
-                                          <p:attrName>style.visibility</p:attrName>
-                                        </p:attrNameLst>
-                                      </p:cBhvr>
-                                      <p:to>
-                                        <p:strVal val="visible"/>
-                                      </p:to>
-                                    </p:set>
-                                    <p:animEffect transition="in" filter="fade">
-                                      <p:cBhvr>
-                                        <p:cTn id="33" dur="480"/>
-                                        <p:tgtEl>
-                                          <p:spTgt spid="7"/>
-                                        </p:tgtEl>
-                                      </p:cBhvr>
-                                    </p:animEffect>
-                                    <p:anim calcmode="lin" valueType="num">
-                                      <p:cBhvr>
-                                        <p:cTn id="34" dur="480" fill="hold"/>
-                                        <p:tgtEl>
-                                          <p:spTgt spid="7"/>
-                                        </p:tgtEl>
-                                        <p:attrNameLst>
-                                          <p:attrName>ppt_y</p:attrName>
-                                        </p:attrNameLst>
-                                      </p:cBhvr>
-                                      <p:tavLst>
-                                        <p:tav tm="0">
-                                          <p:val>
-                                            <p:strVal val="#ppt_y+0.045"/>
-                                          </p:val>
-                                        </p:tav>
-                                        <p:tav tm="100000">
-                                          <p:val>
-                                            <p:strVal val="#ppt_y"/>
-                                          </p:val>
-                                        </p:tav>
-                                      </p:tavLst>
-                                    </p:anim>
-                                  </p:childTnLst>
-                                </p:cTn>
-                              </p:par>
-                              <p:par>
-                                <p:cTn id="35" presetID="10" presetClass="entr" presetSubtype="0" fill="hold" grpId="0" nodeType="withEffect">
-                                  <p:stCondLst>
-                                    <p:cond delay="540"/>
-                                  </p:stCondLst>
-                                  <p:childTnLst>
-                                    <p:set>
-                                      <p:cBhvr>
-                                        <p:cTn id="36" dur="1" fill="hold">
-                                          <p:stCondLst>
-                                            <p:cond delay="0"/>
-                                          </p:stCondLst>
-                                        </p:cTn>
-                                        <p:tgtEl>
-                                          <p:spTgt spid="8"/>
-                                        </p:tgtEl>
-                                        <p:attrNameLst>
-                                          <p:attrName>style.visibility</p:attrName>
-                                        </p:attrNameLst>
-                                      </p:cBhvr>
-                                      <p:to>
-                                        <p:strVal val="visible"/>
-                                      </p:to>
-                                    </p:set>
-                                    <p:animEffect transition="in" filter="fade">
-                                      <p:cBhvr>
-                                        <p:cTn id="37" dur="480"/>
-                                        <p:tgtEl>
-                                          <p:spTgt spid="8"/>
-                                        </p:tgtEl>
-                                      </p:cBhvr>
-                                    </p:animEffect>
-                                    <p:anim calcmode="lin" valueType="num">
-                                      <p:cBhvr>
-                                        <p:cTn id="38" dur="480" fill="hold"/>
-                                        <p:tgtEl>
-                                          <p:spTgt spid="8"/>
-                                        </p:tgtEl>
-                                        <p:attrNameLst>
-                                          <p:attrName>ppt_y</p:attrName>
-                                        </p:attrNameLst>
-                                      </p:cBhvr>
-                                      <p:tavLst>
-                                        <p:tav tm="0">
-                                          <p:val>
-                                            <p:strVal val="#ppt_y+0.045"/>
-                                          </p:val>
-                                        </p:tav>
-                                        <p:tav tm="100000">
-                                          <p:val>
-                                            <p:strVal val="#ppt_y"/>
-                                          </p:val>
-                                        </p:tav>
-                                      </p:tavLst>
-                                    </p:anim>
-                                  </p:childTnLst>
-                                </p:cTn>
-                              </p:par>
-                              <p:par>
-                                <p:cTn id="39" presetID="10" presetClass="entr" presetSubtype="0" fill="hold" grpId="0" nodeType="withEffect">
-                                  <p:stCondLst>
-                                    <p:cond delay="630"/>
-                                  </p:stCondLst>
-                                  <p:childTnLst>
-                                    <p:set>
-                                      <p:cBhvr>
-                                        <p:cTn id="40" dur="1" fill="hold">
-                                          <p:stCondLst>
-                                            <p:cond delay="0"/>
-                                          </p:stCondLst>
-                                        </p:cTn>
-                                        <p:tgtEl>
-                                          <p:spTgt spid="9"/>
-                                        </p:tgtEl>
-                                        <p:attrNameLst>
-                                          <p:attrName>style.visibility</p:attrName>
-                                        </p:attrNameLst>
-                                      </p:cBhvr>
-                                      <p:to>
-                                        <p:strVal val="visible"/>
-                                      </p:to>
-                                    </p:set>
-                                    <p:animEffect transition="in" filter="fade">
-                                      <p:cBhvr>
-                                        <p:cTn id="41" dur="480"/>
-                                        <p:tgtEl>
-                                          <p:spTgt spid="9"/>
-                                        </p:tgtEl>
-                                      </p:cBhvr>
-                                    </p:animEffect>
-                                    <p:anim calcmode="lin" valueType="num">
-                                      <p:cBhvr>
-                                        <p:cTn id="42" dur="480" fill="hold"/>
-                                        <p:tgtEl>
-                                          <p:spTgt spid="9"/>
-                                        </p:tgtEl>
-                                        <p:attrNameLst>
-                                          <p:attrName>ppt_y</p:attrName>
-                                        </p:attrNameLst>
-                                      </p:cBhvr>
-                                      <p:tavLst>
-                                        <p:tav tm="0">
-                                          <p:val>
-                                            <p:strVal val="#ppt_y+0.045"/>
-                                          </p:val>
-                                        </p:tav>
-                                        <p:tav tm="100000">
-                                          <p:val>
-                                            <p:strVal val="#ppt_y"/>
-                                          </p:val>
-                                        </p:tav>
-                                      </p:tavLst>
-                                    </p:anim>
-                                  </p:childTnLst>
-                                </p:cTn>
-                              </p:par>
-                              <p:par>
-                                <p:cTn id="43" presetID="10" presetClass="entr" presetSubtype="0" fill="hold" grpId="0" nodeType="withEffect">
-                                  <p:stCondLst>
-                                    <p:cond delay="720"/>
-                                  </p:stCondLst>
-                                  <p:childTnLst>
-                                    <p:set>
-                                      <p:cBhvr>
-                                        <p:cTn id="44" dur="1" fill="hold">
-                                          <p:stCondLst>
-                                            <p:cond delay="0"/>
-                                          </p:stCondLst>
-                                        </p:cTn>
-                                        <p:tgtEl>
-                                          <p:spTgt spid="10"/>
-                                        </p:tgtEl>
-                                        <p:attrNameLst>
-                                          <p:attrName>style.visibility</p:attrName>
-                                        </p:attrNameLst>
-                                      </p:cBhvr>
-                                      <p:to>
-                                        <p:strVal val="visible"/>
-                                      </p:to>
-                                    </p:set>
-                                    <p:animEffect transition="in" filter="fade">
-                                      <p:cBhvr>
-                                        <p:cTn id="45" dur="480"/>
-                                        <p:tgtEl>
-                                          <p:spTgt spid="10"/>
-                                        </p:tgtEl>
-                                      </p:cBhvr>
-                                    </p:animEffect>
-                                    <p:anim calcmode="lin" valueType="num">
-                                      <p:cBhvr>
-                                        <p:cTn id="46" dur="480" fill="hold"/>
-                                        <p:tgtEl>
-                                          <p:spTgt spid="10"/>
-                                        </p:tgtEl>
-                                        <p:attrNameLst>
-                                          <p:attrName>ppt_y</p:attrName>
-                                        </p:attrNameLst>
-                                      </p:cBhvr>
-                                      <p:tavLst>
-                                        <p:tav tm="0">
-                                          <p:val>
-                                            <p:strVal val="#ppt_y+0.045"/>
-                                          </p:val>
-                                        </p:tav>
-                                        <p:tav tm="100000">
-                                          <p:val>
-                                            <p:strVal val="#ppt_y"/>
-                                          </p:val>
-                                        </p:tav>
-                                      </p:tavLst>
-                                    </p:anim>
-                                  </p:childTnLst>
-                                </p:cTn>
-                              </p:par>
-                              <p:par>
-                                <p:cTn id="47" presetID="10" presetClass="entr" presetSubtype="0" fill="hold" grpId="0" nodeType="withEffect">
-                                  <p:stCondLst>
-                                    <p:cond delay="810"/>
-                                  </p:stCondLst>
-                                  <p:childTnLst>
-                                    <p:set>
-                                      <p:cBhvr>
-                                        <p:cTn id="48" dur="1" fill="hold">
-                                          <p:stCondLst>
-                                            <p:cond delay="0"/>
-                                          </p:stCondLst>
-                                        </p:cTn>
-                                        <p:tgtEl>
-                                          <p:spTgt spid="11"/>
-                                        </p:tgtEl>
-                                        <p:attrNameLst>
-                                          <p:attrName>style.visibility</p:attrName>
-                                        </p:attrNameLst>
-                                      </p:cBhvr>
-                                      <p:to>
-                                        <p:strVal val="visible"/>
-                                      </p:to>
-                                    </p:set>
-                                    <p:animEffect transition="in" filter="fade">
-                                      <p:cBhvr>
-                                        <p:cTn id="49" dur="480"/>
-                                        <p:tgtEl>
-                                          <p:spTgt spid="11"/>
-                                        </p:tgtEl>
-                                      </p:cBhvr>
-                                    </p:animEffect>
-                                    <p:anim calcmode="lin" valueType="num">
-                                      <p:cBhvr>
-                                        <p:cTn id="50" dur="480" fill="hold"/>
-                                        <p:tgtEl>
-                                          <p:spTgt spid="11"/>
-                                        </p:tgtEl>
-                                        <p:attrNameLst>
-                                          <p:attrName>ppt_y</p:attrName>
-                                        </p:attrNameLst>
-                                      </p:cBhvr>
-                                      <p:tavLst>
-                                        <p:tav tm="0">
-                                          <p:val>
-                                            <p:strVal val="#ppt_y+0.045"/>
-                                          </p:val>
-                                        </p:tav>
-                                        <p:tav tm="100000">
-                                          <p:val>
-                                            <p:strVal val="#ppt_y"/>
-                                          </p:val>
-                                        </p:tav>
-                                      </p:tavLst>
-                                    </p:anim>
-                                  </p:childTnLst>
-                                </p:cTn>
-                              </p:par>
-                              <p:par>
-                                <p:cTn id="51" presetID="10" presetClass="entr" presetSubtype="0" fill="hold" grpId="0" nodeType="withEffect">
-                                  <p:stCondLst>
-                                    <p:cond delay="900"/>
-                                  </p:stCondLst>
-                                  <p:childTnLst>
-                                    <p:set>
-                                      <p:cBhvr>
-                                        <p:cTn id="52" dur="1" fill="hold">
-                                          <p:stCondLst>
-                                            <p:cond delay="0"/>
-                                          </p:stCondLst>
-                                        </p:cTn>
-                                        <p:tgtEl>
-                                          <p:spTgt spid="12"/>
-                                        </p:tgtEl>
-                                        <p:attrNameLst>
-                                          <p:attrName>style.visibility</p:attrName>
-                                        </p:attrNameLst>
-                                      </p:cBhvr>
-                                      <p:to>
-                                        <p:strVal val="visible"/>
-                                      </p:to>
-                                    </p:set>
-                                    <p:animEffect transition="in" filter="fade">
-                                      <p:cBhvr>
-                                        <p:cTn id="53" dur="480"/>
-                                        <p:tgtEl>
-                                          <p:spTgt spid="12"/>
-                                        </p:tgtEl>
-                                      </p:cBhvr>
-                                    </p:animEffect>
-                                    <p:anim calcmode="lin" valueType="num">
-                                      <p:cBhvr>
-                                        <p:cTn id="54" dur="480" fill="hold"/>
-                                        <p:tgtEl>
-                                          <p:spTgt spid="12"/>
-                                        </p:tgtEl>
-                                        <p:attrNameLst>
-                                          <p:attrName>ppt_y</p:attrName>
-                                        </p:attrNameLst>
-                                      </p:cBhvr>
-                                      <p:tavLst>
-                                        <p:tav tm="0">
-                                          <p:val>
-                                            <p:strVal val="#ppt_y+0.045"/>
-                                          </p:val>
-                                        </p:tav>
-                                        <p:tav tm="100000">
-                                          <p:val>
-                                            <p:strVal val="#ppt_y"/>
-                                          </p:val>
-                                        </p:tav>
-                                      </p:tavLst>
-                                    </p:anim>
-                                  </p:childTnLst>
-                                </p:cTn>
-                              </p:par>
-                              <p:par>
-                                <p:cTn id="55" presetID="10" presetClass="entr" presetSubtype="0" fill="hold" grpId="0" nodeType="withEffect">
-                                  <p:stCondLst>
-                                    <p:cond delay="990"/>
-                                  </p:stCondLst>
-                                  <p:childTnLst>
-                                    <p:set>
-                                      <p:cBhvr>
-                                        <p:cTn id="56" dur="1" fill="hold">
-                                          <p:stCondLst>
-                                            <p:cond delay="0"/>
-                                          </p:stCondLst>
-                                        </p:cTn>
-                                        <p:tgtEl>
-                                          <p:spTgt spid="13"/>
-                                        </p:tgtEl>
-                                        <p:attrNameLst>
-                                          <p:attrName>style.visibility</p:attrName>
-                                        </p:attrNameLst>
-                                      </p:cBhvr>
-                                      <p:to>
-                                        <p:strVal val="visible"/>
-                                      </p:to>
-                                    </p:set>
-                                    <p:animEffect transition="in" filter="fade">
-                                      <p:cBhvr>
-                                        <p:cTn id="57" dur="480"/>
-                                        <p:tgtEl>
-                                          <p:spTgt spid="13"/>
-                                        </p:tgtEl>
-                                      </p:cBhvr>
-                                    </p:animEffect>
-                                    <p:anim calcmode="lin" valueType="num">
-                                      <p:cBhvr>
-                                        <p:cTn id="58" dur="480" fill="hold"/>
-                                        <p:tgtEl>
-                                          <p:spTgt spid="13"/>
-                                        </p:tgtEl>
-                                        <p:attrNameLst>
-                                          <p:attrName>ppt_y</p:attrName>
-                                        </p:attrNameLst>
-                                      </p:cBhvr>
-                                      <p:tavLst>
-                                        <p:tav tm="0">
-                                          <p:val>
-                                            <p:strVal val="#ppt_y+0.045"/>
-                                          </p:val>
-                                        </p:tav>
-                                        <p:tav tm="100000">
-                                          <p:val>
-                                            <p:strVal val="#ppt_y"/>
-                                          </p:val>
-                                        </p:tav>
-                                      </p:tavLst>
-                                    </p:anim>
-                                  </p:childTnLst>
-                                </p:cTn>
-                              </p:par>
-                              <p:par>
-                                <p:cTn id="59" presetID="10" presetClass="entr" presetSubtype="0" fill="hold" grpId="0" nodeType="withEffect">
-                                  <p:stCondLst>
-                                    <p:cond delay="1080"/>
-                                  </p:stCondLst>
-                                  <p:childTnLst>
-                                    <p:set>
-                                      <p:cBhvr>
-                                        <p:cTn id="60" dur="1" fill="hold">
-                                          <p:stCondLst>
-                                            <p:cond delay="0"/>
-                                          </p:stCondLst>
-                                        </p:cTn>
-                                        <p:tgtEl>
-                                          <p:spTgt spid="14"/>
-                                        </p:tgtEl>
-                                        <p:attrNameLst>
-                                          <p:attrName>style.visibility</p:attrName>
-                                        </p:attrNameLst>
-                                      </p:cBhvr>
-                                      <p:to>
-                                        <p:strVal val="visible"/>
-                                      </p:to>
-                                    </p:set>
-                                    <p:animEffect transition="in" filter="fade">
-                                      <p:cBhvr>
-                                        <p:cTn id="61" dur="480"/>
-                                        <p:tgtEl>
-                                          <p:spTgt spid="14"/>
-                                        </p:tgtEl>
-                                      </p:cBhvr>
-                                    </p:animEffect>
-                                    <p:anim calcmode="lin" valueType="num">
-                                      <p:cBhvr>
-                                        <p:cTn id="62" dur="480" fill="hold"/>
-                                        <p:tgtEl>
-                                          <p:spTgt spid="14"/>
-                                        </p:tgtEl>
-                                        <p:attrNameLst>
-                                          <p:attrName>ppt_y</p:attrName>
-                                        </p:attrNameLst>
-                                      </p:cBhvr>
-                                      <p:tavLst>
-                                        <p:tav tm="0">
-                                          <p:val>
-                                            <p:strVal val="#ppt_y+0.045"/>
-                                          </p:val>
-                                        </p:tav>
-                                        <p:tav tm="100000">
-                                          <p:val>
-                                            <p:strVal val="#ppt_y"/>
-                                          </p:val>
-                                        </p:tav>
-                                      </p:tavLst>
-                                    </p:anim>
-                                  </p:childTnLst>
-                                </p:cTn>
-                              </p:par>
-                              <p:par>
-                                <p:cTn id="63" presetID="10" presetClass="entr" presetSubtype="0" fill="hold" grpId="0" nodeType="withEffect">
-                                  <p:stCondLst>
-                                    <p:cond delay="1170"/>
-                                  </p:stCondLst>
-                                  <p:childTnLst>
-                                    <p:set>
-                                      <p:cBhvr>
-                                        <p:cTn id="64" dur="1" fill="hold">
-                                          <p:stCondLst>
-                                            <p:cond delay="0"/>
-                                          </p:stCondLst>
-                                        </p:cTn>
-                                        <p:tgtEl>
-                                          <p:spTgt spid="15"/>
-                                        </p:tgtEl>
-                                        <p:attrNameLst>
-                                          <p:attrName>style.visibility</p:attrName>
-                                        </p:attrNameLst>
-                                      </p:cBhvr>
-                                      <p:to>
-                                        <p:strVal val="visible"/>
-                                      </p:to>
-                                    </p:set>
-                                    <p:animEffect transition="in" filter="fade">
-                                      <p:cBhvr>
-                                        <p:cTn id="65" dur="480"/>
-                                        <p:tgtEl>
-                                          <p:spTgt spid="15"/>
-                                        </p:tgtEl>
-                                      </p:cBhvr>
-                                    </p:animEffect>
-                                    <p:anim calcmode="lin" valueType="num">
-                                      <p:cBhvr>
-                                        <p:cTn id="66" dur="480" fill="hold"/>
-                                        <p:tgtEl>
-                                          <p:spTgt spid="15"/>
-                                        </p:tgtEl>
-                                        <p:attrNameLst>
-                                          <p:attrName>ppt_y</p:attrName>
-                                        </p:attrNameLst>
-                                      </p:cBhvr>
-                                      <p:tavLst>
-                                        <p:tav tm="0">
-                                          <p:val>
-                                            <p:strVal val="#ppt_y+0.045"/>
-                                          </p:val>
-                                        </p:tav>
-                                        <p:tav tm="100000">
-                                          <p:val>
-                                            <p:strVal val="#ppt_y"/>
-                                          </p:val>
-                                        </p:tav>
-                                      </p:tavLst>
-                                    </p:anim>
-                                  </p:childTnLst>
-                                </p:cTn>
-                              </p:par>
-                              <p:par>
-                                <p:cTn id="67" presetID="10" presetClass="entr" presetSubtype="0" fill="hold" grpId="0" nodeType="withEffect">
-                                  <p:stCondLst>
-                                    <p:cond delay="1260"/>
-                                  </p:stCondLst>
-                                  <p:childTnLst>
-                                    <p:set>
-                                      <p:cBhvr>
-                                        <p:cTn id="68" dur="1" fill="hold">
-                                          <p:stCondLst>
-                                            <p:cond delay="0"/>
-                                          </p:stCondLst>
-                                        </p:cTn>
-                                        <p:tgtEl>
-                                          <p:spTgt spid="16"/>
-                                        </p:tgtEl>
-                                        <p:attrNameLst>
-                                          <p:attrName>style.visibility</p:attrName>
-                                        </p:attrNameLst>
-                                      </p:cBhvr>
-                                      <p:to>
-                                        <p:strVal val="visible"/>
-                                      </p:to>
-                                    </p:set>
-                                    <p:animEffect transition="in" filter="fade">
-                                      <p:cBhvr>
-                                        <p:cTn id="69" dur="480"/>
-                                        <p:tgtEl>
-                                          <p:spTgt spid="16"/>
-                                        </p:tgtEl>
-                                      </p:cBhvr>
-                                    </p:animEffect>
-                                    <p:anim calcmode="lin" valueType="num">
-                                      <p:cBhvr>
-                                        <p:cTn id="70" dur="480" fill="hold"/>
-                                        <p:tgtEl>
-                                          <p:spTgt spid="16"/>
-                                        </p:tgtEl>
-                                        <p:attrNameLst>
-                                          <p:attrName>ppt_y</p:attrName>
-                                        </p:attrNameLst>
-                                      </p:cBhvr>
-                                      <p:tavLst>
-                                        <p:tav tm="0">
-                                          <p:val>
-                                            <p:strVal val="#ppt_y+0.045"/>
-                                          </p:val>
-                                        </p:tav>
-                                        <p:tav tm="100000">
-                                          <p:val>
-                                            <p:strVal val="#ppt_y"/>
-                                          </p:val>
-                                        </p:tav>
-                                      </p:tavLst>
-                                    </p:anim>
-                                  </p:childTnLst>
-                                </p:cTn>
-                              </p:par>
-                              <p:par>
-                                <p:cTn id="71" presetID="10" presetClass="entr" presetSubtype="0" fill="hold" grpId="0" nodeType="withEffect">
-                                  <p:stCondLst>
-                                    <p:cond delay="1350"/>
-                                  </p:stCondLst>
-                                  <p:childTnLst>
-                                    <p:set>
-                                      <p:cBhvr>
-                                        <p:cTn id="72" dur="1" fill="hold">
-                                          <p:stCondLst>
-                                            <p:cond delay="0"/>
-                                          </p:stCondLst>
-                                        </p:cTn>
-                                        <p:tgtEl>
-                                          <p:spTgt spid="17"/>
-                                        </p:tgtEl>
-                                        <p:attrNameLst>
-                                          <p:attrName>style.visibility</p:attrName>
-                                        </p:attrNameLst>
-                                      </p:cBhvr>
-                                      <p:to>
-                                        <p:strVal val="visible"/>
-                                      </p:to>
-                                    </p:set>
-                                    <p:animEffect transition="in" filter="fade">
-                                      <p:cBhvr>
-                                        <p:cTn id="73" dur="480"/>
-                                        <p:tgtEl>
-                                          <p:spTgt spid="17"/>
-                                        </p:tgtEl>
-                                      </p:cBhvr>
-                                    </p:animEffect>
-                                    <p:anim calcmode="lin" valueType="num">
-                                      <p:cBhvr>
-                                        <p:cTn id="74" dur="480" fill="hold"/>
-                                        <p:tgtEl>
-                                          <p:spTgt spid="17"/>
-                                        </p:tgtEl>
-                                        <p:attrNameLst>
-                                          <p:attrName>ppt_y</p:attrName>
-                                        </p:attrNameLst>
-                                      </p:cBhvr>
-                                      <p:tavLst>
-                                        <p:tav tm="0">
-                                          <p:val>
-                                            <p:strVal val="#ppt_y+0.045"/>
-                                          </p:val>
-                                        </p:tav>
-                                        <p:tav tm="100000">
-                                          <p:val>
-                                            <p:strVal val="#ppt_y"/>
-                                          </p:val>
-                                        </p:tav>
-                                      </p:tavLst>
-                                    </p:anim>
-                                  </p:childTnLst>
-                                </p:cTn>
-                              </p:par>
-                              <p:par>
-                                <p:cTn id="75" presetID="10" presetClass="entr" presetSubtype="0" fill="hold" grpId="0" nodeType="withEffect">
-                                  <p:stCondLst>
-                                    <p:cond delay="1440"/>
-                                  </p:stCondLst>
-                                  <p:childTnLst>
-                                    <p:set>
-                                      <p:cBhvr>
-                                        <p:cTn id="76" dur="1" fill="hold">
-                                          <p:stCondLst>
-                                            <p:cond delay="0"/>
-                                          </p:stCondLst>
-                                        </p:cTn>
-                                        <p:tgtEl>
-                                          <p:spTgt spid="18"/>
-                                        </p:tgtEl>
-                                        <p:attrNameLst>
-                                          <p:attrName>style.visibility</p:attrName>
-                                        </p:attrNameLst>
-                                      </p:cBhvr>
-                                      <p:to>
-                                        <p:strVal val="visible"/>
-                                      </p:to>
-                                    </p:set>
-                                    <p:animEffect transition="in" filter="fade">
-                                      <p:cBhvr>
-                                        <p:cTn id="77" dur="480"/>
-                                        <p:tgtEl>
-                                          <p:spTgt spid="18"/>
-                                        </p:tgtEl>
-                                      </p:cBhvr>
-                                    </p:animEffect>
-                                    <p:anim calcmode="lin" valueType="num">
-                                      <p:cBhvr>
-                                        <p:cTn id="78" dur="480" fill="hold"/>
-                                        <p:tgtEl>
-                                          <p:spTgt spid="18"/>
-                                        </p:tgtEl>
-                                        <p:attrNameLst>
-                                          <p:attrName>ppt_y</p:attrName>
-                                        </p:attrNameLst>
-                                      </p:cBhvr>
-                                      <p:tavLst>
-                                        <p:tav tm="0">
-                                          <p:val>
-                                            <p:strVal val="#ppt_y+0.045"/>
-                                          </p:val>
-                                        </p:tav>
-                                        <p:tav tm="100000">
-                                          <p:val>
-                                            <p:strVal val="#ppt_y"/>
-                                          </p:val>
-                                        </p:tav>
-                                      </p:tavLst>
-                                    </p:anim>
-                                  </p:childTnLst>
-                                </p:cTn>
-                              </p:par>
-                              <p:par>
-                                <p:cTn id="79" presetID="10" presetClass="entr" presetSubtype="0" fill="hold" grpId="0" nodeType="withEffect">
-                                  <p:stCondLst>
-                                    <p:cond delay="1530"/>
-                                  </p:stCondLst>
-                                  <p:childTnLst>
-                                    <p:set>
-                                      <p:cBhvr>
-                                        <p:cTn id="80" dur="1" fill="hold">
-                                          <p:stCondLst>
-                                            <p:cond delay="0"/>
-                                          </p:stCondLst>
-                                        </p:cTn>
-                                        <p:tgtEl>
-                                          <p:spTgt spid="19"/>
-                                        </p:tgtEl>
-                                        <p:attrNameLst>
-                                          <p:attrName>style.visibility</p:attrName>
-                                        </p:attrNameLst>
-                                      </p:cBhvr>
-                                      <p:to>
-                                        <p:strVal val="visible"/>
-                                      </p:to>
-                                    </p:set>
-                                    <p:animEffect transition="in" filter="fade">
-                                      <p:cBhvr>
-                                        <p:cTn id="81" dur="480"/>
-                                        <p:tgtEl>
-                                          <p:spTgt spid="19"/>
-                                        </p:tgtEl>
-                                      </p:cBhvr>
-                                    </p:animEffect>
-                                    <p:anim calcmode="lin" valueType="num">
-                                      <p:cBhvr>
-                                        <p:cTn id="82" dur="480" fill="hold"/>
-                                        <p:tgtEl>
-                                          <p:spTgt spid="19"/>
-                                        </p:tgtEl>
-                                        <p:attrNameLst>
-                                          <p:attrName>ppt_y</p:attrName>
-                                        </p:attrNameLst>
-                                      </p:cBhvr>
-                                      <p:tavLst>
-                                        <p:tav tm="0">
-                                          <p:val>
-                                            <p:strVal val="#ppt_y+0.045"/>
-                                          </p:val>
-                                        </p:tav>
-                                        <p:tav tm="100000">
-                                          <p:val>
-                                            <p:strVal val="#ppt_y"/>
-                                          </p:val>
-                                        </p:tav>
-                                      </p:tavLst>
-                                    </p:anim>
-                                  </p:childTnLst>
-                                </p:cTn>
-                              </p:par>
-                              <p:par>
-                                <p:cTn id="83" presetID="10" presetClass="entr" presetSubtype="0" fill="hold" grpId="0" nodeType="withEffect">
-                                  <p:stCondLst>
-                                    <p:cond delay="1620"/>
-                                  </p:stCondLst>
-                                  <p:childTnLst>
-                                    <p:set>
-                                      <p:cBhvr>
-                                        <p:cTn id="84" dur="1" fill="hold">
-                                          <p:stCondLst>
-                                            <p:cond delay="0"/>
-                                          </p:stCondLst>
-                                        </p:cTn>
-                                        <p:tgtEl>
-                                          <p:spTgt spid="20"/>
-                                        </p:tgtEl>
-                                        <p:attrNameLst>
-                                          <p:attrName>style.visibility</p:attrName>
-                                        </p:attrNameLst>
-                                      </p:cBhvr>
-                                      <p:to>
-                                        <p:strVal val="visible"/>
-                                      </p:to>
-                                    </p:set>
-                                    <p:animEffect transition="in" filter="fade">
-                                      <p:cBhvr>
-                                        <p:cTn id="85" dur="480"/>
-                                        <p:tgtEl>
-                                          <p:spTgt spid="20"/>
-                                        </p:tgtEl>
-                                      </p:cBhvr>
-                                    </p:animEffect>
-                                    <p:anim calcmode="lin" valueType="num">
-                                      <p:cBhvr>
-                                        <p:cTn id="86" dur="480" fill="hold"/>
-                                        <p:tgtEl>
-                                          <p:spTgt spid="20"/>
-                                        </p:tgtEl>
-                                        <p:attrNameLst>
-                                          <p:attrName>ppt_y</p:attrName>
-                                        </p:attrNameLst>
-                                      </p:cBhvr>
-                                      <p:tavLst>
-                                        <p:tav tm="0">
-                                          <p:val>
-                                            <p:strVal val="#ppt_y+0.045"/>
-                                          </p:val>
-                                        </p:tav>
-                                        <p:tav tm="100000">
-                                          <p:val>
-                                            <p:strVal val="#ppt_y"/>
-                                          </p:val>
-                                        </p:tav>
-                                      </p:tavLst>
-                                    </p:anim>
-                                  </p:childTnLst>
-                                </p:cTn>
-                              </p:par>
-                              <p:par>
-                                <p:cTn id="87" presetID="10" presetClass="entr" presetSubtype="0" fill="hold" grpId="0" nodeType="withEffect">
-                                  <p:stCondLst>
-                                    <p:cond delay="1710"/>
-                                  </p:stCondLst>
-                                  <p:childTnLst>
-                                    <p:set>
-                                      <p:cBhvr>
-                                        <p:cTn id="88" dur="1" fill="hold">
-                                          <p:stCondLst>
-                                            <p:cond delay="0"/>
-                                          </p:stCondLst>
-                                        </p:cTn>
-                                        <p:tgtEl>
-                                          <p:spTgt spid="21"/>
-                                        </p:tgtEl>
-                                        <p:attrNameLst>
-                                          <p:attrName>style.visibility</p:attrName>
-                                        </p:attrNameLst>
-                                      </p:cBhvr>
-                                      <p:to>
-                                        <p:strVal val="visible"/>
-                                      </p:to>
-                                    </p:set>
-                                    <p:animEffect transition="in" filter="fade">
-                                      <p:cBhvr>
-                                        <p:cTn id="89" dur="480"/>
-                                        <p:tgtEl>
-                                          <p:spTgt spid="21"/>
-                                        </p:tgtEl>
-                                      </p:cBhvr>
-                                    </p:animEffect>
-                                    <p:anim calcmode="lin" valueType="num">
-                                      <p:cBhvr>
-                                        <p:cTn id="90" dur="480" fill="hold"/>
-                                        <p:tgtEl>
-                                          <p:spTgt spid="21"/>
-                                        </p:tgtEl>
-                                        <p:attrNameLst>
-                                          <p:attrName>ppt_y</p:attrName>
-                                        </p:attrNameLst>
-                                      </p:cBhvr>
-                                      <p:tavLst>
-                                        <p:tav tm="0">
-                                          <p:val>
-                                            <p:strVal val="#ppt_y+0.045"/>
-                                          </p:val>
-                                        </p:tav>
-                                        <p:tav tm="100000">
-                                          <p:val>
-                                            <p:strVal val="#ppt_y"/>
-                                          </p:val>
-                                        </p:tav>
-                                      </p:tavLst>
-                                    </p:anim>
-                                  </p:childTnLst>
-                                </p:cTn>
-                              </p:par>
-                            </p:childTnLst>
-                          </p:cTn>
-                        </p:par>
-                      </p:childTnLst>
-                    </p:cTn>
-                  </p:par>
-                </p:childTnLst>
-              </p:cTn>
-              <p:prevCondLst>
-                <p:cond evt="onPrev" delay="0">
-                  <p:tgtEl>
-                    <p:sldTgt/>
-                  </p:tgtEl>
-                </p:cond>
-              </p:prevCondLst>
-              <p:nextCondLst>
-                <p:cond evt="onNext" delay="0">
-                  <p:tgtEl>
-                    <p:sldTgt/>
-                  </p:tgtEl>
-                </p:cond>
-              </p:nextCondLst>
-            </p:seq>
-          </p:childTnLst>
-        </p:cTn>
-      </p:par>
-    </p:tnLst>
-    <p:bldLst>
-      <p:bldP spid="2" grpId="0" animBg="1"/>
-      <p:bldP spid="3" grpId="0"/>
-      <p:bldP spid="4" grpId="0" animBg="1"/>
-      <p:bldP spid="5" grpId="0"/>
-      <p:bldGraphic spid="6" grpId="0">
-        <p:bldAsOne/>
-      </p:bldGraphic>
-      <p:bldP spid="7" grpId="0" animBg="1"/>
-      <p:bldP spid="8" grpId="0" animBg="1"/>
-      <p:bldP spid="9" grpId="0"/>
-      <p:bldP spid="10" grpId="0"/>
-      <p:bldP spid="11" grpId="0" animBg="1"/>
-      <p:bldP spid="12" grpId="0" animBg="1"/>
-      <p:bldP spid="13" grpId="0"/>
-      <p:bldP spid="14" grpId="0"/>
-      <p:bldP spid="15" grpId="0" animBg="1"/>
-      <p:bldP spid="16" grpId="0" animBg="1"/>
-      <p:bldP spid="17" grpId="0"/>
-      <p:bldP spid="18" grpId="0"/>
-      <p:bldP spid="19" grpId="0" animBg="1"/>
-      <p:bldP spid="20" grpId="0"/>
-      <p:bldP spid="21" grpId="0"/>
     </p:bldLst>
   </p:timing>
 </p:sld>
